--- a/docs/slides/Modulo 4/dia_3.pptx
+++ b/docs/slides/Modulo 4/dia_3.pptx
@@ -25,6 +25,10 @@
     <p:sldId id="273" r:id="rId24"/>
     <p:sldId id="274" r:id="rId25"/>
     <p:sldId id="275" r:id="rId26"/>
+    <p:sldId id="276" r:id="rId27"/>
+    <p:sldId id="277" r:id="rId28"/>
+    <p:sldId id="278" r:id="rId29"/>
+    <p:sldId id="279" r:id="rId30"/>
   </p:sldIdLst>
   <p:sldSz cx="12188952" cy="6858000" type="screen4x3"/>
   <p:notesSz cx="6858000" cy="9144000"/>
@@ -6784,7 +6788,7 @@
         <p:spPr>
           <a:xfrm>
             <a:off x="0" y="0"/>
-            <a:ext cx="12188952" cy="6858000"/>
+            <a:ext cx="12188952" cy="73152"/>
           </a:xfrm>
           <a:prstGeom prst="rect">
             <a:avLst/>
@@ -6839,6 +6843,840 @@
           <a:lstStyle/>
           <a:p>
             <a:pPr algn="l">
+              <a:defRPr sz="3200" b="1">
+                <a:solidFill>
+                  <a:srgbClr val="22627E"/>
+                </a:solidFill>
+                <a:latin typeface="Calibri"/>
+              </a:defRPr>
+            </a:pPr>
+            <a:r>
+              <a:t>Respuestas al debate (1/2)</a:t>
+            </a:r>
+          </a:p>
+        </p:txBody>
+      </p:sp>
+      <p:sp>
+        <p:nvSpPr>
+          <p:cNvPr id="4" name="Rectangle 3"/>
+          <p:cNvSpPr/>
+          <p:nvPr/>
+        </p:nvSpPr>
+        <p:spPr>
+          <a:xfrm>
+            <a:off x="457200" y="1051560"/>
+            <a:ext cx="10972800" cy="27432"/>
+          </a:xfrm>
+          <a:prstGeom prst="rect">
+            <a:avLst/>
+          </a:prstGeom>
+          <a:solidFill>
+            <a:srgbClr val="22627E"/>
+          </a:solidFill>
+          <a:ln>
+            <a:noFill/>
+          </a:ln>
+        </p:spPr>
+        <p:style>
+          <a:lnRef idx="1">
+            <a:schemeClr val="accent1"/>
+          </a:lnRef>
+          <a:fillRef idx="3">
+            <a:schemeClr val="accent1"/>
+          </a:fillRef>
+          <a:effectRef idx="2">
+            <a:schemeClr val="accent1"/>
+          </a:effectRef>
+          <a:fontRef idx="minor">
+            <a:schemeClr val="lt1"/>
+          </a:fontRef>
+        </p:style>
+        <p:txBody>
+          <a:bodyPr rtlCol="0" anchor="ctr"/>
+          <a:lstStyle/>
+          <a:p>
+            <a:pPr algn="ctr"/>
+          </a:p>
+        </p:txBody>
+      </p:sp>
+      <p:sp>
+        <p:nvSpPr>
+          <p:cNvPr id="5" name="TextBox 4"/>
+          <p:cNvSpPr txBox="1"/>
+          <p:nvPr/>
+        </p:nvSpPr>
+        <p:spPr>
+          <a:xfrm>
+            <a:off x="640080" y="1280160"/>
+            <a:ext cx="10515600" cy="5029200"/>
+          </a:xfrm>
+          <a:prstGeom prst="rect">
+            <a:avLst/>
+          </a:prstGeom>
+          <a:noFill/>
+        </p:spPr>
+        <p:txBody>
+          <a:bodyPr wrap="square">
+            <a:spAutoFit/>
+          </a:bodyPr>
+          <a:lstStyle/>
+          <a:p>
+            <a:pPr>
+              <a:spcAft>
+                <a:spcPts val="800"/>
+              </a:spcAft>
+              <a:defRPr sz="2000">
+                <a:solidFill>
+                  <a:srgbClr val="333333"/>
+                </a:solidFill>
+                <a:latin typeface="Calibri"/>
+              </a:defRPr>
+            </a:pPr>
+            <a:r>
+              <a:t>1. Logica en chaincode vs app cliente:</a:t>
+            </a:r>
+          </a:p>
+          <a:p>
+            <a:pPr lvl="1">
+              <a:spcAft>
+                <a:spcPts val="400"/>
+              </a:spcAft>
+              <a:defRPr sz="1700">
+                <a:solidFill>
+                  <a:srgbClr val="666666"/>
+                </a:solidFill>
+                <a:latin typeface="Calibri"/>
+              </a:defRPr>
+            </a:pPr>
+            <a:r>
+              <a:t>    En el chaincode: reglas de negocio inmutables (saldos, permisos, transiciones validas).</a:t>
+            </a:r>
+          </a:p>
+          <a:p>
+            <a:pPr lvl="1">
+              <a:spcAft>
+                <a:spcPts val="400"/>
+              </a:spcAft>
+              <a:defRPr sz="1700">
+                <a:solidFill>
+                  <a:srgbClr val="666666"/>
+                </a:solidFill>
+                <a:latin typeface="Calibri"/>
+              </a:defRPr>
+            </a:pPr>
+            <a:r>
+              <a:t>    En el cliente: UI, orquestacion, validaciones de formato, UX.</a:t>
+            </a:r>
+          </a:p>
+          <a:p>
+            <a:pPr lvl="1">
+              <a:spcAft>
+                <a:spcPts val="400"/>
+              </a:spcAft>
+              <a:defRPr sz="1700">
+                <a:solidFill>
+                  <a:srgbClr val="666666"/>
+                </a:solidFill>
+                <a:latin typeface="Calibri"/>
+              </a:defRPr>
+            </a:pPr>
+            <a:r>
+              <a:t>    Regla: si se puede saltar desde otro cliente, NO es regla de negocio real.</a:t>
+            </a:r>
+          </a:p>
+          <a:p>
+            <a:pPr lvl="1">
+              <a:spcAft>
+                <a:spcPts val="400"/>
+              </a:spcAft>
+              <a:defRPr sz="1700">
+                <a:solidFill>
+                  <a:srgbClr val="666666"/>
+                </a:solidFill>
+                <a:latin typeface="Calibri"/>
+              </a:defRPr>
+            </a:pPr>
+            <a:r>
+              <a:t>    Si la regla afecta al ledger (consistencia entre todos los peers) -&gt; chaincode.</a:t>
+            </a:r>
+          </a:p>
+          <a:p>
+            <a:pPr>
+              <a:spcAft>
+                <a:spcPts val="800"/>
+              </a:spcAft>
+              <a:defRPr sz="2000">
+                <a:solidFill>
+                  <a:srgbClr val="333333"/>
+                </a:solidFill>
+                <a:latin typeface="Calibri"/>
+              </a:defRPr>
+            </a:pPr>
+            <a:r>
+              <a:t>2. Cambiar la maquina de estados despues del despliegue:</a:t>
+            </a:r>
+          </a:p>
+          <a:p>
+            <a:pPr lvl="1">
+              <a:spcAft>
+                <a:spcPts val="400"/>
+              </a:spcAft>
+              <a:defRPr sz="1700">
+                <a:solidFill>
+                  <a:srgbClr val="666666"/>
+                </a:solidFill>
+                <a:latin typeface="Calibri"/>
+              </a:defRPr>
+            </a:pPr>
+            <a:r>
+              <a:t>    Se despliega una nueva version del chaincode con sequence incrementado.</a:t>
+            </a:r>
+          </a:p>
+          <a:p>
+            <a:pPr lvl="1">
+              <a:spcAft>
+                <a:spcPts val="400"/>
+              </a:spcAft>
+              <a:defRPr sz="1700">
+                <a:solidFill>
+                  <a:srgbClr val="666666"/>
+                </a:solidFill>
+                <a:latin typeface="Calibri"/>
+              </a:defRPr>
+            </a:pPr>
+            <a:r>
+              <a:t>    El World State se preserva — los datos antiguos siguen ahi.</a:t>
+            </a:r>
+          </a:p>
+          <a:p>
+            <a:pPr lvl="1">
+              <a:spcAft>
+                <a:spcPts val="400"/>
+              </a:spcAft>
+              <a:defRPr sz="1700">
+                <a:solidFill>
+                  <a:srgbClr val="666666"/>
+                </a:solidFill>
+                <a:latin typeface="Calibri"/>
+              </a:defRPr>
+            </a:pPr>
+            <a:r>
+              <a:t>    Estrategias: anadir estados nuevos sin romper los antiguos (retrocompatibilidad).</a:t>
+            </a:r>
+          </a:p>
+          <a:p>
+            <a:pPr lvl="1">
+              <a:spcAft>
+                <a:spcPts val="400"/>
+              </a:spcAft>
+              <a:defRPr sz="1700">
+                <a:solidFill>
+                  <a:srgbClr val="666666"/>
+                </a:solidFill>
+                <a:latin typeface="Calibri"/>
+              </a:defRPr>
+            </a:pPr>
+            <a:r>
+              <a:t>    Si la transicion cambia radicalmente: migracion perezosa en cada lectura.</a:t>
+            </a:r>
+          </a:p>
+          <a:p>
+            <a:pPr lvl="1">
+              <a:spcAft>
+                <a:spcPts val="400"/>
+              </a:spcAft>
+              <a:defRPr sz="1700">
+                <a:solidFill>
+                  <a:srgbClr val="666666"/>
+                </a:solidFill>
+                <a:latin typeface="Calibri"/>
+              </a:defRPr>
+            </a:pPr>
+            <a:r>
+              <a:t>    Cuidado: nunca cambies el significado de un estado existente, crea uno nuevo.</a:t>
+            </a:r>
+          </a:p>
+          <a:p>
+            <a:pPr>
+              <a:spcAft>
+                <a:spcPts val="800"/>
+              </a:spcAft>
+              <a:defRPr sz="2000">
+                <a:solidFill>
+                  <a:srgbClr val="333333"/>
+                </a:solidFill>
+                <a:latin typeface="Calibri"/>
+              </a:defRPr>
+            </a:pPr>
+            <a:r>
+              <a:t>3. Private Data y GDPR:</a:t>
+            </a:r>
+          </a:p>
+          <a:p>
+            <a:pPr lvl="1">
+              <a:spcAft>
+                <a:spcPts val="400"/>
+              </a:spcAft>
+              <a:defRPr sz="1700">
+                <a:solidFill>
+                  <a:srgbClr val="666666"/>
+                </a:solidFill>
+                <a:latin typeface="Calibri"/>
+              </a:defRPr>
+            </a:pPr>
+            <a:r>
+              <a:t>    Private Data ayuda pero NO cumple GDPR por si solo.</a:t>
+            </a:r>
+          </a:p>
+          <a:p>
+            <a:pPr lvl="1">
+              <a:spcAft>
+                <a:spcPts val="400"/>
+              </a:spcAft>
+              <a:defRPr sz="1700">
+                <a:solidFill>
+                  <a:srgbClr val="666666"/>
+                </a:solidFill>
+                <a:latin typeface="Calibri"/>
+              </a:defRPr>
+            </a:pPr>
+            <a:r>
+              <a:t>    El hash queda on-chain para siempre (inmutable) — potencialmente trazable.</a:t>
+            </a:r>
+          </a:p>
+          <a:p>
+            <a:pPr lvl="1">
+              <a:spcAft>
+                <a:spcPts val="400"/>
+              </a:spcAft>
+              <a:defRPr sz="1700">
+                <a:solidFill>
+                  <a:srgbClr val="666666"/>
+                </a:solidFill>
+                <a:latin typeface="Calibri"/>
+              </a:defRPr>
+            </a:pPr>
+            <a:r>
+              <a:t>    blockToLive permite caducar datos privados, pero el hash sigue.</a:t>
+            </a:r>
+          </a:p>
+          <a:p>
+            <a:pPr lvl="1">
+              <a:spcAft>
+                <a:spcPts val="400"/>
+              </a:spcAft>
+              <a:defRPr sz="1700">
+                <a:solidFill>
+                  <a:srgbClr val="666666"/>
+                </a:solidFill>
+                <a:latin typeface="Calibri"/>
+              </a:defRPr>
+            </a:pPr>
+            <a:r>
+              <a:t>    Mejor practica: datos personales OFF-CHAIN, solo hash/referencia on-chain.</a:t>
+            </a:r>
+          </a:p>
+          <a:p>
+            <a:pPr lvl="1">
+              <a:spcAft>
+                <a:spcPts val="400"/>
+              </a:spcAft>
+              <a:defRPr sz="1700">
+                <a:solidFill>
+                  <a:srgbClr val="666666"/>
+                </a:solidFill>
+                <a:latin typeface="Calibri"/>
+              </a:defRPr>
+            </a:pPr>
+            <a:r>
+              <a:t>    Cuando borras el dato off-chain, el hash on-chain queda huerfano (pseudonimizacion efectiva).</a:t>
+            </a:r>
+          </a:p>
+        </p:txBody>
+      </p:sp>
+    </p:spTree>
+  </p:cSld>
+  <p:clrMapOvr>
+    <a:masterClrMapping/>
+  </p:clrMapOvr>
+</p:sld>
+</file>
+
+<file path=ppt/slides/slide21.xml><?xml version="1.0" encoding="utf-8"?>
+<p:sld xmlns:a="http://schemas.openxmlformats.org/drawingml/2006/main" xmlns:p="http://schemas.openxmlformats.org/presentationml/2006/main" xmlns:r="http://schemas.openxmlformats.org/officeDocument/2006/relationships">
+  <p:cSld>
+    <p:spTree>
+      <p:nvGrpSpPr>
+        <p:cNvPr id="1" name=""/>
+        <p:cNvGrpSpPr/>
+        <p:nvPr/>
+      </p:nvGrpSpPr>
+      <p:grpSpPr/>
+      <p:sp>
+        <p:nvSpPr>
+          <p:cNvPr id="2" name="Rectangle 1"/>
+          <p:cNvSpPr/>
+          <p:nvPr/>
+        </p:nvSpPr>
+        <p:spPr>
+          <a:xfrm>
+            <a:off x="0" y="0"/>
+            <a:ext cx="12188952" cy="73152"/>
+          </a:xfrm>
+          <a:prstGeom prst="rect">
+            <a:avLst/>
+          </a:prstGeom>
+          <a:solidFill>
+            <a:srgbClr val="22627E"/>
+          </a:solidFill>
+          <a:ln>
+            <a:noFill/>
+          </a:ln>
+        </p:spPr>
+        <p:style>
+          <a:lnRef idx="1">
+            <a:schemeClr val="accent1"/>
+          </a:lnRef>
+          <a:fillRef idx="3">
+            <a:schemeClr val="accent1"/>
+          </a:fillRef>
+          <a:effectRef idx="2">
+            <a:schemeClr val="accent1"/>
+          </a:effectRef>
+          <a:fontRef idx="minor">
+            <a:schemeClr val="lt1"/>
+          </a:fontRef>
+        </p:style>
+        <p:txBody>
+          <a:bodyPr rtlCol="0" anchor="ctr"/>
+          <a:lstStyle/>
+          <a:p>
+            <a:pPr algn="ctr"/>
+          </a:p>
+        </p:txBody>
+      </p:sp>
+      <p:sp>
+        <p:nvSpPr>
+          <p:cNvPr id="3" name="TextBox 2"/>
+          <p:cNvSpPr txBox="1"/>
+          <p:nvPr/>
+        </p:nvSpPr>
+        <p:spPr>
+          <a:xfrm>
+            <a:off x="457200" y="274320"/>
+            <a:ext cx="10972800" cy="731520"/>
+          </a:xfrm>
+          <a:prstGeom prst="rect">
+            <a:avLst/>
+          </a:prstGeom>
+          <a:noFill/>
+        </p:spPr>
+        <p:txBody>
+          <a:bodyPr wrap="square"/>
+          <a:lstStyle/>
+          <a:p>
+            <a:pPr algn="l">
+              <a:defRPr sz="3200" b="1">
+                <a:solidFill>
+                  <a:srgbClr val="22627E"/>
+                </a:solidFill>
+                <a:latin typeface="Calibri"/>
+              </a:defRPr>
+            </a:pPr>
+            <a:r>
+              <a:t>Respuestas al debate (2/2)</a:t>
+            </a:r>
+          </a:p>
+        </p:txBody>
+      </p:sp>
+      <p:sp>
+        <p:nvSpPr>
+          <p:cNvPr id="4" name="Rectangle 3"/>
+          <p:cNvSpPr/>
+          <p:nvPr/>
+        </p:nvSpPr>
+        <p:spPr>
+          <a:xfrm>
+            <a:off x="457200" y="1051560"/>
+            <a:ext cx="10972800" cy="27432"/>
+          </a:xfrm>
+          <a:prstGeom prst="rect">
+            <a:avLst/>
+          </a:prstGeom>
+          <a:solidFill>
+            <a:srgbClr val="22627E"/>
+          </a:solidFill>
+          <a:ln>
+            <a:noFill/>
+          </a:ln>
+        </p:spPr>
+        <p:style>
+          <a:lnRef idx="1">
+            <a:schemeClr val="accent1"/>
+          </a:lnRef>
+          <a:fillRef idx="3">
+            <a:schemeClr val="accent1"/>
+          </a:fillRef>
+          <a:effectRef idx="2">
+            <a:schemeClr val="accent1"/>
+          </a:effectRef>
+          <a:fontRef idx="minor">
+            <a:schemeClr val="lt1"/>
+          </a:fontRef>
+        </p:style>
+        <p:txBody>
+          <a:bodyPr rtlCol="0" anchor="ctr"/>
+          <a:lstStyle/>
+          <a:p>
+            <a:pPr algn="ctr"/>
+          </a:p>
+        </p:txBody>
+      </p:sp>
+      <p:sp>
+        <p:nvSpPr>
+          <p:cNvPr id="5" name="TextBox 4"/>
+          <p:cNvSpPr txBox="1"/>
+          <p:nvPr/>
+        </p:nvSpPr>
+        <p:spPr>
+          <a:xfrm>
+            <a:off x="640080" y="1280160"/>
+            <a:ext cx="10515600" cy="5029200"/>
+          </a:xfrm>
+          <a:prstGeom prst="rect">
+            <a:avLst/>
+          </a:prstGeom>
+          <a:noFill/>
+        </p:spPr>
+        <p:txBody>
+          <a:bodyPr wrap="square">
+            <a:spAutoFit/>
+          </a:bodyPr>
+          <a:lstStyle/>
+          <a:p>
+            <a:pPr>
+              <a:spcAft>
+                <a:spcPts val="800"/>
+              </a:spcAft>
+              <a:defRPr sz="2000">
+                <a:solidFill>
+                  <a:srgbClr val="333333"/>
+                </a:solidFill>
+                <a:latin typeface="Calibri"/>
+              </a:defRPr>
+            </a:pPr>
+            <a:r>
+              <a:t>4. Registrador malicioso confirma transferencias falsas:</a:t>
+            </a:r>
+          </a:p>
+          <a:p>
+            <a:pPr lvl="1">
+              <a:spcAft>
+                <a:spcPts val="400"/>
+              </a:spcAft>
+              <a:defRPr sz="1700">
+                <a:solidFill>
+                  <a:srgbClr val="666666"/>
+                </a:solidFill>
+                <a:latin typeface="Calibri"/>
+              </a:defRPr>
+            </a:pPr>
+            <a:r>
+              <a:t>    El chaincode por si solo no lo evita — solo valida que tiene el atributo 'role=registrador'.</a:t>
+            </a:r>
+          </a:p>
+          <a:p>
+            <a:pPr lvl="1">
+              <a:spcAft>
+                <a:spcPts val="400"/>
+              </a:spcAft>
+              <a:defRPr sz="1700">
+                <a:solidFill>
+                  <a:srgbClr val="666666"/>
+                </a:solidFill>
+                <a:latin typeface="Calibri"/>
+              </a:defRPr>
+            </a:pPr>
+            <a:r>
+              <a:t>    Mitigaciones en capas:</a:t>
+            </a:r>
+          </a:p>
+          <a:p>
+            <a:pPr lvl="1">
+              <a:spcAft>
+                <a:spcPts val="400"/>
+              </a:spcAft>
+              <a:defRPr sz="1700">
+                <a:solidFill>
+                  <a:srgbClr val="666666"/>
+                </a:solidFill>
+                <a:latin typeface="Calibri"/>
+              </a:defRPr>
+            </a:pPr>
+            <a:r>
+              <a:t>      a) Multi-firma: transferencias criticas requieren N de M registradores (endorsement policy).</a:t>
+            </a:r>
+          </a:p>
+          <a:p>
+            <a:pPr lvl="1">
+              <a:spcAft>
+                <a:spcPts val="400"/>
+              </a:spcAft>
+              <a:defRPr sz="1700">
+                <a:solidFill>
+                  <a:srgbClr val="666666"/>
+                </a:solidFill>
+                <a:latin typeface="Calibri"/>
+              </a:defRPr>
+            </a:pPr>
+            <a:r>
+              <a:t>      b) Auditoria externa: un rol 'auditor' revisa transacciones periodicamente.</a:t>
+            </a:r>
+          </a:p>
+          <a:p>
+            <a:pPr lvl="1">
+              <a:spcAft>
+                <a:spcPts val="400"/>
+              </a:spcAft>
+              <a:defRPr sz="1700">
+                <a:solidFill>
+                  <a:srgbClr val="666666"/>
+                </a:solidFill>
+                <a:latin typeface="Calibri"/>
+              </a:defRPr>
+            </a:pPr>
+            <a:r>
+              <a:t>      c) Jurisdiccion legal: el certificado identifica a la persona, responsabilidad penal.</a:t>
+            </a:r>
+          </a:p>
+          <a:p>
+            <a:pPr lvl="1">
+              <a:spcAft>
+                <a:spcPts val="400"/>
+              </a:spcAft>
+              <a:defRPr sz="1700">
+                <a:solidFill>
+                  <a:srgbClr val="666666"/>
+                </a:solidFill>
+                <a:latin typeface="Calibri"/>
+              </a:defRPr>
+            </a:pPr>
+            <a:r>
+              <a:t>      d) Revocacion rapida del certificado si se detecta fraude + CRL actualizada.</a:t>
+            </a:r>
+          </a:p>
+          <a:p>
+            <a:pPr lvl="1">
+              <a:spcAft>
+                <a:spcPts val="400"/>
+              </a:spcAft>
+              <a:defRPr sz="1700">
+                <a:solidFill>
+                  <a:srgbClr val="666666"/>
+                </a:solidFill>
+                <a:latin typeface="Calibri"/>
+              </a:defRPr>
+            </a:pPr>
+            <a:r>
+              <a:t>    Ningun sistema es 100% a prueba de insider malicioso; blockchain reduce pero no elimina.</a:t>
+            </a:r>
+          </a:p>
+          <a:p>
+            <a:pPr>
+              <a:spcAft>
+                <a:spcPts val="800"/>
+              </a:spcAft>
+              <a:defRPr sz="2000">
+                <a:solidFill>
+                  <a:srgbClr val="333333"/>
+                </a:solidFill>
+                <a:latin typeface="Calibri"/>
+              </a:defRPr>
+            </a:pPr>
+            <a:r>
+              <a:t>5. Gestion de roles (registrador, autoridad) en un consorcio real:</a:t>
+            </a:r>
+          </a:p>
+          <a:p>
+            <a:pPr lvl="1">
+              <a:spcAft>
+                <a:spcPts val="400"/>
+              </a:spcAft>
+              <a:defRPr sz="1700">
+                <a:solidFill>
+                  <a:srgbClr val="666666"/>
+                </a:solidFill>
+                <a:latin typeface="Calibri"/>
+              </a:defRPr>
+            </a:pPr>
+            <a:r>
+              <a:t>    Registrar los roles como atributos del certificado X.509 via Fabric CA.</a:t>
+            </a:r>
+          </a:p>
+          <a:p>
+            <a:pPr lvl="1">
+              <a:spcAft>
+                <a:spcPts val="400"/>
+              </a:spcAft>
+              <a:defRPr sz="1700">
+                <a:solidFill>
+                  <a:srgbClr val="666666"/>
+                </a:solidFill>
+                <a:latin typeface="Calibri"/>
+              </a:defRPr>
+            </a:pPr>
+            <a:r>
+              <a:t>    Separacion de funciones: quien otorga el rol NO puede usarlo.</a:t>
+            </a:r>
+          </a:p>
+          <a:p>
+            <a:pPr lvl="1">
+              <a:spcAft>
+                <a:spcPts val="400"/>
+              </a:spcAft>
+              <a:defRPr sz="1700">
+                <a:solidFill>
+                  <a:srgbClr val="666666"/>
+                </a:solidFill>
+                <a:latin typeface="Calibri"/>
+              </a:defRPr>
+            </a:pPr>
+            <a:r>
+              <a:t>    Rotacion de roles: no dejar eternamente al mismo usuario con privilegios.</a:t>
+            </a:r>
+          </a:p>
+          <a:p>
+            <a:pPr lvl="1">
+              <a:spcAft>
+                <a:spcPts val="400"/>
+              </a:spcAft>
+              <a:defRPr sz="1700">
+                <a:solidFill>
+                  <a:srgbClr val="666666"/>
+                </a:solidFill>
+                <a:latin typeface="Calibri"/>
+              </a:defRPr>
+            </a:pPr>
+            <a:r>
+              <a:t>    Gobernanza clara: documento del consorcio define quien puede asignar cada rol.</a:t>
+            </a:r>
+          </a:p>
+          <a:p>
+            <a:pPr lvl="1">
+              <a:spcAft>
+                <a:spcPts val="400"/>
+              </a:spcAft>
+              <a:defRPr sz="1700">
+                <a:solidFill>
+                  <a:srgbClr val="666666"/>
+                </a:solidFill>
+                <a:latin typeface="Calibri"/>
+              </a:defRPr>
+            </a:pPr>
+            <a:r>
+              <a:t>    Logs de auditoria: cada emisin/revocacion de rol queda registrada en Fabric CA.</a:t>
+            </a:r>
+          </a:p>
+          <a:p>
+            <a:pPr lvl="1">
+              <a:spcAft>
+                <a:spcPts val="400"/>
+              </a:spcAft>
+              <a:defRPr sz="1700">
+                <a:solidFill>
+                  <a:srgbClr val="666666"/>
+                </a:solidFill>
+                <a:latin typeface="Calibri"/>
+              </a:defRPr>
+            </a:pPr>
+            <a:r>
+              <a:t>    Reglas en el chaincode: un rol solo puede hacer ciertas operaciones (ABAC).</a:t>
+            </a:r>
+          </a:p>
+        </p:txBody>
+      </p:sp>
+    </p:spTree>
+  </p:cSld>
+  <p:clrMapOvr>
+    <a:masterClrMapping/>
+  </p:clrMapOvr>
+</p:sld>
+</file>
+
+<file path=ppt/slides/slide22.xml><?xml version="1.0" encoding="utf-8"?>
+<p:sld xmlns:a="http://schemas.openxmlformats.org/drawingml/2006/main" xmlns:p="http://schemas.openxmlformats.org/presentationml/2006/main" xmlns:r="http://schemas.openxmlformats.org/officeDocument/2006/relationships">
+  <p:cSld>
+    <p:spTree>
+      <p:nvGrpSpPr>
+        <p:cNvPr id="1" name=""/>
+        <p:cNvGrpSpPr/>
+        <p:nvPr/>
+      </p:nvGrpSpPr>
+      <p:grpSpPr/>
+      <p:sp>
+        <p:nvSpPr>
+          <p:cNvPr id="2" name="Rectangle 1"/>
+          <p:cNvSpPr/>
+          <p:nvPr/>
+        </p:nvSpPr>
+        <p:spPr>
+          <a:xfrm>
+            <a:off x="0" y="0"/>
+            <a:ext cx="12188952" cy="6858000"/>
+          </a:xfrm>
+          <a:prstGeom prst="rect">
+            <a:avLst/>
+          </a:prstGeom>
+          <a:solidFill>
+            <a:srgbClr val="22627E"/>
+          </a:solidFill>
+          <a:ln>
+            <a:noFill/>
+          </a:ln>
+        </p:spPr>
+        <p:style>
+          <a:lnRef idx="1">
+            <a:schemeClr val="accent1"/>
+          </a:lnRef>
+          <a:fillRef idx="3">
+            <a:schemeClr val="accent1"/>
+          </a:fillRef>
+          <a:effectRef idx="2">
+            <a:schemeClr val="accent1"/>
+          </a:effectRef>
+          <a:fontRef idx="minor">
+            <a:schemeClr val="lt1"/>
+          </a:fontRef>
+        </p:style>
+        <p:txBody>
+          <a:bodyPr rtlCol="0" anchor="ctr"/>
+          <a:lstStyle/>
+          <a:p>
+            <a:pPr algn="ctr"/>
+          </a:p>
+        </p:txBody>
+      </p:sp>
+      <p:sp>
+        <p:nvSpPr>
+          <p:cNvPr id="3" name="TextBox 2"/>
+          <p:cNvSpPr txBox="1"/>
+          <p:nvPr/>
+        </p:nvSpPr>
+        <p:spPr>
+          <a:xfrm>
+            <a:off x="457200" y="274320"/>
+            <a:ext cx="10972800" cy="731520"/>
+          </a:xfrm>
+          <a:prstGeom prst="rect">
+            <a:avLst/>
+          </a:prstGeom>
+          <a:noFill/>
+        </p:spPr>
+        <p:txBody>
+          <a:bodyPr wrap="square"/>
+          <a:lstStyle/>
+          <a:p>
+            <a:pPr algn="l">
               <a:defRPr sz="3600" b="1">
                 <a:solidFill>
                   <a:srgbClr val="FFFFFF"/>
@@ -7026,6 +7864,824 @@
             </a:pPr>
             <a:r>
               <a:t>7. ¿Cuantos eventos se pueden emitir por transaccion?</a:t>
+            </a:r>
+          </a:p>
+        </p:txBody>
+      </p:sp>
+    </p:spTree>
+  </p:cSld>
+  <p:clrMapOvr>
+    <a:masterClrMapping/>
+  </p:clrMapOvr>
+</p:sld>
+</file>
+
+<file path=ppt/slides/slide23.xml><?xml version="1.0" encoding="utf-8"?>
+<p:sld xmlns:a="http://schemas.openxmlformats.org/drawingml/2006/main" xmlns:p="http://schemas.openxmlformats.org/presentationml/2006/main" xmlns:r="http://schemas.openxmlformats.org/officeDocument/2006/relationships">
+  <p:cSld>
+    <p:spTree>
+      <p:nvGrpSpPr>
+        <p:cNvPr id="1" name=""/>
+        <p:cNvGrpSpPr/>
+        <p:nvPr/>
+      </p:nvGrpSpPr>
+      <p:grpSpPr/>
+      <p:sp>
+        <p:nvSpPr>
+          <p:cNvPr id="2" name="Rectangle 1"/>
+          <p:cNvSpPr/>
+          <p:nvPr/>
+        </p:nvSpPr>
+        <p:spPr>
+          <a:xfrm>
+            <a:off x="0" y="0"/>
+            <a:ext cx="12188952" cy="73152"/>
+          </a:xfrm>
+          <a:prstGeom prst="rect">
+            <a:avLst/>
+          </a:prstGeom>
+          <a:solidFill>
+            <a:srgbClr val="22627E"/>
+          </a:solidFill>
+          <a:ln>
+            <a:noFill/>
+          </a:ln>
+        </p:spPr>
+        <p:style>
+          <a:lnRef idx="1">
+            <a:schemeClr val="accent1"/>
+          </a:lnRef>
+          <a:fillRef idx="3">
+            <a:schemeClr val="accent1"/>
+          </a:fillRef>
+          <a:effectRef idx="2">
+            <a:schemeClr val="accent1"/>
+          </a:effectRef>
+          <a:fontRef idx="minor">
+            <a:schemeClr val="lt1"/>
+          </a:fontRef>
+        </p:style>
+        <p:txBody>
+          <a:bodyPr rtlCol="0" anchor="ctr"/>
+          <a:lstStyle/>
+          <a:p>
+            <a:pPr algn="ctr"/>
+          </a:p>
+        </p:txBody>
+      </p:sp>
+      <p:sp>
+        <p:nvSpPr>
+          <p:cNvPr id="3" name="TextBox 2"/>
+          <p:cNvSpPr txBox="1"/>
+          <p:nvPr/>
+        </p:nvSpPr>
+        <p:spPr>
+          <a:xfrm>
+            <a:off x="457200" y="274320"/>
+            <a:ext cx="10972800" cy="731520"/>
+          </a:xfrm>
+          <a:prstGeom prst="rect">
+            <a:avLst/>
+          </a:prstGeom>
+          <a:noFill/>
+        </p:spPr>
+        <p:txBody>
+          <a:bodyPr wrap="square"/>
+          <a:lstStyle/>
+          <a:p>
+            <a:pPr algn="l">
+              <a:defRPr sz="3200" b="1">
+                <a:solidFill>
+                  <a:srgbClr val="22627E"/>
+                </a:solidFill>
+                <a:latin typeface="Calibri"/>
+              </a:defRPr>
+            </a:pPr>
+            <a:r>
+              <a:t>Respuestas al repaso (1/2)</a:t>
+            </a:r>
+          </a:p>
+        </p:txBody>
+      </p:sp>
+      <p:sp>
+        <p:nvSpPr>
+          <p:cNvPr id="4" name="Rectangle 3"/>
+          <p:cNvSpPr/>
+          <p:nvPr/>
+        </p:nvSpPr>
+        <p:spPr>
+          <a:xfrm>
+            <a:off x="457200" y="1051560"/>
+            <a:ext cx="10972800" cy="27432"/>
+          </a:xfrm>
+          <a:prstGeom prst="rect">
+            <a:avLst/>
+          </a:prstGeom>
+          <a:solidFill>
+            <a:srgbClr val="22627E"/>
+          </a:solidFill>
+          <a:ln>
+            <a:noFill/>
+          </a:ln>
+        </p:spPr>
+        <p:style>
+          <a:lnRef idx="1">
+            <a:schemeClr val="accent1"/>
+          </a:lnRef>
+          <a:fillRef idx="3">
+            <a:schemeClr val="accent1"/>
+          </a:fillRef>
+          <a:effectRef idx="2">
+            <a:schemeClr val="accent1"/>
+          </a:effectRef>
+          <a:fontRef idx="minor">
+            <a:schemeClr val="lt1"/>
+          </a:fontRef>
+        </p:style>
+        <p:txBody>
+          <a:bodyPr rtlCol="0" anchor="ctr"/>
+          <a:lstStyle/>
+          <a:p>
+            <a:pPr algn="ctr"/>
+          </a:p>
+        </p:txBody>
+      </p:sp>
+      <p:sp>
+        <p:nvSpPr>
+          <p:cNvPr id="5" name="TextBox 4"/>
+          <p:cNvSpPr txBox="1"/>
+          <p:nvPr/>
+        </p:nvSpPr>
+        <p:spPr>
+          <a:xfrm>
+            <a:off x="640080" y="1280160"/>
+            <a:ext cx="10515600" cy="5029200"/>
+          </a:xfrm>
+          <a:prstGeom prst="rect">
+            <a:avLst/>
+          </a:prstGeom>
+          <a:noFill/>
+        </p:spPr>
+        <p:txBody>
+          <a:bodyPr wrap="square">
+            <a:spAutoFit/>
+          </a:bodyPr>
+          <a:lstStyle/>
+          <a:p>
+            <a:pPr>
+              <a:spcAft>
+                <a:spcPts val="800"/>
+              </a:spcAft>
+              <a:defRPr sz="2000">
+                <a:solidFill>
+                  <a:srgbClr val="333333"/>
+                </a:solidFill>
+                <a:latin typeface="Calibri"/>
+              </a:defRPr>
+            </a:pPr>
+            <a:r>
+              <a:t>1. Verificacion de identidad en un chaincode:</a:t>
+            </a:r>
+          </a:p>
+          <a:p>
+            <a:pPr lvl="1">
+              <a:spcAft>
+                <a:spcPts val="400"/>
+              </a:spcAft>
+              <a:defRPr sz="1700">
+                <a:solidFill>
+                  <a:srgbClr val="666666"/>
+                </a:solidFill>
+                <a:latin typeface="Calibri"/>
+              </a:defRPr>
+            </a:pPr>
+            <a:r>
+              <a:t>    A traves de ctx.GetClientIdentity(), que devuelve datos del certificado X.509 del caller.</a:t>
+            </a:r>
+          </a:p>
+          <a:p>
+            <a:pPr lvl="1">
+              <a:spcAft>
+                <a:spcPts val="400"/>
+              </a:spcAft>
+              <a:defRPr sz="1700">
+                <a:solidFill>
+                  <a:srgbClr val="666666"/>
+                </a:solidFill>
+                <a:latin typeface="Calibri"/>
+              </a:defRPr>
+            </a:pPr>
+            <a:r>
+              <a:t>    Metodos principales: GetID, GetMSPID, GetAttributeValue, AssertAttributeValue.</a:t>
+            </a:r>
+          </a:p>
+          <a:p>
+            <a:pPr lvl="1">
+              <a:spcAft>
+                <a:spcPts val="400"/>
+              </a:spcAft>
+              <a:defRPr sz="1700">
+                <a:solidFill>
+                  <a:srgbClr val="666666"/>
+                </a:solidFill>
+                <a:latin typeface="Calibri"/>
+              </a:defRPr>
+            </a:pPr>
+            <a:r>
+              <a:t>    El peer YA ha validado el certificado antes de llamar al chaincode (no tienes que validarlo tu).</a:t>
+            </a:r>
+          </a:p>
+          <a:p>
+            <a:pPr lvl="1">
+              <a:spcAft>
+                <a:spcPts val="400"/>
+              </a:spcAft>
+              <a:defRPr sz="1700">
+                <a:solidFill>
+                  <a:srgbClr val="666666"/>
+                </a:solidFill>
+                <a:latin typeface="Calibri"/>
+              </a:defRPr>
+            </a:pPr>
+            <a:r>
+              <a:t>    Tu trabajo es decidir si ese cert autenticado puede hacer lo que pide (autorizacion).</a:t>
+            </a:r>
+          </a:p>
+          <a:p>
+            <a:pPr>
+              <a:spcAft>
+                <a:spcPts val="800"/>
+              </a:spcAft>
+              <a:defRPr sz="2000">
+                <a:solidFill>
+                  <a:srgbClr val="333333"/>
+                </a:solidFill>
+                <a:latin typeface="Calibri"/>
+              </a:defRPr>
+            </a:pPr>
+            <a:r>
+              <a:t>2. GetMSPID() vs AssertAttributeValue():</a:t>
+            </a:r>
+          </a:p>
+          <a:p>
+            <a:pPr lvl="1">
+              <a:spcAft>
+                <a:spcPts val="400"/>
+              </a:spcAft>
+              <a:defRPr sz="1700">
+                <a:solidFill>
+                  <a:srgbClr val="666666"/>
+                </a:solidFill>
+                <a:latin typeface="Calibri"/>
+              </a:defRPr>
+            </a:pPr>
+            <a:r>
+              <a:t>    GetMSPID(): devuelve la organizacion del caller ('Org1MSP', 'HotelMSP'...).</a:t>
+            </a:r>
+          </a:p>
+          <a:p>
+            <a:pPr lvl="1">
+              <a:spcAft>
+                <a:spcPts val="400"/>
+              </a:spcAft>
+              <a:defRPr sz="1700">
+                <a:solidFill>
+                  <a:srgbClr val="666666"/>
+                </a:solidFill>
+                <a:latin typeface="Calibri"/>
+              </a:defRPr>
+            </a:pPr>
+            <a:r>
+              <a:t>    AssertAttributeValue(attr, value): comprueba un atributo custom del cert (devuelve error si no coincide).</a:t>
+            </a:r>
+          </a:p>
+          <a:p>
+            <a:pPr lvl="1">
+              <a:spcAft>
+                <a:spcPts val="400"/>
+              </a:spcAft>
+              <a:defRPr sz="1700">
+                <a:solidFill>
+                  <a:srgbClr val="666666"/>
+                </a:solidFill>
+                <a:latin typeface="Calibri"/>
+              </a:defRPr>
+            </a:pPr>
+            <a:r>
+              <a:t>    GetMSPID: para controlar QUE ORG llama (Hotel vs Cafeteria).</a:t>
+            </a:r>
+          </a:p>
+          <a:p>
+            <a:pPr lvl="1">
+              <a:spcAft>
+                <a:spcPts val="400"/>
+              </a:spcAft>
+              <a:defRPr sz="1700">
+                <a:solidFill>
+                  <a:srgbClr val="666666"/>
+                </a:solidFill>
+                <a:latin typeface="Calibri"/>
+              </a:defRPr>
+            </a:pPr>
+            <a:r>
+              <a:t>    AssertAttributeValue: para controlar QUE ROL tiene (registrador, auditor, admin).</a:t>
+            </a:r>
+          </a:p>
+          <a:p>
+            <a:pPr>
+              <a:spcAft>
+                <a:spcPts val="800"/>
+              </a:spcAft>
+              <a:defRPr sz="2000">
+                <a:solidFill>
+                  <a:srgbClr val="333333"/>
+                </a:solidFill>
+                <a:latin typeface="Calibri"/>
+              </a:defRPr>
+            </a:pPr>
+            <a:r>
+              <a:t>3. Maquina de estados en chaincodes:</a:t>
+            </a:r>
+          </a:p>
+          <a:p>
+            <a:pPr lvl="1">
+              <a:spcAft>
+                <a:spcPts val="400"/>
+              </a:spcAft>
+              <a:defRPr sz="1700">
+                <a:solidFill>
+                  <a:srgbClr val="666666"/>
+                </a:solidFill>
+                <a:latin typeface="Calibri"/>
+              </a:defRPr>
+            </a:pPr>
+            <a:r>
+              <a:t>    Conjunto de estados validos y transiciones permitidas entre ellos.</a:t>
+            </a:r>
+          </a:p>
+          <a:p>
+            <a:pPr lvl="1">
+              <a:spcAft>
+                <a:spcPts val="400"/>
+              </a:spcAft>
+              <a:defRPr sz="1700">
+                <a:solidFill>
+                  <a:srgbClr val="666666"/>
+                </a:solidFill>
+                <a:latin typeface="Calibri"/>
+              </a:defRPr>
+            </a:pPr>
+            <a:r>
+              <a:t>    Ejemplo propiedad: active -&gt; transferring -&gt; active | blocked.</a:t>
+            </a:r>
+          </a:p>
+          <a:p>
+            <a:pPr lvl="1">
+              <a:spcAft>
+                <a:spcPts val="400"/>
+              </a:spcAft>
+              <a:defRPr sz="1700">
+                <a:solidFill>
+                  <a:srgbClr val="666666"/>
+                </a:solidFill>
+                <a:latin typeface="Calibri"/>
+              </a:defRPr>
+            </a:pPr>
+            <a:r>
+              <a:t>    Util para: evitar estados imposibles, forzar orden correcto, claridad del dominio.</a:t>
+            </a:r>
+          </a:p>
+          <a:p>
+            <a:pPr lvl="1">
+              <a:spcAft>
+                <a:spcPts val="400"/>
+              </a:spcAft>
+              <a:defRPr sz="1700">
+                <a:solidFill>
+                  <a:srgbClr val="666666"/>
+                </a:solidFill>
+                <a:latin typeface="Calibri"/>
+              </a:defRPr>
+            </a:pPr>
+            <a:r>
+              <a:t>    Implementacion: validar en cada funcion 'if currentStatus != X return error'.</a:t>
+            </a:r>
+          </a:p>
+        </p:txBody>
+      </p:sp>
+    </p:spTree>
+  </p:cSld>
+  <p:clrMapOvr>
+    <a:masterClrMapping/>
+  </p:clrMapOvr>
+</p:sld>
+</file>
+
+<file path=ppt/slides/slide24.xml><?xml version="1.0" encoding="utf-8"?>
+<p:sld xmlns:a="http://schemas.openxmlformats.org/drawingml/2006/main" xmlns:p="http://schemas.openxmlformats.org/presentationml/2006/main" xmlns:r="http://schemas.openxmlformats.org/officeDocument/2006/relationships">
+  <p:cSld>
+    <p:spTree>
+      <p:nvGrpSpPr>
+        <p:cNvPr id="1" name=""/>
+        <p:cNvGrpSpPr/>
+        <p:nvPr/>
+      </p:nvGrpSpPr>
+      <p:grpSpPr/>
+      <p:sp>
+        <p:nvSpPr>
+          <p:cNvPr id="2" name="Rectangle 1"/>
+          <p:cNvSpPr/>
+          <p:nvPr/>
+        </p:nvSpPr>
+        <p:spPr>
+          <a:xfrm>
+            <a:off x="0" y="0"/>
+            <a:ext cx="12188952" cy="73152"/>
+          </a:xfrm>
+          <a:prstGeom prst="rect">
+            <a:avLst/>
+          </a:prstGeom>
+          <a:solidFill>
+            <a:srgbClr val="22627E"/>
+          </a:solidFill>
+          <a:ln>
+            <a:noFill/>
+          </a:ln>
+        </p:spPr>
+        <p:style>
+          <a:lnRef idx="1">
+            <a:schemeClr val="accent1"/>
+          </a:lnRef>
+          <a:fillRef idx="3">
+            <a:schemeClr val="accent1"/>
+          </a:fillRef>
+          <a:effectRef idx="2">
+            <a:schemeClr val="accent1"/>
+          </a:effectRef>
+          <a:fontRef idx="minor">
+            <a:schemeClr val="lt1"/>
+          </a:fontRef>
+        </p:style>
+        <p:txBody>
+          <a:bodyPr rtlCol="0" anchor="ctr"/>
+          <a:lstStyle/>
+          <a:p>
+            <a:pPr algn="ctr"/>
+          </a:p>
+        </p:txBody>
+      </p:sp>
+      <p:sp>
+        <p:nvSpPr>
+          <p:cNvPr id="3" name="TextBox 2"/>
+          <p:cNvSpPr txBox="1"/>
+          <p:nvPr/>
+        </p:nvSpPr>
+        <p:spPr>
+          <a:xfrm>
+            <a:off x="457200" y="274320"/>
+            <a:ext cx="10972800" cy="731520"/>
+          </a:xfrm>
+          <a:prstGeom prst="rect">
+            <a:avLst/>
+          </a:prstGeom>
+          <a:noFill/>
+        </p:spPr>
+        <p:txBody>
+          <a:bodyPr wrap="square"/>
+          <a:lstStyle/>
+          <a:p>
+            <a:pPr algn="l">
+              <a:defRPr sz="3200" b="1">
+                <a:solidFill>
+                  <a:srgbClr val="22627E"/>
+                </a:solidFill>
+                <a:latin typeface="Calibri"/>
+              </a:defRPr>
+            </a:pPr>
+            <a:r>
+              <a:t>Respuestas al repaso (2/2)</a:t>
+            </a:r>
+          </a:p>
+        </p:txBody>
+      </p:sp>
+      <p:sp>
+        <p:nvSpPr>
+          <p:cNvPr id="4" name="Rectangle 3"/>
+          <p:cNvSpPr/>
+          <p:nvPr/>
+        </p:nvSpPr>
+        <p:spPr>
+          <a:xfrm>
+            <a:off x="457200" y="1051560"/>
+            <a:ext cx="10972800" cy="27432"/>
+          </a:xfrm>
+          <a:prstGeom prst="rect">
+            <a:avLst/>
+          </a:prstGeom>
+          <a:solidFill>
+            <a:srgbClr val="22627E"/>
+          </a:solidFill>
+          <a:ln>
+            <a:noFill/>
+          </a:ln>
+        </p:spPr>
+        <p:style>
+          <a:lnRef idx="1">
+            <a:schemeClr val="accent1"/>
+          </a:lnRef>
+          <a:fillRef idx="3">
+            <a:schemeClr val="accent1"/>
+          </a:fillRef>
+          <a:effectRef idx="2">
+            <a:schemeClr val="accent1"/>
+          </a:effectRef>
+          <a:fontRef idx="minor">
+            <a:schemeClr val="lt1"/>
+          </a:fontRef>
+        </p:style>
+        <p:txBody>
+          <a:bodyPr rtlCol="0" anchor="ctr"/>
+          <a:lstStyle/>
+          <a:p>
+            <a:pPr algn="ctr"/>
+          </a:p>
+        </p:txBody>
+      </p:sp>
+      <p:sp>
+        <p:nvSpPr>
+          <p:cNvPr id="5" name="TextBox 4"/>
+          <p:cNvSpPr txBox="1"/>
+          <p:nvPr/>
+        </p:nvSpPr>
+        <p:spPr>
+          <a:xfrm>
+            <a:off x="640080" y="1280160"/>
+            <a:ext cx="10515600" cy="5029200"/>
+          </a:xfrm>
+          <a:prstGeom prst="rect">
+            <a:avLst/>
+          </a:prstGeom>
+          <a:noFill/>
+        </p:spPr>
+        <p:txBody>
+          <a:bodyPr wrap="square">
+            <a:spAutoFit/>
+          </a:bodyPr>
+          <a:lstStyle/>
+          <a:p>
+            <a:pPr>
+              <a:spcAft>
+                <a:spcPts val="800"/>
+              </a:spcAft>
+              <a:defRPr sz="2000">
+                <a:solidFill>
+                  <a:srgbClr val="333333"/>
+                </a:solidFill>
+                <a:latin typeface="Calibri"/>
+              </a:defRPr>
+            </a:pPr>
+            <a:r>
+              <a:t>4. Private Data Collections:</a:t>
+            </a:r>
+          </a:p>
+          <a:p>
+            <a:pPr lvl="1">
+              <a:spcAft>
+                <a:spcPts val="400"/>
+              </a:spcAft>
+              <a:defRPr sz="1700">
+                <a:solidFill>
+                  <a:srgbClr val="666666"/>
+                </a:solidFill>
+                <a:latin typeface="Calibri"/>
+              </a:defRPr>
+            </a:pPr>
+            <a:r>
+              <a:t>    Mecanismo para compartir datos solo entre un subconjunto de orgs del canal.</a:t>
+            </a:r>
+          </a:p>
+          <a:p>
+            <a:pPr lvl="1">
+              <a:spcAft>
+                <a:spcPts val="400"/>
+              </a:spcAft>
+              <a:defRPr sz="1700">
+                <a:solidFill>
+                  <a:srgbClr val="666666"/>
+                </a:solidFill>
+                <a:latin typeface="Calibri"/>
+              </a:defRPr>
+            </a:pPr>
+            <a:r>
+              <a:t>    Se definen en collections_config.json: nombre, policy, blockToLive, miembros.</a:t>
+            </a:r>
+          </a:p>
+          <a:p>
+            <a:pPr lvl="1">
+              <a:spcAft>
+                <a:spcPts val="400"/>
+              </a:spcAft>
+              <a:defRPr sz="1700">
+                <a:solidFill>
+                  <a:srgbClr val="666666"/>
+                </a:solidFill>
+                <a:latin typeface="Calibri"/>
+              </a:defRPr>
+            </a:pPr>
+            <a:r>
+              <a:t>    Ejemplo: priceAgreement visible solo entre comprador y vendedor, no otras orgs.</a:t>
+            </a:r>
+          </a:p>
+          <a:p>
+            <a:pPr>
+              <a:spcAft>
+                <a:spcPts val="800"/>
+              </a:spcAft>
+              <a:defRPr sz="2000">
+                <a:solidFill>
+                  <a:srgbClr val="333333"/>
+                </a:solidFill>
+                <a:latin typeface="Calibri"/>
+              </a:defRPr>
+            </a:pPr>
+            <a:r>
+              <a:t>5. Donde se almacenan datos privados vs hash:</a:t>
+            </a:r>
+          </a:p>
+          <a:p>
+            <a:pPr lvl="1">
+              <a:spcAft>
+                <a:spcPts val="400"/>
+              </a:spcAft>
+              <a:defRPr sz="1700">
+                <a:solidFill>
+                  <a:srgbClr val="666666"/>
+                </a:solidFill>
+                <a:latin typeface="Calibri"/>
+              </a:defRPr>
+            </a:pPr>
+            <a:r>
+              <a:t>    Datos privados: base de datos privada de cada peer autorizado (LevelDB/CouchDB del peer).</a:t>
+            </a:r>
+          </a:p>
+          <a:p>
+            <a:pPr lvl="1">
+              <a:spcAft>
+                <a:spcPts val="400"/>
+              </a:spcAft>
+              <a:defRPr sz="1700">
+                <a:solidFill>
+                  <a:srgbClr val="666666"/>
+                </a:solidFill>
+                <a:latin typeface="Calibri"/>
+              </a:defRPr>
+            </a:pPr>
+            <a:r>
+              <a:t>    Hash: en el ledger publico del canal, visible para TODAS las orgs.</a:t>
+            </a:r>
+          </a:p>
+          <a:p>
+            <a:pPr lvl="1">
+              <a:spcAft>
+                <a:spcPts val="400"/>
+              </a:spcAft>
+              <a:defRPr sz="1700">
+                <a:solidFill>
+                  <a:srgbClr val="666666"/>
+                </a:solidFill>
+                <a:latin typeface="Calibri"/>
+              </a:defRPr>
+            </a:pPr>
+            <a:r>
+              <a:t>    El hash garantiza integridad sin revelar el contenido.</a:t>
+            </a:r>
+          </a:p>
+          <a:p>
+            <a:pPr>
+              <a:spcAft>
+                <a:spcPts val="800"/>
+              </a:spcAft>
+              <a:defRPr sz="2000">
+                <a:solidFill>
+                  <a:srgbClr val="333333"/>
+                </a:solidFill>
+                <a:latin typeface="Calibri"/>
+              </a:defRPr>
+            </a:pPr>
+            <a:r>
+              <a:t>6. Emitir un evento desde chaincode:</a:t>
+            </a:r>
+          </a:p>
+          <a:p>
+            <a:pPr lvl="1">
+              <a:spcAft>
+                <a:spcPts val="400"/>
+              </a:spcAft>
+              <a:defRPr sz="1700">
+                <a:solidFill>
+                  <a:srgbClr val="666666"/>
+                </a:solidFill>
+                <a:latin typeface="Calibri"/>
+              </a:defRPr>
+            </a:pPr>
+            <a:r>
+              <a:t>    ctx.GetStub().SetEvent(nombreEvento, payloadBytes).</a:t>
+            </a:r>
+          </a:p>
+          <a:p>
+            <a:pPr lvl="1">
+              <a:spcAft>
+                <a:spcPts val="400"/>
+              </a:spcAft>
+              <a:defRPr sz="1700">
+                <a:solidFill>
+                  <a:srgbClr val="666666"/>
+                </a:solidFill>
+                <a:latin typeface="Calibri"/>
+              </a:defRPr>
+            </a:pPr>
+            <a:r>
+              <a:t>    Ejemplo: ctx.GetStub().SetEvent('PropertyTransferred', eventJSON).</a:t>
+            </a:r>
+          </a:p>
+          <a:p>
+            <a:pPr lvl="1">
+              <a:spcAft>
+                <a:spcPts val="400"/>
+              </a:spcAft>
+              <a:defRPr sz="1700">
+                <a:solidFill>
+                  <a:srgbClr val="666666"/>
+                </a:solidFill>
+                <a:latin typeface="Calibri"/>
+              </a:defRPr>
+            </a:pPr>
+            <a:r>
+              <a:t>    Los clientes se suscriben con contract.addContractListener() o peer channel events.</a:t>
+            </a:r>
+          </a:p>
+          <a:p>
+            <a:pPr>
+              <a:spcAft>
+                <a:spcPts val="800"/>
+              </a:spcAft>
+              <a:defRPr sz="2000">
+                <a:solidFill>
+                  <a:srgbClr val="333333"/>
+                </a:solidFill>
+                <a:latin typeface="Calibri"/>
+              </a:defRPr>
+            </a:pPr>
+            <a:r>
+              <a:t>7. Cuantos eventos por transaccion:</a:t>
+            </a:r>
+          </a:p>
+          <a:p>
+            <a:pPr lvl="1">
+              <a:spcAft>
+                <a:spcPts val="400"/>
+              </a:spcAft>
+              <a:defRPr sz="1700">
+                <a:solidFill>
+                  <a:srgbClr val="666666"/>
+                </a:solidFill>
+                <a:latin typeface="Calibri"/>
+              </a:defRPr>
+            </a:pPr>
+            <a:r>
+              <a:t>    SOLO UNO por transaccion. Si llamas SetEvent dos veces, solo el ultimo prevalece.</a:t>
+            </a:r>
+          </a:p>
+          <a:p>
+            <a:pPr lvl="1">
+              <a:spcAft>
+                <a:spcPts val="400"/>
+              </a:spcAft>
+              <a:defRPr sz="1700">
+                <a:solidFill>
+                  <a:srgbClr val="666666"/>
+                </a:solidFill>
+                <a:latin typeface="Calibri"/>
+              </a:defRPr>
+            </a:pPr>
+            <a:r>
+              <a:t>    Si necesitas notificar varias cosas, usa un JSON con multiples campos en el payload.</a:t>
+            </a:r>
+          </a:p>
+          <a:p>
+            <a:pPr lvl="1">
+              <a:spcAft>
+                <a:spcPts val="400"/>
+              </a:spcAft>
+              <a:defRPr sz="1700">
+                <a:solidFill>
+                  <a:srgbClr val="666666"/>
+                </a:solidFill>
+                <a:latin typeface="Calibri"/>
+              </a:defRPr>
+            </a:pPr>
+            <a:r>
+              <a:t>    Alternativa: emitir un evento generico con 'type' dentro que indique que ha pasado.</a:t>
             </a:r>
           </a:p>
         </p:txBody>

--- a/docs/slides/Modulo 4/dia_3.pptx
+++ b/docs/slides/Modulo 4/dia_3.pptx
@@ -5,32 +5,32 @@
     <p:sldMasterId id="2147483648" r:id="rId1"/>
   </p:sldMasterIdLst>
   <p:sldIdLst>
-    <p:sldId id="256" r:id="rId7"/>
-    <p:sldId id="257" r:id="rId8"/>
-    <p:sldId id="258" r:id="rId9"/>
-    <p:sldId id="259" r:id="rId10"/>
-    <p:sldId id="260" r:id="rId11"/>
-    <p:sldId id="261" r:id="rId12"/>
-    <p:sldId id="262" r:id="rId13"/>
-    <p:sldId id="263" r:id="rId14"/>
-    <p:sldId id="264" r:id="rId15"/>
-    <p:sldId id="265" r:id="rId16"/>
-    <p:sldId id="266" r:id="rId17"/>
-    <p:sldId id="267" r:id="rId18"/>
-    <p:sldId id="268" r:id="rId19"/>
-    <p:sldId id="269" r:id="rId20"/>
-    <p:sldId id="270" r:id="rId21"/>
-    <p:sldId id="271" r:id="rId22"/>
-    <p:sldId id="272" r:id="rId23"/>
-    <p:sldId id="273" r:id="rId24"/>
-    <p:sldId id="274" r:id="rId25"/>
-    <p:sldId id="275" r:id="rId26"/>
-    <p:sldId id="276" r:id="rId27"/>
-    <p:sldId id="277" r:id="rId28"/>
-    <p:sldId id="278" r:id="rId29"/>
-    <p:sldId id="279" r:id="rId30"/>
+    <p:sldId id="256" r:id="rId2"/>
+    <p:sldId id="257" r:id="rId3"/>
+    <p:sldId id="258" r:id="rId4"/>
+    <p:sldId id="259" r:id="rId5"/>
+    <p:sldId id="260" r:id="rId6"/>
+    <p:sldId id="261" r:id="rId7"/>
+    <p:sldId id="262" r:id="rId8"/>
+    <p:sldId id="263" r:id="rId9"/>
+    <p:sldId id="264" r:id="rId10"/>
+    <p:sldId id="265" r:id="rId11"/>
+    <p:sldId id="266" r:id="rId12"/>
+    <p:sldId id="267" r:id="rId13"/>
+    <p:sldId id="268" r:id="rId14"/>
+    <p:sldId id="269" r:id="rId15"/>
+    <p:sldId id="270" r:id="rId16"/>
+    <p:sldId id="271" r:id="rId17"/>
+    <p:sldId id="272" r:id="rId18"/>
+    <p:sldId id="273" r:id="rId19"/>
+    <p:sldId id="274" r:id="rId20"/>
+    <p:sldId id="275" r:id="rId21"/>
+    <p:sldId id="276" r:id="rId22"/>
+    <p:sldId id="277" r:id="rId23"/>
+    <p:sldId id="278" r:id="rId24"/>
+    <p:sldId id="279" r:id="rId25"/>
   </p:sldIdLst>
-  <p:sldSz cx="12188952" cy="6858000" type="screen4x3"/>
+  <p:sldSz cx="12188825" cy="6858000"/>
   <p:notesSz cx="6858000" cy="9144000"/>
   <p:defaultTextStyle>
     <a:defPPr>
@@ -127,6 +127,22 @@
       </a:defRPr>
     </a:lvl9pPr>
   </p:defaultTextStyle>
+  <p:extLst>
+    <p:ext uri="{EFAFB233-063F-42B5-8137-9DF3F51BA10A}">
+      <p15:sldGuideLst xmlns:p15="http://schemas.microsoft.com/office/powerpoint/2012/main">
+        <p15:guide id="1" orient="horz" pos="2160">
+          <p15:clr>
+            <a:srgbClr val="A4A3A4"/>
+          </p15:clr>
+        </p15:guide>
+        <p15:guide id="2" pos="2880">
+          <p15:clr>
+            <a:srgbClr val="A4A3A4"/>
+          </p15:clr>
+        </p15:guide>
+      </p15:sldGuideLst>
+    </p:ext>
+  </p:extLst>
 </p:presentation>
 </file>
 
@@ -168,10 +184,9 @@
           <a:lstStyle/>
           <a:p>
             <a:r>
-              <a:rPr lang="en-US" smtClean="0"/>
+              <a:rPr lang="en-US"/>
               <a:t>Click to edit Master title style</a:t>
             </a:r>
-            <a:endParaRPr lang="en-US"/>
           </a:p>
         </p:txBody>
       </p:sp>
@@ -287,10 +302,9 @@
           </a:lstStyle>
           <a:p>
             <a:r>
-              <a:rPr lang="en-US" smtClean="0"/>
+              <a:rPr lang="en-US"/>
               <a:t>Click to edit Master subtitle style</a:t>
             </a:r>
-            <a:endParaRPr lang="en-US"/>
           </a:p>
         </p:txBody>
       </p:sp>
@@ -311,7 +325,7 @@
           <a:p>
             <a:fld id="{5BCAD085-E8A6-8845-BD4E-CB4CCA059FC4}" type="datetimeFigureOut">
               <a:rPr lang="en-US" smtClean="0"/>
-              <a:t>1/27/13</a:t>
+              <a:t>4/23/2026</a:t>
             </a:fld>
             <a:endParaRPr lang="en-US"/>
           </a:p>
@@ -353,7 +367,7 @@
           <a:p>
             <a:fld id="{C1FF6DA9-008F-8B48-92A6-B652298478BF}" type="slidenum">
               <a:rPr lang="en-US" smtClean="0"/>
-              <a:t>‹#›</a:t>
+              <a:t>‹Nº›</a:t>
             </a:fld>
             <a:endParaRPr lang="en-US"/>
           </a:p>
@@ -405,10 +419,9 @@
           <a:lstStyle/>
           <a:p>
             <a:r>
-              <a:rPr lang="en-US" smtClean="0"/>
+              <a:rPr lang="en-US"/>
               <a:t>Click to edit Master title style</a:t>
             </a:r>
-            <a:endParaRPr lang="en-US"/>
           </a:p>
         </p:txBody>
       </p:sp>
@@ -429,38 +442,37 @@
           <a:p>
             <a:pPr lvl="0"/>
             <a:r>
-              <a:rPr lang="en-US" smtClean="0"/>
+              <a:rPr lang="en-US"/>
               <a:t>Click to edit Master text styles</a:t>
             </a:r>
           </a:p>
           <a:p>
             <a:pPr lvl="1"/>
             <a:r>
-              <a:rPr lang="en-US" smtClean="0"/>
+              <a:rPr lang="en-US"/>
               <a:t>Second level</a:t>
             </a:r>
           </a:p>
           <a:p>
             <a:pPr lvl="2"/>
             <a:r>
-              <a:rPr lang="en-US" smtClean="0"/>
+              <a:rPr lang="en-US"/>
               <a:t>Third level</a:t>
             </a:r>
           </a:p>
           <a:p>
             <a:pPr lvl="3"/>
             <a:r>
-              <a:rPr lang="en-US" smtClean="0"/>
+              <a:rPr lang="en-US"/>
               <a:t>Fourth level</a:t>
             </a:r>
           </a:p>
           <a:p>
             <a:pPr lvl="4"/>
             <a:r>
-              <a:rPr lang="en-US" smtClean="0"/>
+              <a:rPr lang="en-US"/>
               <a:t>Fifth level</a:t>
             </a:r>
-            <a:endParaRPr lang="en-US"/>
           </a:p>
         </p:txBody>
       </p:sp>
@@ -481,7 +493,7 @@
           <a:p>
             <a:fld id="{5BCAD085-E8A6-8845-BD4E-CB4CCA059FC4}" type="datetimeFigureOut">
               <a:rPr lang="en-US" smtClean="0"/>
-              <a:t>1/27/13</a:t>
+              <a:t>4/23/2026</a:t>
             </a:fld>
             <a:endParaRPr lang="en-US"/>
           </a:p>
@@ -523,7 +535,7 @@
           <a:p>
             <a:fld id="{C1FF6DA9-008F-8B48-92A6-B652298478BF}" type="slidenum">
               <a:rPr lang="en-US" smtClean="0"/>
-              <a:t>‹#›</a:t>
+              <a:t>‹Nº›</a:t>
             </a:fld>
             <a:endParaRPr lang="en-US"/>
           </a:p>
@@ -580,10 +592,9 @@
           <a:lstStyle/>
           <a:p>
             <a:r>
-              <a:rPr lang="en-US" smtClean="0"/>
+              <a:rPr lang="en-US"/>
               <a:t>Click to edit Master title style</a:t>
             </a:r>
-            <a:endParaRPr lang="en-US"/>
           </a:p>
         </p:txBody>
       </p:sp>
@@ -609,38 +620,37 @@
           <a:p>
             <a:pPr lvl="0"/>
             <a:r>
-              <a:rPr lang="en-US" smtClean="0"/>
+              <a:rPr lang="en-US"/>
               <a:t>Click to edit Master text styles</a:t>
             </a:r>
           </a:p>
           <a:p>
             <a:pPr lvl="1"/>
             <a:r>
-              <a:rPr lang="en-US" smtClean="0"/>
+              <a:rPr lang="en-US"/>
               <a:t>Second level</a:t>
             </a:r>
           </a:p>
           <a:p>
             <a:pPr lvl="2"/>
             <a:r>
-              <a:rPr lang="en-US" smtClean="0"/>
+              <a:rPr lang="en-US"/>
               <a:t>Third level</a:t>
             </a:r>
           </a:p>
           <a:p>
             <a:pPr lvl="3"/>
             <a:r>
-              <a:rPr lang="en-US" smtClean="0"/>
+              <a:rPr lang="en-US"/>
               <a:t>Fourth level</a:t>
             </a:r>
           </a:p>
           <a:p>
             <a:pPr lvl="4"/>
             <a:r>
-              <a:rPr lang="en-US" smtClean="0"/>
+              <a:rPr lang="en-US"/>
               <a:t>Fifth level</a:t>
             </a:r>
-            <a:endParaRPr lang="en-US"/>
           </a:p>
         </p:txBody>
       </p:sp>
@@ -661,7 +671,7 @@
           <a:p>
             <a:fld id="{5BCAD085-E8A6-8845-BD4E-CB4CCA059FC4}" type="datetimeFigureOut">
               <a:rPr lang="en-US" smtClean="0"/>
-              <a:t>1/27/13</a:t>
+              <a:t>4/23/2026</a:t>
             </a:fld>
             <a:endParaRPr lang="en-US"/>
           </a:p>
@@ -703,7 +713,7 @@
           <a:p>
             <a:fld id="{C1FF6DA9-008F-8B48-92A6-B652298478BF}" type="slidenum">
               <a:rPr lang="en-US" smtClean="0"/>
-              <a:t>‹#›</a:t>
+              <a:t>‹Nº›</a:t>
             </a:fld>
             <a:endParaRPr lang="en-US"/>
           </a:p>
@@ -755,10 +765,9 @@
           <a:lstStyle/>
           <a:p>
             <a:r>
-              <a:rPr lang="en-US" smtClean="0"/>
+              <a:rPr lang="en-US"/>
               <a:t>Click to edit Master title style</a:t>
             </a:r>
-            <a:endParaRPr lang="en-US"/>
           </a:p>
         </p:txBody>
       </p:sp>
@@ -779,38 +788,37 @@
           <a:p>
             <a:pPr lvl="0"/>
             <a:r>
-              <a:rPr lang="en-US" smtClean="0"/>
+              <a:rPr lang="en-US"/>
               <a:t>Click to edit Master text styles</a:t>
             </a:r>
           </a:p>
           <a:p>
             <a:pPr lvl="1"/>
             <a:r>
-              <a:rPr lang="en-US" smtClean="0"/>
+              <a:rPr lang="en-US"/>
               <a:t>Second level</a:t>
             </a:r>
           </a:p>
           <a:p>
             <a:pPr lvl="2"/>
             <a:r>
-              <a:rPr lang="en-US" smtClean="0"/>
+              <a:rPr lang="en-US"/>
               <a:t>Third level</a:t>
             </a:r>
           </a:p>
           <a:p>
             <a:pPr lvl="3"/>
             <a:r>
-              <a:rPr lang="en-US" smtClean="0"/>
+              <a:rPr lang="en-US"/>
               <a:t>Fourth level</a:t>
             </a:r>
           </a:p>
           <a:p>
             <a:pPr lvl="4"/>
             <a:r>
-              <a:rPr lang="en-US" smtClean="0"/>
+              <a:rPr lang="en-US"/>
               <a:t>Fifth level</a:t>
             </a:r>
-            <a:endParaRPr lang="en-US"/>
           </a:p>
         </p:txBody>
       </p:sp>
@@ -831,7 +839,7 @@
           <a:p>
             <a:fld id="{5BCAD085-E8A6-8845-BD4E-CB4CCA059FC4}" type="datetimeFigureOut">
               <a:rPr lang="en-US" smtClean="0"/>
-              <a:t>1/27/13</a:t>
+              <a:t>4/23/2026</a:t>
             </a:fld>
             <a:endParaRPr lang="en-US"/>
           </a:p>
@@ -873,7 +881,7 @@
           <a:p>
             <a:fld id="{C1FF6DA9-008F-8B48-92A6-B652298478BF}" type="slidenum">
               <a:rPr lang="en-US" smtClean="0"/>
-              <a:t>‹#›</a:t>
+              <a:t>‹Nº›</a:t>
             </a:fld>
             <a:endParaRPr lang="en-US"/>
           </a:p>
@@ -934,10 +942,9 @@
           </a:lstStyle>
           <a:p>
             <a:r>
-              <a:rPr lang="en-US" smtClean="0"/>
+              <a:rPr lang="en-US"/>
               <a:t>Click to edit Master title style</a:t>
             </a:r>
-            <a:endParaRPr lang="en-US"/>
           </a:p>
         </p:txBody>
       </p:sp>
@@ -1054,7 +1061,7 @@
           <a:p>
             <a:pPr lvl="0"/>
             <a:r>
-              <a:rPr lang="en-US" smtClean="0"/>
+              <a:rPr lang="en-US"/>
               <a:t>Click to edit Master text styles</a:t>
             </a:r>
           </a:p>
@@ -1077,7 +1084,7 @@
           <a:p>
             <a:fld id="{5BCAD085-E8A6-8845-BD4E-CB4CCA059FC4}" type="datetimeFigureOut">
               <a:rPr lang="en-US" smtClean="0"/>
-              <a:t>1/27/13</a:t>
+              <a:t>4/23/2026</a:t>
             </a:fld>
             <a:endParaRPr lang="en-US"/>
           </a:p>
@@ -1119,7 +1126,7 @@
           <a:p>
             <a:fld id="{C1FF6DA9-008F-8B48-92A6-B652298478BF}" type="slidenum">
               <a:rPr lang="en-US" smtClean="0"/>
-              <a:t>‹#›</a:t>
+              <a:t>‹Nº›</a:t>
             </a:fld>
             <a:endParaRPr lang="en-US"/>
           </a:p>
@@ -1171,10 +1178,9 @@
           <a:lstStyle/>
           <a:p>
             <a:r>
-              <a:rPr lang="en-US" smtClean="0"/>
+              <a:rPr lang="en-US"/>
               <a:t>Click to edit Master title style</a:t>
             </a:r>
-            <a:endParaRPr lang="en-US"/>
           </a:p>
         </p:txBody>
       </p:sp>
@@ -1228,38 +1234,37 @@
           <a:p>
             <a:pPr lvl="0"/>
             <a:r>
-              <a:rPr lang="en-US" smtClean="0"/>
+              <a:rPr lang="en-US"/>
               <a:t>Click to edit Master text styles</a:t>
             </a:r>
           </a:p>
           <a:p>
             <a:pPr lvl="1"/>
             <a:r>
-              <a:rPr lang="en-US" smtClean="0"/>
+              <a:rPr lang="en-US"/>
               <a:t>Second level</a:t>
             </a:r>
           </a:p>
           <a:p>
             <a:pPr lvl="2"/>
             <a:r>
-              <a:rPr lang="en-US" smtClean="0"/>
+              <a:rPr lang="en-US"/>
               <a:t>Third level</a:t>
             </a:r>
           </a:p>
           <a:p>
             <a:pPr lvl="3"/>
             <a:r>
-              <a:rPr lang="en-US" smtClean="0"/>
+              <a:rPr lang="en-US"/>
               <a:t>Fourth level</a:t>
             </a:r>
           </a:p>
           <a:p>
             <a:pPr lvl="4"/>
             <a:r>
-              <a:rPr lang="en-US" smtClean="0"/>
+              <a:rPr lang="en-US"/>
               <a:t>Fifth level</a:t>
             </a:r>
-            <a:endParaRPr lang="en-US"/>
           </a:p>
         </p:txBody>
       </p:sp>
@@ -1313,38 +1318,37 @@
           <a:p>
             <a:pPr lvl="0"/>
             <a:r>
-              <a:rPr lang="en-US" smtClean="0"/>
+              <a:rPr lang="en-US"/>
               <a:t>Click to edit Master text styles</a:t>
             </a:r>
           </a:p>
           <a:p>
             <a:pPr lvl="1"/>
             <a:r>
-              <a:rPr lang="en-US" smtClean="0"/>
+              <a:rPr lang="en-US"/>
               <a:t>Second level</a:t>
             </a:r>
           </a:p>
           <a:p>
             <a:pPr lvl="2"/>
             <a:r>
-              <a:rPr lang="en-US" smtClean="0"/>
+              <a:rPr lang="en-US"/>
               <a:t>Third level</a:t>
             </a:r>
           </a:p>
           <a:p>
             <a:pPr lvl="3"/>
             <a:r>
-              <a:rPr lang="en-US" smtClean="0"/>
+              <a:rPr lang="en-US"/>
               <a:t>Fourth level</a:t>
             </a:r>
           </a:p>
           <a:p>
             <a:pPr lvl="4"/>
             <a:r>
-              <a:rPr lang="en-US" smtClean="0"/>
+              <a:rPr lang="en-US"/>
               <a:t>Fifth level</a:t>
             </a:r>
-            <a:endParaRPr lang="en-US"/>
           </a:p>
         </p:txBody>
       </p:sp>
@@ -1365,7 +1369,7 @@
           <a:p>
             <a:fld id="{5BCAD085-E8A6-8845-BD4E-CB4CCA059FC4}" type="datetimeFigureOut">
               <a:rPr lang="en-US" smtClean="0"/>
-              <a:t>1/27/13</a:t>
+              <a:t>4/23/2026</a:t>
             </a:fld>
             <a:endParaRPr lang="en-US"/>
           </a:p>
@@ -1407,7 +1411,7 @@
           <a:p>
             <a:fld id="{C1FF6DA9-008F-8B48-92A6-B652298478BF}" type="slidenum">
               <a:rPr lang="en-US" smtClean="0"/>
-              <a:t>‹#›</a:t>
+              <a:t>‹Nº›</a:t>
             </a:fld>
             <a:endParaRPr lang="en-US"/>
           </a:p>
@@ -1463,10 +1467,9 @@
           </a:lstStyle>
           <a:p>
             <a:r>
-              <a:rPr lang="en-US" smtClean="0"/>
+              <a:rPr lang="en-US"/>
               <a:t>Click to edit Master title style</a:t>
             </a:r>
-            <a:endParaRPr lang="en-US"/>
           </a:p>
         </p:txBody>
       </p:sp>
@@ -1529,7 +1532,7 @@
           <a:p>
             <a:pPr lvl="0"/>
             <a:r>
-              <a:rPr lang="en-US" smtClean="0"/>
+              <a:rPr lang="en-US"/>
               <a:t>Click to edit Master text styles</a:t>
             </a:r>
           </a:p>
@@ -1585,38 +1588,37 @@
           <a:p>
             <a:pPr lvl="0"/>
             <a:r>
-              <a:rPr lang="en-US" smtClean="0"/>
+              <a:rPr lang="en-US"/>
               <a:t>Click to edit Master text styles</a:t>
             </a:r>
           </a:p>
           <a:p>
             <a:pPr lvl="1"/>
             <a:r>
-              <a:rPr lang="en-US" smtClean="0"/>
+              <a:rPr lang="en-US"/>
               <a:t>Second level</a:t>
             </a:r>
           </a:p>
           <a:p>
             <a:pPr lvl="2"/>
             <a:r>
-              <a:rPr lang="en-US" smtClean="0"/>
+              <a:rPr lang="en-US"/>
               <a:t>Third level</a:t>
             </a:r>
           </a:p>
           <a:p>
             <a:pPr lvl="3"/>
             <a:r>
-              <a:rPr lang="en-US" smtClean="0"/>
+              <a:rPr lang="en-US"/>
               <a:t>Fourth level</a:t>
             </a:r>
           </a:p>
           <a:p>
             <a:pPr lvl="4"/>
             <a:r>
-              <a:rPr lang="en-US" smtClean="0"/>
+              <a:rPr lang="en-US"/>
               <a:t>Fifth level</a:t>
             </a:r>
-            <a:endParaRPr lang="en-US"/>
           </a:p>
         </p:txBody>
       </p:sp>
@@ -1679,7 +1681,7 @@
           <a:p>
             <a:pPr lvl="0"/>
             <a:r>
-              <a:rPr lang="en-US" smtClean="0"/>
+              <a:rPr lang="en-US"/>
               <a:t>Click to edit Master text styles</a:t>
             </a:r>
           </a:p>
@@ -1735,38 +1737,37 @@
           <a:p>
             <a:pPr lvl="0"/>
             <a:r>
-              <a:rPr lang="en-US" smtClean="0"/>
+              <a:rPr lang="en-US"/>
               <a:t>Click to edit Master text styles</a:t>
             </a:r>
           </a:p>
           <a:p>
             <a:pPr lvl="1"/>
             <a:r>
-              <a:rPr lang="en-US" smtClean="0"/>
+              <a:rPr lang="en-US"/>
               <a:t>Second level</a:t>
             </a:r>
           </a:p>
           <a:p>
             <a:pPr lvl="2"/>
             <a:r>
-              <a:rPr lang="en-US" smtClean="0"/>
+              <a:rPr lang="en-US"/>
               <a:t>Third level</a:t>
             </a:r>
           </a:p>
           <a:p>
             <a:pPr lvl="3"/>
             <a:r>
-              <a:rPr lang="en-US" smtClean="0"/>
+              <a:rPr lang="en-US"/>
               <a:t>Fourth level</a:t>
             </a:r>
           </a:p>
           <a:p>
             <a:pPr lvl="4"/>
             <a:r>
-              <a:rPr lang="en-US" smtClean="0"/>
+              <a:rPr lang="en-US"/>
               <a:t>Fifth level</a:t>
             </a:r>
-            <a:endParaRPr lang="en-US"/>
           </a:p>
         </p:txBody>
       </p:sp>
@@ -1787,7 +1788,7 @@
           <a:p>
             <a:fld id="{5BCAD085-E8A6-8845-BD4E-CB4CCA059FC4}" type="datetimeFigureOut">
               <a:rPr lang="en-US" smtClean="0"/>
-              <a:t>1/27/13</a:t>
+              <a:t>4/23/2026</a:t>
             </a:fld>
             <a:endParaRPr lang="en-US"/>
           </a:p>
@@ -1829,7 +1830,7 @@
           <a:p>
             <a:fld id="{C1FF6DA9-008F-8B48-92A6-B652298478BF}" type="slidenum">
               <a:rPr lang="en-US" smtClean="0"/>
-              <a:t>‹#›</a:t>
+              <a:t>‹Nº›</a:t>
             </a:fld>
             <a:endParaRPr lang="en-US"/>
           </a:p>
@@ -1881,10 +1882,9 @@
           <a:lstStyle/>
           <a:p>
             <a:r>
-              <a:rPr lang="en-US" smtClean="0"/>
+              <a:rPr lang="en-US"/>
               <a:t>Click to edit Master title style</a:t>
             </a:r>
-            <a:endParaRPr lang="en-US"/>
           </a:p>
         </p:txBody>
       </p:sp>
@@ -1905,7 +1905,7 @@
           <a:p>
             <a:fld id="{5BCAD085-E8A6-8845-BD4E-CB4CCA059FC4}" type="datetimeFigureOut">
               <a:rPr lang="en-US" smtClean="0"/>
-              <a:t>1/27/13</a:t>
+              <a:t>4/23/2026</a:t>
             </a:fld>
             <a:endParaRPr lang="en-US"/>
           </a:p>
@@ -1947,7 +1947,7 @@
           <a:p>
             <a:fld id="{C1FF6DA9-008F-8B48-92A6-B652298478BF}" type="slidenum">
               <a:rPr lang="en-US" smtClean="0"/>
-              <a:t>‹#›</a:t>
+              <a:t>‹Nº›</a:t>
             </a:fld>
             <a:endParaRPr lang="en-US"/>
           </a:p>
@@ -2000,7 +2000,7 @@
           <a:p>
             <a:fld id="{5BCAD085-E8A6-8845-BD4E-CB4CCA059FC4}" type="datetimeFigureOut">
               <a:rPr lang="en-US" smtClean="0"/>
-              <a:t>1/27/13</a:t>
+              <a:t>4/23/2026</a:t>
             </a:fld>
             <a:endParaRPr lang="en-US"/>
           </a:p>
@@ -2042,7 +2042,7 @@
           <a:p>
             <a:fld id="{C1FF6DA9-008F-8B48-92A6-B652298478BF}" type="slidenum">
               <a:rPr lang="en-US" smtClean="0"/>
-              <a:t>‹#›</a:t>
+              <a:t>‹Nº›</a:t>
             </a:fld>
             <a:endParaRPr lang="en-US"/>
           </a:p>
@@ -2103,10 +2103,9 @@
           </a:lstStyle>
           <a:p>
             <a:r>
-              <a:rPr lang="en-US" smtClean="0"/>
+              <a:rPr lang="en-US"/>
               <a:t>Click to edit Master title style</a:t>
             </a:r>
-            <a:endParaRPr lang="en-US"/>
           </a:p>
         </p:txBody>
       </p:sp>
@@ -2160,38 +2159,37 @@
           <a:p>
             <a:pPr lvl="0"/>
             <a:r>
-              <a:rPr lang="en-US" smtClean="0"/>
+              <a:rPr lang="en-US"/>
               <a:t>Click to edit Master text styles</a:t>
             </a:r>
           </a:p>
           <a:p>
             <a:pPr lvl="1"/>
             <a:r>
-              <a:rPr lang="en-US" smtClean="0"/>
+              <a:rPr lang="en-US"/>
               <a:t>Second level</a:t>
             </a:r>
           </a:p>
           <a:p>
             <a:pPr lvl="2"/>
             <a:r>
-              <a:rPr lang="en-US" smtClean="0"/>
+              <a:rPr lang="en-US"/>
               <a:t>Third level</a:t>
             </a:r>
           </a:p>
           <a:p>
             <a:pPr lvl="3"/>
             <a:r>
-              <a:rPr lang="en-US" smtClean="0"/>
+              <a:rPr lang="en-US"/>
               <a:t>Fourth level</a:t>
             </a:r>
           </a:p>
           <a:p>
             <a:pPr lvl="4"/>
             <a:r>
-              <a:rPr lang="en-US" smtClean="0"/>
+              <a:rPr lang="en-US"/>
               <a:t>Fifth level</a:t>
             </a:r>
-            <a:endParaRPr lang="en-US"/>
           </a:p>
         </p:txBody>
       </p:sp>
@@ -2254,7 +2252,7 @@
           <a:p>
             <a:pPr lvl="0"/>
             <a:r>
-              <a:rPr lang="en-US" smtClean="0"/>
+              <a:rPr lang="en-US"/>
               <a:t>Click to edit Master text styles</a:t>
             </a:r>
           </a:p>
@@ -2277,7 +2275,7 @@
           <a:p>
             <a:fld id="{5BCAD085-E8A6-8845-BD4E-CB4CCA059FC4}" type="datetimeFigureOut">
               <a:rPr lang="en-US" smtClean="0"/>
-              <a:t>1/27/13</a:t>
+              <a:t>4/23/2026</a:t>
             </a:fld>
             <a:endParaRPr lang="en-US"/>
           </a:p>
@@ -2319,7 +2317,7 @@
           <a:p>
             <a:fld id="{C1FF6DA9-008F-8B48-92A6-B652298478BF}" type="slidenum">
               <a:rPr lang="en-US" smtClean="0"/>
-              <a:t>‹#›</a:t>
+              <a:t>‹Nº›</a:t>
             </a:fld>
             <a:endParaRPr lang="en-US"/>
           </a:p>
@@ -2380,10 +2378,9 @@
           </a:lstStyle>
           <a:p>
             <a:r>
-              <a:rPr lang="en-US" smtClean="0"/>
+              <a:rPr lang="en-US"/>
               <a:t>Click to edit Master title style</a:t>
             </a:r>
-            <a:endParaRPr lang="en-US"/>
           </a:p>
         </p:txBody>
       </p:sp>
@@ -2507,7 +2504,7 @@
           <a:p>
             <a:pPr lvl="0"/>
             <a:r>
-              <a:rPr lang="en-US" smtClean="0"/>
+              <a:rPr lang="en-US"/>
               <a:t>Click to edit Master text styles</a:t>
             </a:r>
           </a:p>
@@ -2530,7 +2527,7 @@
           <a:p>
             <a:fld id="{5BCAD085-E8A6-8845-BD4E-CB4CCA059FC4}" type="datetimeFigureOut">
               <a:rPr lang="en-US" smtClean="0"/>
-              <a:t>1/27/13</a:t>
+              <a:t>4/23/2026</a:t>
             </a:fld>
             <a:endParaRPr lang="en-US"/>
           </a:p>
@@ -2572,7 +2569,7 @@
           <a:p>
             <a:fld id="{C1FF6DA9-008F-8B48-92A6-B652298478BF}" type="slidenum">
               <a:rPr lang="en-US" smtClean="0"/>
-              <a:t>‹#›</a:t>
+              <a:t>‹Nº›</a:t>
             </a:fld>
             <a:endParaRPr lang="en-US"/>
           </a:p>
@@ -2639,10 +2636,9 @@
           <a:lstStyle/>
           <a:p>
             <a:r>
-              <a:rPr lang="en-US" smtClean="0"/>
+              <a:rPr lang="en-US"/>
               <a:t>Click to edit Master title style</a:t>
             </a:r>
-            <a:endParaRPr lang="en-US"/>
           </a:p>
         </p:txBody>
       </p:sp>
@@ -2673,38 +2669,37 @@
           <a:p>
             <a:pPr lvl="0"/>
             <a:r>
-              <a:rPr lang="en-US" smtClean="0"/>
+              <a:rPr lang="en-US"/>
               <a:t>Click to edit Master text styles</a:t>
             </a:r>
           </a:p>
           <a:p>
             <a:pPr lvl="1"/>
             <a:r>
-              <a:rPr lang="en-US" smtClean="0"/>
+              <a:rPr lang="en-US"/>
               <a:t>Second level</a:t>
             </a:r>
           </a:p>
           <a:p>
             <a:pPr lvl="2"/>
             <a:r>
-              <a:rPr lang="en-US" smtClean="0"/>
+              <a:rPr lang="en-US"/>
               <a:t>Third level</a:t>
             </a:r>
           </a:p>
           <a:p>
             <a:pPr lvl="3"/>
             <a:r>
-              <a:rPr lang="en-US" smtClean="0"/>
+              <a:rPr lang="en-US"/>
               <a:t>Fourth level</a:t>
             </a:r>
           </a:p>
           <a:p>
             <a:pPr lvl="4"/>
             <a:r>
-              <a:rPr lang="en-US" smtClean="0"/>
+              <a:rPr lang="en-US"/>
               <a:t>Fifth level</a:t>
             </a:r>
-            <a:endParaRPr lang="en-US"/>
           </a:p>
         </p:txBody>
       </p:sp>
@@ -2743,7 +2738,7 @@
           <a:p>
             <a:fld id="{5BCAD085-E8A6-8845-BD4E-CB4CCA059FC4}" type="datetimeFigureOut">
               <a:rPr lang="en-US" smtClean="0"/>
-              <a:t>1/27/13</a:t>
+              <a:t>4/23/2026</a:t>
             </a:fld>
             <a:endParaRPr lang="en-US"/>
           </a:p>
@@ -2821,7 +2816,7 @@
           <a:p>
             <a:fld id="{C1FF6DA9-008F-8B48-92A6-B652298478BF}" type="slidenum">
               <a:rPr lang="en-US" smtClean="0"/>
-              <a:t>‹#›</a:t>
+              <a:t>‹Nº›</a:t>
             </a:fld>
             <a:endParaRPr lang="en-US"/>
           </a:p>
@@ -3102,7 +3097,7 @@
 </file>
 
 <file path=ppt/slides/slide1.xml><?xml version="1.0" encoding="utf-8"?>
-<p:sld xmlns:a="http://schemas.openxmlformats.org/drawingml/2006/main" xmlns:p="http://schemas.openxmlformats.org/presentationml/2006/main" xmlns:r="http://schemas.openxmlformats.org/officeDocument/2006/relationships">
+<p:sld xmlns:a="http://schemas.openxmlformats.org/drawingml/2006/main" xmlns:r="http://schemas.openxmlformats.org/officeDocument/2006/relationships" xmlns:p="http://schemas.openxmlformats.org/presentationml/2006/main">
   <p:cSld>
     <p:spTree>
       <p:nvGrpSpPr>
@@ -3110,7 +3105,14 @@
         <p:cNvGrpSpPr/>
         <p:nvPr/>
       </p:nvGrpSpPr>
-      <p:grpSpPr/>
+      <p:grpSpPr>
+        <a:xfrm>
+          <a:off x="0" y="0"/>
+          <a:ext cx="0" cy="0"/>
+          <a:chOff x="0" y="0"/>
+          <a:chExt cx="0" cy="0"/>
+        </a:xfrm>
+      </p:grpSpPr>
       <p:sp>
         <p:nvSpPr>
           <p:cNvPr id="2" name="Rectangle 1"/>
@@ -3151,6 +3153,7 @@
           <a:lstStyle/>
           <a:p>
             <a:pPr algn="ctr"/>
+            <a:endParaRPr/>
           </a:p>
         </p:txBody>
       </p:sp>
@@ -3194,6 +3197,7 @@
           <a:lstStyle/>
           <a:p>
             <a:pPr algn="ctr"/>
+            <a:endParaRPr/>
           </a:p>
         </p:txBody>
       </p:sp>
@@ -3312,7 +3316,7 @@
 </file>
 
 <file path=ppt/slides/slide10.xml><?xml version="1.0" encoding="utf-8"?>
-<p:sld xmlns:a="http://schemas.openxmlformats.org/drawingml/2006/main" xmlns:p="http://schemas.openxmlformats.org/presentationml/2006/main" xmlns:r="http://schemas.openxmlformats.org/officeDocument/2006/relationships">
+<p:sld xmlns:a="http://schemas.openxmlformats.org/drawingml/2006/main" xmlns:r="http://schemas.openxmlformats.org/officeDocument/2006/relationships" xmlns:p="http://schemas.openxmlformats.org/presentationml/2006/main">
   <p:cSld>
     <p:spTree>
       <p:nvGrpSpPr>
@@ -3320,7 +3324,14 @@
         <p:cNvGrpSpPr/>
         <p:nvPr/>
       </p:nvGrpSpPr>
-      <p:grpSpPr/>
+      <p:grpSpPr>
+        <a:xfrm>
+          <a:off x="0" y="0"/>
+          <a:ext cx="0" cy="0"/>
+          <a:chOff x="0" y="0"/>
+          <a:chExt cx="0" cy="0"/>
+        </a:xfrm>
+      </p:grpSpPr>
       <p:sp>
         <p:nvSpPr>
           <p:cNvPr id="2" name="Rectangle 1"/>
@@ -3361,6 +3372,7 @@
           <a:lstStyle/>
           <a:p>
             <a:pPr algn="ctr"/>
+            <a:endParaRPr/>
           </a:p>
         </p:txBody>
       </p:sp>
@@ -3438,6 +3450,7 @@
           <a:lstStyle/>
           <a:p>
             <a:pPr algn="ctr"/>
+            <a:endParaRPr/>
           </a:p>
         </p:txBody>
       </p:sp>
@@ -3515,6 +3528,7 @@
           <a:lstStyle/>
           <a:p>
             <a:pPr algn="ctr"/>
+            <a:endParaRPr/>
           </a:p>
         </p:txBody>
       </p:sp>
@@ -3539,14 +3553,6 @@
           <a:lstStyle/>
           <a:p>
             <a:br/>
-            <a:pPr algn="l">
-              <a:defRPr sz="1500" b="0">
-                <a:solidFill>
-                  <a:srgbClr val="D4D4D4"/>
-                </a:solidFill>
-                <a:latin typeface="Consolas"/>
-              </a:defRPr>
-            </a:pPr>
             <a:r>
               <a:t>// Mapa de transiciones validas</a:t>
             </a:r>
@@ -3652,7 +3658,7 @@
 </file>
 
 <file path=ppt/slides/slide11.xml><?xml version="1.0" encoding="utf-8"?>
-<p:sld xmlns:a="http://schemas.openxmlformats.org/drawingml/2006/main" xmlns:p="http://schemas.openxmlformats.org/presentationml/2006/main" xmlns:r="http://schemas.openxmlformats.org/officeDocument/2006/relationships">
+<p:sld xmlns:a="http://schemas.openxmlformats.org/drawingml/2006/main" xmlns:r="http://schemas.openxmlformats.org/officeDocument/2006/relationships" xmlns:p="http://schemas.openxmlformats.org/presentationml/2006/main">
   <p:cSld>
     <p:spTree>
       <p:nvGrpSpPr>
@@ -3660,7 +3666,14 @@
         <p:cNvGrpSpPr/>
         <p:nvPr/>
       </p:nvGrpSpPr>
-      <p:grpSpPr/>
+      <p:grpSpPr>
+        <a:xfrm>
+          <a:off x="0" y="0"/>
+          <a:ext cx="0" cy="0"/>
+          <a:chOff x="0" y="0"/>
+          <a:chExt cx="0" cy="0"/>
+        </a:xfrm>
+      </p:grpSpPr>
       <p:sp>
         <p:nvSpPr>
           <p:cNvPr id="2" name="Rectangle 1"/>
@@ -3701,6 +3714,7 @@
           <a:lstStyle/>
           <a:p>
             <a:pPr algn="ctr"/>
+            <a:endParaRPr/>
           </a:p>
         </p:txBody>
       </p:sp>
@@ -3781,7 +3795,7 @@
 </file>
 
 <file path=ppt/slides/slide12.xml><?xml version="1.0" encoding="utf-8"?>
-<p:sld xmlns:a="http://schemas.openxmlformats.org/drawingml/2006/main" xmlns:p="http://schemas.openxmlformats.org/presentationml/2006/main" xmlns:r="http://schemas.openxmlformats.org/officeDocument/2006/relationships">
+<p:sld xmlns:a="http://schemas.openxmlformats.org/drawingml/2006/main" xmlns:r="http://schemas.openxmlformats.org/officeDocument/2006/relationships" xmlns:p="http://schemas.openxmlformats.org/presentationml/2006/main">
   <p:cSld>
     <p:spTree>
       <p:nvGrpSpPr>
@@ -3789,7 +3803,14 @@
         <p:cNvGrpSpPr/>
         <p:nvPr/>
       </p:nvGrpSpPr>
-      <p:grpSpPr/>
+      <p:grpSpPr>
+        <a:xfrm>
+          <a:off x="0" y="0"/>
+          <a:ext cx="0" cy="0"/>
+          <a:chOff x="0" y="0"/>
+          <a:chExt cx="0" cy="0"/>
+        </a:xfrm>
+      </p:grpSpPr>
       <p:sp>
         <p:nvSpPr>
           <p:cNvPr id="2" name="Rectangle 1"/>
@@ -3830,6 +3851,7 @@
           <a:lstStyle/>
           <a:p>
             <a:pPr algn="ctr"/>
+            <a:endParaRPr/>
           </a:p>
         </p:txBody>
       </p:sp>
@@ -3907,6 +3929,7 @@
           <a:lstStyle/>
           <a:p>
             <a:pPr algn="ctr"/>
+            <a:endParaRPr/>
           </a:p>
         </p:txBody>
       </p:sp>
@@ -4070,7 +4093,7 @@
 </file>
 
 <file path=ppt/slides/slide13.xml><?xml version="1.0" encoding="utf-8"?>
-<p:sld xmlns:a="http://schemas.openxmlformats.org/drawingml/2006/main" xmlns:p="http://schemas.openxmlformats.org/presentationml/2006/main" xmlns:r="http://schemas.openxmlformats.org/officeDocument/2006/relationships">
+<p:sld xmlns:a="http://schemas.openxmlformats.org/drawingml/2006/main" xmlns:r="http://schemas.openxmlformats.org/officeDocument/2006/relationships" xmlns:p="http://schemas.openxmlformats.org/presentationml/2006/main">
   <p:cSld>
     <p:spTree>
       <p:nvGrpSpPr>
@@ -4078,7 +4101,14 @@
         <p:cNvGrpSpPr/>
         <p:nvPr/>
       </p:nvGrpSpPr>
-      <p:grpSpPr/>
+      <p:grpSpPr>
+        <a:xfrm>
+          <a:off x="0" y="0"/>
+          <a:ext cx="0" cy="0"/>
+          <a:chOff x="0" y="0"/>
+          <a:chExt cx="0" cy="0"/>
+        </a:xfrm>
+      </p:grpSpPr>
       <p:sp>
         <p:nvSpPr>
           <p:cNvPr id="2" name="Rectangle 1"/>
@@ -4119,6 +4149,7 @@
           <a:lstStyle/>
           <a:p>
             <a:pPr algn="ctr"/>
+            <a:endParaRPr/>
           </a:p>
         </p:txBody>
       </p:sp>
@@ -4230,6 +4261,7 @@
           <a:lstStyle/>
           <a:p>
             <a:pPr algn="ctr"/>
+            <a:endParaRPr/>
           </a:p>
         </p:txBody>
       </p:sp>
@@ -4307,6 +4339,7 @@
           <a:lstStyle/>
           <a:p>
             <a:pPr algn="ctr"/>
+            <a:endParaRPr/>
           </a:p>
         </p:txBody>
       </p:sp>
@@ -4331,14 +4364,6 @@
           <a:lstStyle/>
           <a:p>
             <a:br/>
-            <a:pPr algn="l">
-              <a:defRPr sz="1500" b="0">
-                <a:solidFill>
-                  <a:srgbClr val="D4D4D4"/>
-                </a:solidFill>
-                <a:latin typeface="Consolas"/>
-              </a:defRPr>
-            </a:pPr>
             <a:r>
               <a:t>// collections_config.json - se pasa al desplegar el chaincode</a:t>
             </a:r>
@@ -4430,7 +4455,7 @@
 </file>
 
 <file path=ppt/slides/slide14.xml><?xml version="1.0" encoding="utf-8"?>
-<p:sld xmlns:a="http://schemas.openxmlformats.org/drawingml/2006/main" xmlns:p="http://schemas.openxmlformats.org/presentationml/2006/main" xmlns:r="http://schemas.openxmlformats.org/officeDocument/2006/relationships">
+<p:sld xmlns:a="http://schemas.openxmlformats.org/drawingml/2006/main" xmlns:r="http://schemas.openxmlformats.org/officeDocument/2006/relationships" xmlns:p="http://schemas.openxmlformats.org/presentationml/2006/main">
   <p:cSld>
     <p:spTree>
       <p:nvGrpSpPr>
@@ -4438,7 +4463,14 @@
         <p:cNvGrpSpPr/>
         <p:nvPr/>
       </p:nvGrpSpPr>
-      <p:grpSpPr/>
+      <p:grpSpPr>
+        <a:xfrm>
+          <a:off x="0" y="0"/>
+          <a:ext cx="0" cy="0"/>
+          <a:chOff x="0" y="0"/>
+          <a:chExt cx="0" cy="0"/>
+        </a:xfrm>
+      </p:grpSpPr>
       <p:sp>
         <p:nvSpPr>
           <p:cNvPr id="2" name="Rectangle 1"/>
@@ -4479,6 +4511,7 @@
           <a:lstStyle/>
           <a:p>
             <a:pPr algn="ctr"/>
+            <a:endParaRPr/>
           </a:p>
         </p:txBody>
       </p:sp>
@@ -4590,6 +4623,7 @@
           <a:lstStyle/>
           <a:p>
             <a:pPr algn="ctr"/>
+            <a:endParaRPr/>
           </a:p>
         </p:txBody>
       </p:sp>
@@ -4667,6 +4701,7 @@
           <a:lstStyle/>
           <a:p>
             <a:pPr algn="ctr"/>
+            <a:endParaRPr/>
           </a:p>
         </p:txBody>
       </p:sp>
@@ -4691,14 +4726,6 @@
           <a:lstStyle/>
           <a:p>
             <a:br/>
-            <a:pPr algn="l">
-              <a:defRPr sz="1500" b="0">
-                <a:solidFill>
-                  <a:srgbClr val="D4D4D4"/>
-                </a:solidFill>
-                <a:latin typeface="Consolas"/>
-              </a:defRPr>
-            </a:pPr>
             <a:r>
               <a:t>// Escribir en una Private Data Collection</a:t>
             </a:r>
@@ -4806,7 +4833,7 @@
 </file>
 
 <file path=ppt/slides/slide15.xml><?xml version="1.0" encoding="utf-8"?>
-<p:sld xmlns:a="http://schemas.openxmlformats.org/drawingml/2006/main" xmlns:p="http://schemas.openxmlformats.org/presentationml/2006/main" xmlns:r="http://schemas.openxmlformats.org/officeDocument/2006/relationships">
+<p:sld xmlns:a="http://schemas.openxmlformats.org/drawingml/2006/main" xmlns:r="http://schemas.openxmlformats.org/officeDocument/2006/relationships" xmlns:p="http://schemas.openxmlformats.org/presentationml/2006/main">
   <p:cSld>
     <p:spTree>
       <p:nvGrpSpPr>
@@ -4814,7 +4841,14 @@
         <p:cNvGrpSpPr/>
         <p:nvPr/>
       </p:nvGrpSpPr>
-      <p:grpSpPr/>
+      <p:grpSpPr>
+        <a:xfrm>
+          <a:off x="0" y="0"/>
+          <a:ext cx="0" cy="0"/>
+          <a:chOff x="0" y="0"/>
+          <a:chExt cx="0" cy="0"/>
+        </a:xfrm>
+      </p:grpSpPr>
       <p:sp>
         <p:nvSpPr>
           <p:cNvPr id="2" name="Rectangle 1"/>
@@ -4855,6 +4889,7 @@
           <a:lstStyle/>
           <a:p>
             <a:pPr algn="ctr"/>
+            <a:endParaRPr/>
           </a:p>
         </p:txBody>
       </p:sp>
@@ -4932,6 +4967,7 @@
           <a:lstStyle/>
           <a:p>
             <a:pPr algn="ctr"/>
+            <a:endParaRPr/>
           </a:p>
         </p:txBody>
       </p:sp>
@@ -5079,7 +5115,7 @@
 </file>
 
 <file path=ppt/slides/slide16.xml><?xml version="1.0" encoding="utf-8"?>
-<p:sld xmlns:a="http://schemas.openxmlformats.org/drawingml/2006/main" xmlns:p="http://schemas.openxmlformats.org/presentationml/2006/main" xmlns:r="http://schemas.openxmlformats.org/officeDocument/2006/relationships">
+<p:sld xmlns:a="http://schemas.openxmlformats.org/drawingml/2006/main" xmlns:r="http://schemas.openxmlformats.org/officeDocument/2006/relationships" xmlns:p="http://schemas.openxmlformats.org/presentationml/2006/main">
   <p:cSld>
     <p:spTree>
       <p:nvGrpSpPr>
@@ -5087,7 +5123,14 @@
         <p:cNvGrpSpPr/>
         <p:nvPr/>
       </p:nvGrpSpPr>
-      <p:grpSpPr/>
+      <p:grpSpPr>
+        <a:xfrm>
+          <a:off x="0" y="0"/>
+          <a:ext cx="0" cy="0"/>
+          <a:chOff x="0" y="0"/>
+          <a:chExt cx="0" cy="0"/>
+        </a:xfrm>
+      </p:grpSpPr>
       <p:sp>
         <p:nvSpPr>
           <p:cNvPr id="2" name="Rectangle 1"/>
@@ -5128,6 +5171,7 @@
           <a:lstStyle/>
           <a:p>
             <a:pPr algn="ctr"/>
+            <a:endParaRPr/>
           </a:p>
         </p:txBody>
       </p:sp>
@@ -5205,6 +5249,7 @@
           <a:lstStyle/>
           <a:p>
             <a:pPr algn="ctr"/>
+            <a:endParaRPr/>
           </a:p>
         </p:txBody>
       </p:sp>
@@ -5282,6 +5327,7 @@
           <a:lstStyle/>
           <a:p>
             <a:pPr algn="ctr"/>
+            <a:endParaRPr/>
           </a:p>
         </p:txBody>
       </p:sp>
@@ -5306,14 +5352,6 @@
           <a:lstStyle/>
           <a:p>
             <a:br/>
-            <a:pPr algn="l">
-              <a:defRPr sz="1500" b="0">
-                <a:solidFill>
-                  <a:srgbClr val="D4D4D4"/>
-                </a:solidFill>
-                <a:latin typeface="Consolas"/>
-              </a:defRPr>
-            </a:pPr>
             <a:r>
               <a:t>// En el chaincode: emitir evento al transferir</a:t>
             </a:r>
@@ -5428,7 +5466,7 @@
 </file>
 
 <file path=ppt/slides/slide17.xml><?xml version="1.0" encoding="utf-8"?>
-<p:sld xmlns:a="http://schemas.openxmlformats.org/drawingml/2006/main" xmlns:p="http://schemas.openxmlformats.org/presentationml/2006/main" xmlns:r="http://schemas.openxmlformats.org/officeDocument/2006/relationships">
+<p:sld xmlns:a="http://schemas.openxmlformats.org/drawingml/2006/main" xmlns:r="http://schemas.openxmlformats.org/officeDocument/2006/relationships" xmlns:p="http://schemas.openxmlformats.org/presentationml/2006/main">
   <p:cSld>
     <p:spTree>
       <p:nvGrpSpPr>
@@ -5436,7 +5474,14 @@
         <p:cNvGrpSpPr/>
         <p:nvPr/>
       </p:nvGrpSpPr>
-      <p:grpSpPr/>
+      <p:grpSpPr>
+        <a:xfrm>
+          <a:off x="0" y="0"/>
+          <a:ext cx="0" cy="0"/>
+          <a:chOff x="0" y="0"/>
+          <a:chExt cx="0" cy="0"/>
+        </a:xfrm>
+      </p:grpSpPr>
       <p:sp>
         <p:nvSpPr>
           <p:cNvPr id="2" name="Rectangle 1"/>
@@ -5477,6 +5522,7 @@
           <a:lstStyle/>
           <a:p>
             <a:pPr algn="ctr"/>
+            <a:endParaRPr/>
           </a:p>
         </p:txBody>
       </p:sp>
@@ -5520,6 +5566,7 @@
           <a:lstStyle/>
           <a:p>
             <a:pPr algn="ctr"/>
+            <a:endParaRPr/>
           </a:p>
         </p:txBody>
       </p:sp>
@@ -5631,6 +5678,7 @@
           <a:lstStyle/>
           <a:p>
             <a:pPr algn="ctr"/>
+            <a:endParaRPr/>
           </a:p>
         </p:txBody>
       </p:sp>
@@ -5683,6 +5731,7 @@
                 <a:latin typeface="Calibri"/>
               </a:defRPr>
             </a:pPr>
+            <a:endParaRPr/>
           </a:p>
           <a:p>
             <a:pPr>
@@ -5808,6 +5857,7 @@
                 <a:latin typeface="Calibri"/>
               </a:defRPr>
             </a:pPr>
+            <a:endParaRPr/>
           </a:p>
           <a:p>
             <a:pPr>
@@ -5853,6 +5903,7 @@
                 <a:latin typeface="Calibri"/>
               </a:defRPr>
             </a:pPr>
+            <a:endParaRPr/>
           </a:p>
           <a:p>
             <a:pPr>
@@ -5881,7 +5932,7 @@
 </file>
 
 <file path=ppt/slides/slide18.xml><?xml version="1.0" encoding="utf-8"?>
-<p:sld xmlns:a="http://schemas.openxmlformats.org/drawingml/2006/main" xmlns:p="http://schemas.openxmlformats.org/presentationml/2006/main" xmlns:r="http://schemas.openxmlformats.org/officeDocument/2006/relationships">
+<p:sld xmlns:a="http://schemas.openxmlformats.org/drawingml/2006/main" xmlns:r="http://schemas.openxmlformats.org/officeDocument/2006/relationships" xmlns:p="http://schemas.openxmlformats.org/presentationml/2006/main">
   <p:cSld>
     <p:spTree>
       <p:nvGrpSpPr>
@@ -5889,7 +5940,14 @@
         <p:cNvGrpSpPr/>
         <p:nvPr/>
       </p:nvGrpSpPr>
-      <p:grpSpPr/>
+      <p:grpSpPr>
+        <a:xfrm>
+          <a:off x="0" y="0"/>
+          <a:ext cx="0" cy="0"/>
+          <a:chOff x="0" y="0"/>
+          <a:chExt cx="0" cy="0"/>
+        </a:xfrm>
+      </p:grpSpPr>
       <p:sp>
         <p:nvSpPr>
           <p:cNvPr id="2" name="Rectangle 1"/>
@@ -5930,6 +5988,7 @@
           <a:lstStyle/>
           <a:p>
             <a:pPr algn="ctr"/>
+            <a:endParaRPr/>
           </a:p>
         </p:txBody>
       </p:sp>
@@ -6007,6 +6066,7 @@
           <a:lstStyle/>
           <a:p>
             <a:pPr algn="ctr"/>
+            <a:endParaRPr/>
           </a:p>
         </p:txBody>
       </p:sp>
@@ -6050,6 +6110,7 @@
           <a:lstStyle/>
           <a:p>
             <a:pPr algn="ctr"/>
+            <a:endParaRPr/>
           </a:p>
         </p:txBody>
       </p:sp>
@@ -6127,6 +6188,7 @@
           <a:lstStyle/>
           <a:p>
             <a:pPr algn="ctr"/>
+            <a:endParaRPr/>
           </a:p>
         </p:txBody>
       </p:sp>
@@ -6227,7 +6289,7 @@
 </file>
 
 <file path=ppt/slides/slide19.xml><?xml version="1.0" encoding="utf-8"?>
-<p:sld xmlns:a="http://schemas.openxmlformats.org/drawingml/2006/main" xmlns:p="http://schemas.openxmlformats.org/presentationml/2006/main" xmlns:r="http://schemas.openxmlformats.org/officeDocument/2006/relationships">
+<p:sld xmlns:a="http://schemas.openxmlformats.org/drawingml/2006/main" xmlns:r="http://schemas.openxmlformats.org/officeDocument/2006/relationships" xmlns:p="http://schemas.openxmlformats.org/presentationml/2006/main">
   <p:cSld>
     <p:spTree>
       <p:nvGrpSpPr>
@@ -6235,7 +6297,14 @@
         <p:cNvGrpSpPr/>
         <p:nvPr/>
       </p:nvGrpSpPr>
-      <p:grpSpPr/>
+      <p:grpSpPr>
+        <a:xfrm>
+          <a:off x="0" y="0"/>
+          <a:ext cx="0" cy="0"/>
+          <a:chOff x="0" y="0"/>
+          <a:chExt cx="0" cy="0"/>
+        </a:xfrm>
+      </p:grpSpPr>
       <p:sp>
         <p:nvSpPr>
           <p:cNvPr id="2" name="Rectangle 1"/>
@@ -6276,6 +6345,7 @@
           <a:lstStyle/>
           <a:p>
             <a:pPr algn="ctr"/>
+            <a:endParaRPr/>
           </a:p>
         </p:txBody>
       </p:sp>
@@ -6319,6 +6389,7 @@
           <a:lstStyle/>
           <a:p>
             <a:pPr algn="ctr"/>
+            <a:endParaRPr/>
           </a:p>
         </p:txBody>
       </p:sp>
@@ -6430,6 +6501,7 @@
           <a:lstStyle/>
           <a:p>
             <a:pPr algn="ctr"/>
+            <a:endParaRPr/>
           </a:p>
         </p:txBody>
       </p:sp>
@@ -6545,7 +6617,7 @@
 </file>
 
 <file path=ppt/slides/slide2.xml><?xml version="1.0" encoding="utf-8"?>
-<p:sld xmlns:a="http://schemas.openxmlformats.org/drawingml/2006/main" xmlns:p="http://schemas.openxmlformats.org/presentationml/2006/main" xmlns:r="http://schemas.openxmlformats.org/officeDocument/2006/relationships">
+<p:sld xmlns:a="http://schemas.openxmlformats.org/drawingml/2006/main" xmlns:r="http://schemas.openxmlformats.org/officeDocument/2006/relationships" xmlns:p="http://schemas.openxmlformats.org/presentationml/2006/main">
   <p:cSld>
     <p:spTree>
       <p:nvGrpSpPr>
@@ -6553,7 +6625,14 @@
         <p:cNvGrpSpPr/>
         <p:nvPr/>
       </p:nvGrpSpPr>
-      <p:grpSpPr/>
+      <p:grpSpPr>
+        <a:xfrm>
+          <a:off x="0" y="0"/>
+          <a:ext cx="0" cy="0"/>
+          <a:chOff x="0" y="0"/>
+          <a:chExt cx="0" cy="0"/>
+        </a:xfrm>
+      </p:grpSpPr>
       <p:sp>
         <p:nvSpPr>
           <p:cNvPr id="2" name="Rectangle 1"/>
@@ -6594,6 +6673,7 @@
           <a:lstStyle/>
           <a:p>
             <a:pPr algn="ctr"/>
+            <a:endParaRPr/>
           </a:p>
         </p:txBody>
       </p:sp>
@@ -6671,6 +6751,7 @@
           <a:lstStyle/>
           <a:p>
             <a:pPr algn="ctr"/>
+            <a:endParaRPr/>
           </a:p>
         </p:txBody>
       </p:sp>
@@ -6770,7 +6851,7 @@
 </file>
 
 <file path=ppt/slides/slide20.xml><?xml version="1.0" encoding="utf-8"?>
-<p:sld xmlns:a="http://schemas.openxmlformats.org/drawingml/2006/main" xmlns:p="http://schemas.openxmlformats.org/presentationml/2006/main" xmlns:r="http://schemas.openxmlformats.org/officeDocument/2006/relationships">
+<p:sld xmlns:a="http://schemas.openxmlformats.org/drawingml/2006/main" xmlns:r="http://schemas.openxmlformats.org/officeDocument/2006/relationships" xmlns:p="http://schemas.openxmlformats.org/presentationml/2006/main">
   <p:cSld>
     <p:spTree>
       <p:nvGrpSpPr>
@@ -6778,7 +6859,14 @@
         <p:cNvGrpSpPr/>
         <p:nvPr/>
       </p:nvGrpSpPr>
-      <p:grpSpPr/>
+      <p:grpSpPr>
+        <a:xfrm>
+          <a:off x="0" y="0"/>
+          <a:ext cx="0" cy="0"/>
+          <a:chOff x="0" y="0"/>
+          <a:chExt cx="0" cy="0"/>
+        </a:xfrm>
+      </p:grpSpPr>
       <p:sp>
         <p:nvSpPr>
           <p:cNvPr id="2" name="Rectangle 1"/>
@@ -6819,6 +6907,7 @@
           <a:lstStyle/>
           <a:p>
             <a:pPr algn="ctr"/>
+            <a:endParaRPr/>
           </a:p>
         </p:txBody>
       </p:sp>
@@ -6896,6 +6985,7 @@
           <a:lstStyle/>
           <a:p>
             <a:pPr algn="ctr"/>
+            <a:endParaRPr/>
           </a:p>
         </p:txBody>
       </p:sp>
@@ -6908,7 +6998,7 @@
         <p:spPr>
           <a:xfrm>
             <a:off x="640080" y="1280160"/>
-            <a:ext cx="10515600" cy="5029200"/>
+            <a:ext cx="10515600" cy="5652830"/>
           </a:xfrm>
           <a:prstGeom prst="rect">
             <a:avLst/>
@@ -6933,7 +7023,32 @@
               </a:defRPr>
             </a:pPr>
             <a:r>
-              <a:t>1. Logica en chaincode vs app cliente:</a:t>
+              <a:rPr dirty="0"/>
+              <a:t>1. Logica </a:t>
+            </a:r>
+            <a:r>
+              <a:rPr dirty="0" err="1"/>
+              <a:t>en</a:t>
+            </a:r>
+            <a:r>
+              <a:rPr dirty="0"/>
+              <a:t> </a:t>
+            </a:r>
+            <a:r>
+              <a:rPr dirty="0" err="1"/>
+              <a:t>chaincode</a:t>
+            </a:r>
+            <a:r>
+              <a:rPr dirty="0"/>
+              <a:t> vs app </a:t>
+            </a:r>
+            <a:r>
+              <a:rPr dirty="0" err="1"/>
+              <a:t>cliente</a:t>
+            </a:r>
+            <a:r>
+              <a:rPr dirty="0"/>
+              <a:t>:</a:t>
             </a:r>
           </a:p>
           <a:p>
@@ -6949,7 +7064,80 @@
               </a:defRPr>
             </a:pPr>
             <a:r>
-              <a:t>    En el chaincode: reglas de negocio inmutables (saldos, permisos, transiciones validas).</a:t>
+              <a:rPr sz="1600" dirty="0"/>
+              <a:t>    En </a:t>
+            </a:r>
+            <a:r>
+              <a:rPr sz="1600" dirty="0" err="1"/>
+              <a:t>el</a:t>
+            </a:r>
+            <a:r>
+              <a:rPr sz="1600" dirty="0"/>
+              <a:t> </a:t>
+            </a:r>
+            <a:r>
+              <a:rPr sz="1600" dirty="0" err="1"/>
+              <a:t>chaincode</a:t>
+            </a:r>
+            <a:r>
+              <a:rPr sz="1600" dirty="0"/>
+              <a:t>: </a:t>
+            </a:r>
+            <a:r>
+              <a:rPr sz="1600" dirty="0" err="1"/>
+              <a:t>reglas</a:t>
+            </a:r>
+            <a:r>
+              <a:rPr sz="1600" dirty="0"/>
+              <a:t> de </a:t>
+            </a:r>
+            <a:r>
+              <a:rPr sz="1600" dirty="0" err="1"/>
+              <a:t>negocio</a:t>
+            </a:r>
+            <a:r>
+              <a:rPr sz="1600" dirty="0"/>
+              <a:t> </a:t>
+            </a:r>
+            <a:r>
+              <a:rPr sz="1600" dirty="0" err="1"/>
+              <a:t>inmutables</a:t>
+            </a:r>
+            <a:r>
+              <a:rPr sz="1600" dirty="0"/>
+              <a:t> (</a:t>
+            </a:r>
+            <a:r>
+              <a:rPr sz="1600" dirty="0" err="1"/>
+              <a:t>saldos</a:t>
+            </a:r>
+            <a:r>
+              <a:rPr sz="1600" dirty="0"/>
+              <a:t>, </a:t>
+            </a:r>
+            <a:r>
+              <a:rPr sz="1600" dirty="0" err="1"/>
+              <a:t>permisos</a:t>
+            </a:r>
+            <a:r>
+              <a:rPr sz="1600" dirty="0"/>
+              <a:t>, </a:t>
+            </a:r>
+            <a:r>
+              <a:rPr sz="1600" dirty="0" err="1"/>
+              <a:t>transiciones</a:t>
+            </a:r>
+            <a:r>
+              <a:rPr sz="1600" dirty="0"/>
+              <a:t> </a:t>
+            </a:r>
+            <a:r>
+              <a:rPr sz="1600" dirty="0" err="1"/>
+              <a:t>validas</a:t>
+            </a:r>
+            <a:r>
+              <a:rPr sz="1600" dirty="0"/>
+              <a:t>).</a:t>
             </a:r>
           </a:p>
           <a:p>
@@ -6965,7 +7153,48 @@
               </a:defRPr>
             </a:pPr>
             <a:r>
-              <a:t>    En el cliente: UI, orquestacion, validaciones de formato, UX.</a:t>
+              <a:rPr sz="1600" dirty="0"/>
+              <a:t>    En </a:t>
+            </a:r>
+            <a:r>
+              <a:rPr sz="1600" dirty="0" err="1"/>
+              <a:t>el</a:t>
+            </a:r>
+            <a:r>
+              <a:rPr sz="1600" dirty="0"/>
+              <a:t> </a:t>
+            </a:r>
+            <a:r>
+              <a:rPr sz="1600" dirty="0" err="1"/>
+              <a:t>cliente</a:t>
+            </a:r>
+            <a:r>
+              <a:rPr sz="1600" dirty="0"/>
+              <a:t>: UI, </a:t>
+            </a:r>
+            <a:r>
+              <a:rPr sz="1600" dirty="0" err="1"/>
+              <a:t>orquestacion</a:t>
+            </a:r>
+            <a:r>
+              <a:rPr sz="1600" dirty="0"/>
+              <a:t>, </a:t>
+            </a:r>
+            <a:r>
+              <a:rPr sz="1600" dirty="0" err="1"/>
+              <a:t>validaciones</a:t>
+            </a:r>
+            <a:r>
+              <a:rPr sz="1600" dirty="0"/>
+              <a:t> de </a:t>
+            </a:r>
+            <a:r>
+              <a:rPr sz="1600" dirty="0" err="1"/>
+              <a:t>formato</a:t>
+            </a:r>
+            <a:r>
+              <a:rPr sz="1600" dirty="0"/>
+              <a:t>, UX.</a:t>
             </a:r>
           </a:p>
           <a:p>
@@ -6981,7 +7210,72 @@
               </a:defRPr>
             </a:pPr>
             <a:r>
-              <a:t>    Regla: si se puede saltar desde otro cliente, NO es regla de negocio real.</a:t>
+              <a:rPr sz="1600" dirty="0"/>
+              <a:t>    Regla: </a:t>
+            </a:r>
+            <a:r>
+              <a:rPr sz="1600" dirty="0" err="1"/>
+              <a:t>si</a:t>
+            </a:r>
+            <a:r>
+              <a:rPr sz="1600" dirty="0"/>
+              <a:t> se </a:t>
+            </a:r>
+            <a:r>
+              <a:rPr sz="1600" dirty="0" err="1"/>
+              <a:t>puede</a:t>
+            </a:r>
+            <a:r>
+              <a:rPr sz="1600" dirty="0"/>
+              <a:t> </a:t>
+            </a:r>
+            <a:r>
+              <a:rPr sz="1600" dirty="0" err="1"/>
+              <a:t>saltar</a:t>
+            </a:r>
+            <a:r>
+              <a:rPr sz="1600" dirty="0"/>
+              <a:t> </a:t>
+            </a:r>
+            <a:r>
+              <a:rPr sz="1600" dirty="0" err="1"/>
+              <a:t>desde</a:t>
+            </a:r>
+            <a:r>
+              <a:rPr sz="1600" dirty="0"/>
+              <a:t> </a:t>
+            </a:r>
+            <a:r>
+              <a:rPr sz="1600" dirty="0" err="1"/>
+              <a:t>otro</a:t>
+            </a:r>
+            <a:r>
+              <a:rPr sz="1600" dirty="0"/>
+              <a:t> </a:t>
+            </a:r>
+            <a:r>
+              <a:rPr sz="1600" dirty="0" err="1"/>
+              <a:t>cliente</a:t>
+            </a:r>
+            <a:r>
+              <a:rPr sz="1600" dirty="0"/>
+              <a:t>, NO es </a:t>
+            </a:r>
+            <a:r>
+              <a:rPr sz="1600" dirty="0" err="1"/>
+              <a:t>regla</a:t>
+            </a:r>
+            <a:r>
+              <a:rPr sz="1600" dirty="0"/>
+              <a:t> de </a:t>
+            </a:r>
+            <a:r>
+              <a:rPr sz="1600" dirty="0" err="1"/>
+              <a:t>negocio</a:t>
+            </a:r>
+            <a:r>
+              <a:rPr sz="1600" dirty="0"/>
+              <a:t> real.</a:t>
             </a:r>
           </a:p>
           <a:p>
@@ -6997,7 +7291,56 @@
               </a:defRPr>
             </a:pPr>
             <a:r>
-              <a:t>    Si la regla afecta al ledger (consistencia entre todos los peers) -&gt; chaincode.</a:t>
+              <a:rPr sz="1600" dirty="0"/>
+              <a:t>    Si la </a:t>
+            </a:r>
+            <a:r>
+              <a:rPr sz="1600" dirty="0" err="1"/>
+              <a:t>regla</a:t>
+            </a:r>
+            <a:r>
+              <a:rPr sz="1600" dirty="0"/>
+              <a:t> </a:t>
+            </a:r>
+            <a:r>
+              <a:rPr sz="1600" dirty="0" err="1"/>
+              <a:t>afecta</a:t>
+            </a:r>
+            <a:r>
+              <a:rPr sz="1600" dirty="0"/>
+              <a:t> al ledger (</a:t>
+            </a:r>
+            <a:r>
+              <a:rPr sz="1600" dirty="0" err="1"/>
+              <a:t>consistencia</a:t>
+            </a:r>
+            <a:r>
+              <a:rPr sz="1600" dirty="0"/>
+              <a:t> entre </a:t>
+            </a:r>
+            <a:r>
+              <a:rPr sz="1600" dirty="0" err="1"/>
+              <a:t>todos</a:t>
+            </a:r>
+            <a:r>
+              <a:rPr sz="1600" dirty="0"/>
+              <a:t> </a:t>
+            </a:r>
+            <a:r>
+              <a:rPr sz="1600" dirty="0" err="1"/>
+              <a:t>los</a:t>
+            </a:r>
+            <a:r>
+              <a:rPr sz="1600" dirty="0"/>
+              <a:t> peers) -&gt; </a:t>
+            </a:r>
+            <a:r>
+              <a:rPr sz="1600" dirty="0" err="1"/>
+              <a:t>chaincode</a:t>
+            </a:r>
+            <a:r>
+              <a:rPr sz="1600" dirty="0"/>
+              <a:t>.</a:t>
             </a:r>
           </a:p>
           <a:p>
@@ -7013,7 +7356,40 @@
               </a:defRPr>
             </a:pPr>
             <a:r>
-              <a:t>2. Cambiar la maquina de estados despues del despliegue:</a:t>
+              <a:rPr dirty="0"/>
+              <a:t>2. Cambiar la </a:t>
+            </a:r>
+            <a:r>
+              <a:rPr dirty="0" err="1"/>
+              <a:t>maquina</a:t>
+            </a:r>
+            <a:r>
+              <a:rPr dirty="0"/>
+              <a:t> de </a:t>
+            </a:r>
+            <a:r>
+              <a:rPr dirty="0" err="1"/>
+              <a:t>estados</a:t>
+            </a:r>
+            <a:r>
+              <a:rPr dirty="0"/>
+              <a:t> </a:t>
+            </a:r>
+            <a:r>
+              <a:rPr dirty="0" err="1"/>
+              <a:t>despues</a:t>
+            </a:r>
+            <a:r>
+              <a:rPr dirty="0"/>
+              <a:t> del </a:t>
+            </a:r>
+            <a:r>
+              <a:rPr dirty="0" err="1"/>
+              <a:t>despliegue</a:t>
+            </a:r>
+            <a:r>
+              <a:rPr dirty="0"/>
+              <a:t>:</a:t>
             </a:r>
           </a:p>
           <a:p>
@@ -7029,7 +7405,48 @@
               </a:defRPr>
             </a:pPr>
             <a:r>
-              <a:t>    Se despliega una nueva version del chaincode con sequence incrementado.</a:t>
+              <a:rPr sz="1600" dirty="0"/>
+              <a:t>    Se </a:t>
+            </a:r>
+            <a:r>
+              <a:rPr sz="1600" dirty="0" err="1"/>
+              <a:t>despliega</a:t>
+            </a:r>
+            <a:r>
+              <a:rPr sz="1600" dirty="0"/>
+              <a:t> </a:t>
+            </a:r>
+            <a:r>
+              <a:rPr sz="1600" dirty="0" err="1"/>
+              <a:t>una</a:t>
+            </a:r>
+            <a:r>
+              <a:rPr sz="1600" dirty="0"/>
+              <a:t> </a:t>
+            </a:r>
+            <a:r>
+              <a:rPr sz="1600" dirty="0" err="1"/>
+              <a:t>nueva</a:t>
+            </a:r>
+            <a:r>
+              <a:rPr sz="1600" dirty="0"/>
+              <a:t> version del </a:t>
+            </a:r>
+            <a:r>
+              <a:rPr sz="1600" dirty="0" err="1"/>
+              <a:t>chaincode</a:t>
+            </a:r>
+            <a:r>
+              <a:rPr sz="1600" dirty="0"/>
+              <a:t> con sequence </a:t>
+            </a:r>
+            <a:r>
+              <a:rPr sz="1600" dirty="0" err="1"/>
+              <a:t>incrementado</a:t>
+            </a:r>
+            <a:r>
+              <a:rPr sz="1600" dirty="0"/>
+              <a:t>.</a:t>
             </a:r>
           </a:p>
           <a:p>
@@ -7045,7 +7462,48 @@
               </a:defRPr>
             </a:pPr>
             <a:r>
-              <a:t>    El World State se preserva — los datos antiguos siguen ahi.</a:t>
+              <a:rPr sz="1600" dirty="0"/>
+              <a:t>    El World State se </a:t>
+            </a:r>
+            <a:r>
+              <a:rPr sz="1600" dirty="0" err="1"/>
+              <a:t>preserva</a:t>
+            </a:r>
+            <a:r>
+              <a:rPr sz="1600" dirty="0"/>
+              <a:t> — </a:t>
+            </a:r>
+            <a:r>
+              <a:rPr sz="1600" dirty="0" err="1"/>
+              <a:t>los</a:t>
+            </a:r>
+            <a:r>
+              <a:rPr sz="1600" dirty="0"/>
+              <a:t> </a:t>
+            </a:r>
+            <a:r>
+              <a:rPr sz="1600" dirty="0" err="1"/>
+              <a:t>datos</a:t>
+            </a:r>
+            <a:r>
+              <a:rPr sz="1600" dirty="0"/>
+              <a:t> </a:t>
+            </a:r>
+            <a:r>
+              <a:rPr sz="1600" dirty="0" err="1"/>
+              <a:t>antiguos</a:t>
+            </a:r>
+            <a:r>
+              <a:rPr sz="1600" dirty="0"/>
+              <a:t> </a:t>
+            </a:r>
+            <a:r>
+              <a:rPr sz="1600" dirty="0" err="1"/>
+              <a:t>siguen</a:t>
+            </a:r>
+            <a:r>
+              <a:rPr sz="1600" dirty="0"/>
+              <a:t> ahi.</a:t>
             </a:r>
           </a:p>
           <a:p>
@@ -7061,7 +7519,64 @@
               </a:defRPr>
             </a:pPr>
             <a:r>
-              <a:t>    Estrategias: anadir estados nuevos sin romper los antiguos (retrocompatibilidad).</a:t>
+              <a:rPr sz="1600" dirty="0"/>
+              <a:t>    </a:t>
+            </a:r>
+            <a:r>
+              <a:rPr sz="1600" dirty="0" err="1"/>
+              <a:t>Estrategias</a:t>
+            </a:r>
+            <a:r>
+              <a:rPr sz="1600" dirty="0"/>
+              <a:t>: </a:t>
+            </a:r>
+            <a:r>
+              <a:rPr sz="1600" dirty="0" err="1"/>
+              <a:t>anadir</a:t>
+            </a:r>
+            <a:r>
+              <a:rPr sz="1600" dirty="0"/>
+              <a:t> </a:t>
+            </a:r>
+            <a:r>
+              <a:rPr sz="1600" dirty="0" err="1"/>
+              <a:t>estados</a:t>
+            </a:r>
+            <a:r>
+              <a:rPr sz="1600" dirty="0"/>
+              <a:t> </a:t>
+            </a:r>
+            <a:r>
+              <a:rPr sz="1600" dirty="0" err="1"/>
+              <a:t>nuevos</a:t>
+            </a:r>
+            <a:r>
+              <a:rPr sz="1600" dirty="0"/>
+              <a:t> sin romper </a:t>
+            </a:r>
+            <a:r>
+              <a:rPr sz="1600" dirty="0" err="1"/>
+              <a:t>los</a:t>
+            </a:r>
+            <a:r>
+              <a:rPr sz="1600" dirty="0"/>
+              <a:t> </a:t>
+            </a:r>
+            <a:r>
+              <a:rPr sz="1600" dirty="0" err="1"/>
+              <a:t>antiguos</a:t>
+            </a:r>
+            <a:r>
+              <a:rPr sz="1600" dirty="0"/>
+              <a:t> (</a:t>
+            </a:r>
+            <a:r>
+              <a:rPr sz="1600" dirty="0" err="1"/>
+              <a:t>retrocompatibilidad</a:t>
+            </a:r>
+            <a:r>
+              <a:rPr sz="1600" dirty="0"/>
+              <a:t>).</a:t>
             </a:r>
           </a:p>
           <a:p>
@@ -7077,7 +7592,64 @@
               </a:defRPr>
             </a:pPr>
             <a:r>
-              <a:t>    Si la transicion cambia radicalmente: migracion perezosa en cada lectura.</a:t>
+              <a:rPr sz="1600" dirty="0"/>
+              <a:t>    Si la </a:t>
+            </a:r>
+            <a:r>
+              <a:rPr sz="1600" dirty="0" err="1"/>
+              <a:t>transicion</a:t>
+            </a:r>
+            <a:r>
+              <a:rPr sz="1600" dirty="0"/>
+              <a:t> cambia </a:t>
+            </a:r>
+            <a:r>
+              <a:rPr sz="1600" dirty="0" err="1"/>
+              <a:t>radicalmente</a:t>
+            </a:r>
+            <a:r>
+              <a:rPr sz="1600" dirty="0"/>
+              <a:t>: </a:t>
+            </a:r>
+            <a:r>
+              <a:rPr sz="1600" dirty="0" err="1"/>
+              <a:t>migracion</a:t>
+            </a:r>
+            <a:r>
+              <a:rPr sz="1600" dirty="0"/>
+              <a:t> </a:t>
+            </a:r>
+            <a:r>
+              <a:rPr sz="1600" dirty="0" err="1"/>
+              <a:t>perezosa</a:t>
+            </a:r>
+            <a:r>
+              <a:rPr sz="1600" dirty="0"/>
+              <a:t> </a:t>
+            </a:r>
+            <a:r>
+              <a:rPr sz="1600" dirty="0" err="1"/>
+              <a:t>en</a:t>
+            </a:r>
+            <a:r>
+              <a:rPr sz="1600" dirty="0"/>
+              <a:t> </a:t>
+            </a:r>
+            <a:r>
+              <a:rPr sz="1600" dirty="0" err="1"/>
+              <a:t>cada</a:t>
+            </a:r>
+            <a:r>
+              <a:rPr sz="1600" dirty="0"/>
+              <a:t> </a:t>
+            </a:r>
+            <a:r>
+              <a:rPr sz="1600" dirty="0" err="1"/>
+              <a:t>lectura</a:t>
+            </a:r>
+            <a:r>
+              <a:rPr sz="1600" dirty="0"/>
+              <a:t>.</a:t>
             </a:r>
           </a:p>
           <a:p>
@@ -7093,7 +7665,64 @@
               </a:defRPr>
             </a:pPr>
             <a:r>
-              <a:t>    Cuidado: nunca cambies el significado de un estado existente, crea uno nuevo.</a:t>
+              <a:rPr sz="1600" dirty="0"/>
+              <a:t>    Cuidado: </a:t>
+            </a:r>
+            <a:r>
+              <a:rPr sz="1600" dirty="0" err="1"/>
+              <a:t>nunca</a:t>
+            </a:r>
+            <a:r>
+              <a:rPr sz="1600" dirty="0"/>
+              <a:t> </a:t>
+            </a:r>
+            <a:r>
+              <a:rPr sz="1600" dirty="0" err="1"/>
+              <a:t>cambies</a:t>
+            </a:r>
+            <a:r>
+              <a:rPr sz="1600" dirty="0"/>
+              <a:t> </a:t>
+            </a:r>
+            <a:r>
+              <a:rPr sz="1600" dirty="0" err="1"/>
+              <a:t>el</a:t>
+            </a:r>
+            <a:r>
+              <a:rPr sz="1600" dirty="0"/>
+              <a:t> </a:t>
+            </a:r>
+            <a:r>
+              <a:rPr sz="1600" dirty="0" err="1"/>
+              <a:t>significado</a:t>
+            </a:r>
+            <a:r>
+              <a:rPr sz="1600" dirty="0"/>
+              <a:t> de un </a:t>
+            </a:r>
+            <a:r>
+              <a:rPr sz="1600" dirty="0" err="1"/>
+              <a:t>estado</a:t>
+            </a:r>
+            <a:r>
+              <a:rPr sz="1600" dirty="0"/>
+              <a:t> </a:t>
+            </a:r>
+            <a:r>
+              <a:rPr sz="1600" dirty="0" err="1"/>
+              <a:t>existente</a:t>
+            </a:r>
+            <a:r>
+              <a:rPr sz="1600" dirty="0"/>
+              <a:t>, </a:t>
+            </a:r>
+            <a:r>
+              <a:rPr sz="1600" dirty="0" err="1"/>
+              <a:t>crea</a:t>
+            </a:r>
+            <a:r>
+              <a:rPr sz="1600" dirty="0"/>
+              <a:t> uno nuevo.</a:t>
             </a:r>
           </a:p>
           <a:p>
@@ -7109,6 +7738,7 @@
               </a:defRPr>
             </a:pPr>
             <a:r>
+              <a:rPr dirty="0"/>
               <a:t>3. Private Data y GDPR:</a:t>
             </a:r>
           </a:p>
@@ -7125,7 +7755,48 @@
               </a:defRPr>
             </a:pPr>
             <a:r>
-              <a:t>    Private Data ayuda pero NO cumple GDPR por si solo.</a:t>
+              <a:rPr sz="1600" dirty="0"/>
+              <a:t>    Private Data </a:t>
+            </a:r>
+            <a:r>
+              <a:rPr sz="1600" dirty="0" err="1"/>
+              <a:t>ayuda</a:t>
+            </a:r>
+            <a:r>
+              <a:rPr sz="1600" dirty="0"/>
+              <a:t> </a:t>
+            </a:r>
+            <a:r>
+              <a:rPr sz="1600" dirty="0" err="1"/>
+              <a:t>pero</a:t>
+            </a:r>
+            <a:r>
+              <a:rPr sz="1600" dirty="0"/>
+              <a:t> NO </a:t>
+            </a:r>
+            <a:r>
+              <a:rPr sz="1600" dirty="0" err="1"/>
+              <a:t>cumple</a:t>
+            </a:r>
+            <a:r>
+              <a:rPr sz="1600" dirty="0"/>
+              <a:t> GDPR </a:t>
+            </a:r>
+            <a:r>
+              <a:rPr sz="1600" dirty="0" err="1"/>
+              <a:t>por</a:t>
+            </a:r>
+            <a:r>
+              <a:rPr sz="1600" dirty="0"/>
+              <a:t> </a:t>
+            </a:r>
+            <a:r>
+              <a:rPr sz="1600" dirty="0" err="1"/>
+              <a:t>si</a:t>
+            </a:r>
+            <a:r>
+              <a:rPr sz="1600" dirty="0"/>
+              <a:t> solo.</a:t>
             </a:r>
           </a:p>
           <a:p>
@@ -7141,7 +7812,48 @@
               </a:defRPr>
             </a:pPr>
             <a:r>
-              <a:t>    El hash queda on-chain para siempre (inmutable) — potencialmente trazable.</a:t>
+              <a:rPr sz="1600" dirty="0"/>
+              <a:t>    El hash </a:t>
+            </a:r>
+            <a:r>
+              <a:rPr sz="1600" dirty="0" err="1"/>
+              <a:t>queda</a:t>
+            </a:r>
+            <a:r>
+              <a:rPr sz="1600" dirty="0"/>
+              <a:t> on-chain para </a:t>
+            </a:r>
+            <a:r>
+              <a:rPr sz="1600" dirty="0" err="1"/>
+              <a:t>siempre</a:t>
+            </a:r>
+            <a:r>
+              <a:rPr sz="1600" dirty="0"/>
+              <a:t> (</a:t>
+            </a:r>
+            <a:r>
+              <a:rPr sz="1600" dirty="0" err="1"/>
+              <a:t>inmutable</a:t>
+            </a:r>
+            <a:r>
+              <a:rPr sz="1600" dirty="0"/>
+              <a:t>) — </a:t>
+            </a:r>
+            <a:r>
+              <a:rPr sz="1600" dirty="0" err="1"/>
+              <a:t>potencialmente</a:t>
+            </a:r>
+            <a:r>
+              <a:rPr sz="1600" dirty="0"/>
+              <a:t> </a:t>
+            </a:r>
+            <a:r>
+              <a:rPr sz="1600" dirty="0" err="1"/>
+              <a:t>trazable</a:t>
+            </a:r>
+            <a:r>
+              <a:rPr sz="1600" dirty="0"/>
+              <a:t>.</a:t>
             </a:r>
           </a:p>
           <a:p>
@@ -7157,7 +7869,64 @@
               </a:defRPr>
             </a:pPr>
             <a:r>
-              <a:t>    blockToLive permite caducar datos privados, pero el hash sigue.</a:t>
+              <a:rPr sz="1600" dirty="0"/>
+              <a:t>    </a:t>
+            </a:r>
+            <a:r>
+              <a:rPr sz="1600" dirty="0" err="1"/>
+              <a:t>blockToLive</a:t>
+            </a:r>
+            <a:r>
+              <a:rPr sz="1600" dirty="0"/>
+              <a:t> </a:t>
+            </a:r>
+            <a:r>
+              <a:rPr sz="1600" dirty="0" err="1"/>
+              <a:t>permite</a:t>
+            </a:r>
+            <a:r>
+              <a:rPr sz="1600" dirty="0"/>
+              <a:t> </a:t>
+            </a:r>
+            <a:r>
+              <a:rPr sz="1600" dirty="0" err="1"/>
+              <a:t>caducar</a:t>
+            </a:r>
+            <a:r>
+              <a:rPr sz="1600" dirty="0"/>
+              <a:t> </a:t>
+            </a:r>
+            <a:r>
+              <a:rPr sz="1600" dirty="0" err="1"/>
+              <a:t>datos</a:t>
+            </a:r>
+            <a:r>
+              <a:rPr sz="1600" dirty="0"/>
+              <a:t> privados, </a:t>
+            </a:r>
+            <a:r>
+              <a:rPr sz="1600" dirty="0" err="1"/>
+              <a:t>pero</a:t>
+            </a:r>
+            <a:r>
+              <a:rPr sz="1600" dirty="0"/>
+              <a:t> </a:t>
+            </a:r>
+            <a:r>
+              <a:rPr sz="1600" dirty="0" err="1"/>
+              <a:t>el</a:t>
+            </a:r>
+            <a:r>
+              <a:rPr sz="1600" dirty="0"/>
+              <a:t> hash </a:t>
+            </a:r>
+            <a:r>
+              <a:rPr sz="1600" dirty="0" err="1"/>
+              <a:t>sigue</a:t>
+            </a:r>
+            <a:r>
+              <a:rPr sz="1600" dirty="0"/>
+              <a:t>.</a:t>
             </a:r>
           </a:p>
           <a:p>
@@ -7173,7 +7942,32 @@
               </a:defRPr>
             </a:pPr>
             <a:r>
-              <a:t>    Mejor practica: datos personales OFF-CHAIN, solo hash/referencia on-chain.</a:t>
+              <a:rPr sz="1600" dirty="0"/>
+              <a:t>    Mejor practica: </a:t>
+            </a:r>
+            <a:r>
+              <a:rPr sz="1600" dirty="0" err="1"/>
+              <a:t>datos</a:t>
+            </a:r>
+            <a:r>
+              <a:rPr sz="1600" dirty="0"/>
+              <a:t> </a:t>
+            </a:r>
+            <a:r>
+              <a:rPr sz="1600" dirty="0" err="1"/>
+              <a:t>personales</a:t>
+            </a:r>
+            <a:r>
+              <a:rPr sz="1600" dirty="0"/>
+              <a:t> OFF-CHAIN, solo hash/</a:t>
+            </a:r>
+            <a:r>
+              <a:rPr sz="1600" dirty="0" err="1"/>
+              <a:t>referencia</a:t>
+            </a:r>
+            <a:r>
+              <a:rPr sz="1600" dirty="0"/>
+              <a:t> on-chain.</a:t>
             </a:r>
           </a:p>
           <a:p>
@@ -7189,7 +7983,64 @@
               </a:defRPr>
             </a:pPr>
             <a:r>
-              <a:t>    Cuando borras el dato off-chain, el hash on-chain queda huerfano (pseudonimizacion efectiva).</a:t>
+              <a:rPr sz="1600" dirty="0"/>
+              <a:t>    Cuando borras </a:t>
+            </a:r>
+            <a:r>
+              <a:rPr sz="1600" dirty="0" err="1"/>
+              <a:t>el</a:t>
+            </a:r>
+            <a:r>
+              <a:rPr sz="1600" dirty="0"/>
+              <a:t> </a:t>
+            </a:r>
+            <a:r>
+              <a:rPr sz="1600" dirty="0" err="1"/>
+              <a:t>dato</a:t>
+            </a:r>
+            <a:r>
+              <a:rPr sz="1600" dirty="0"/>
+              <a:t> off-chain, </a:t>
+            </a:r>
+            <a:r>
+              <a:rPr sz="1600" dirty="0" err="1"/>
+              <a:t>el</a:t>
+            </a:r>
+            <a:r>
+              <a:rPr sz="1600" dirty="0"/>
+              <a:t> hash on-chain </a:t>
+            </a:r>
+            <a:r>
+              <a:rPr sz="1600" dirty="0" err="1"/>
+              <a:t>queda</a:t>
+            </a:r>
+            <a:r>
+              <a:rPr sz="1600" dirty="0"/>
+              <a:t> </a:t>
+            </a:r>
+            <a:r>
+              <a:rPr sz="1600" dirty="0" err="1"/>
+              <a:t>huerfano</a:t>
+            </a:r>
+            <a:r>
+              <a:rPr sz="1600" dirty="0"/>
+              <a:t> (</a:t>
+            </a:r>
+            <a:r>
+              <a:rPr sz="1600" dirty="0" err="1"/>
+              <a:t>pseudonimizacion</a:t>
+            </a:r>
+            <a:r>
+              <a:rPr sz="1600" dirty="0"/>
+              <a:t> </a:t>
+            </a:r>
+            <a:r>
+              <a:rPr sz="1600" dirty="0" err="1"/>
+              <a:t>efectiva</a:t>
+            </a:r>
+            <a:r>
+              <a:rPr sz="1600" dirty="0"/>
+              <a:t>).</a:t>
             </a:r>
           </a:p>
         </p:txBody>
@@ -7203,7 +8054,7 @@
 </file>
 
 <file path=ppt/slides/slide21.xml><?xml version="1.0" encoding="utf-8"?>
-<p:sld xmlns:a="http://schemas.openxmlformats.org/drawingml/2006/main" xmlns:p="http://schemas.openxmlformats.org/presentationml/2006/main" xmlns:r="http://schemas.openxmlformats.org/officeDocument/2006/relationships">
+<p:sld xmlns:a="http://schemas.openxmlformats.org/drawingml/2006/main" xmlns:r="http://schemas.openxmlformats.org/officeDocument/2006/relationships" xmlns:p="http://schemas.openxmlformats.org/presentationml/2006/main">
   <p:cSld>
     <p:spTree>
       <p:nvGrpSpPr>
@@ -7211,7 +8062,14 @@
         <p:cNvGrpSpPr/>
         <p:nvPr/>
       </p:nvGrpSpPr>
-      <p:grpSpPr/>
+      <p:grpSpPr>
+        <a:xfrm>
+          <a:off x="0" y="0"/>
+          <a:ext cx="0" cy="0"/>
+          <a:chOff x="0" y="0"/>
+          <a:chExt cx="0" cy="0"/>
+        </a:xfrm>
+      </p:grpSpPr>
       <p:sp>
         <p:nvSpPr>
           <p:cNvPr id="2" name="Rectangle 1"/>
@@ -7252,6 +8110,7 @@
           <a:lstStyle/>
           <a:p>
             <a:pPr algn="ctr"/>
+            <a:endParaRPr/>
           </a:p>
         </p:txBody>
       </p:sp>
@@ -7329,6 +8188,7 @@
           <a:lstStyle/>
           <a:p>
             <a:pPr algn="ctr"/>
+            <a:endParaRPr/>
           </a:p>
         </p:txBody>
       </p:sp>
@@ -7604,7 +8464,7 @@
 </file>
 
 <file path=ppt/slides/slide22.xml><?xml version="1.0" encoding="utf-8"?>
-<p:sld xmlns:a="http://schemas.openxmlformats.org/drawingml/2006/main" xmlns:p="http://schemas.openxmlformats.org/presentationml/2006/main" xmlns:r="http://schemas.openxmlformats.org/officeDocument/2006/relationships">
+<p:sld xmlns:a="http://schemas.openxmlformats.org/drawingml/2006/main" xmlns:r="http://schemas.openxmlformats.org/officeDocument/2006/relationships" xmlns:p="http://schemas.openxmlformats.org/presentationml/2006/main">
   <p:cSld>
     <p:spTree>
       <p:nvGrpSpPr>
@@ -7612,7 +8472,14 @@
         <p:cNvGrpSpPr/>
         <p:nvPr/>
       </p:nvGrpSpPr>
-      <p:grpSpPr/>
+      <p:grpSpPr>
+        <a:xfrm>
+          <a:off x="0" y="0"/>
+          <a:ext cx="0" cy="0"/>
+          <a:chOff x="0" y="0"/>
+          <a:chExt cx="0" cy="0"/>
+        </a:xfrm>
+      </p:grpSpPr>
       <p:sp>
         <p:nvSpPr>
           <p:cNvPr id="2" name="Rectangle 1"/>
@@ -7653,6 +8520,7 @@
           <a:lstStyle/>
           <a:p>
             <a:pPr algn="ctr"/>
+            <a:endParaRPr/>
           </a:p>
         </p:txBody>
       </p:sp>
@@ -7730,6 +8598,7 @@
           <a:lstStyle/>
           <a:p>
             <a:pPr algn="ctr"/>
+            <a:endParaRPr/>
           </a:p>
         </p:txBody>
       </p:sp>
@@ -7877,7 +8746,7 @@
 </file>
 
 <file path=ppt/slides/slide23.xml><?xml version="1.0" encoding="utf-8"?>
-<p:sld xmlns:a="http://schemas.openxmlformats.org/drawingml/2006/main" xmlns:p="http://schemas.openxmlformats.org/presentationml/2006/main" xmlns:r="http://schemas.openxmlformats.org/officeDocument/2006/relationships">
+<p:sld xmlns:a="http://schemas.openxmlformats.org/drawingml/2006/main" xmlns:r="http://schemas.openxmlformats.org/officeDocument/2006/relationships" xmlns:p="http://schemas.openxmlformats.org/presentationml/2006/main">
   <p:cSld>
     <p:spTree>
       <p:nvGrpSpPr>
@@ -7885,7 +8754,14 @@
         <p:cNvGrpSpPr/>
         <p:nvPr/>
       </p:nvGrpSpPr>
-      <p:grpSpPr/>
+      <p:grpSpPr>
+        <a:xfrm>
+          <a:off x="0" y="0"/>
+          <a:ext cx="0" cy="0"/>
+          <a:chOff x="0" y="0"/>
+          <a:chExt cx="0" cy="0"/>
+        </a:xfrm>
+      </p:grpSpPr>
       <p:sp>
         <p:nvSpPr>
           <p:cNvPr id="2" name="Rectangle 1"/>
@@ -7926,6 +8802,7 @@
           <a:lstStyle/>
           <a:p>
             <a:pPr algn="ctr"/>
+            <a:endParaRPr/>
           </a:p>
         </p:txBody>
       </p:sp>
@@ -8003,6 +8880,7 @@
           <a:lstStyle/>
           <a:p>
             <a:pPr algn="ctr"/>
+            <a:endParaRPr/>
           </a:p>
         </p:txBody>
       </p:sp>
@@ -8278,7 +9156,7 @@
 </file>
 
 <file path=ppt/slides/slide24.xml><?xml version="1.0" encoding="utf-8"?>
-<p:sld xmlns:a="http://schemas.openxmlformats.org/drawingml/2006/main" xmlns:p="http://schemas.openxmlformats.org/presentationml/2006/main" xmlns:r="http://schemas.openxmlformats.org/officeDocument/2006/relationships">
+<p:sld xmlns:a="http://schemas.openxmlformats.org/drawingml/2006/main" xmlns:r="http://schemas.openxmlformats.org/officeDocument/2006/relationships" xmlns:p="http://schemas.openxmlformats.org/presentationml/2006/main">
   <p:cSld>
     <p:spTree>
       <p:nvGrpSpPr>
@@ -8286,7 +9164,14 @@
         <p:cNvGrpSpPr/>
         <p:nvPr/>
       </p:nvGrpSpPr>
-      <p:grpSpPr/>
+      <p:grpSpPr>
+        <a:xfrm>
+          <a:off x="0" y="0"/>
+          <a:ext cx="0" cy="0"/>
+          <a:chOff x="0" y="0"/>
+          <a:chExt cx="0" cy="0"/>
+        </a:xfrm>
+      </p:grpSpPr>
       <p:sp>
         <p:nvSpPr>
           <p:cNvPr id="2" name="Rectangle 1"/>
@@ -8327,6 +9212,7 @@
           <a:lstStyle/>
           <a:p>
             <a:pPr algn="ctr"/>
+            <a:endParaRPr/>
           </a:p>
         </p:txBody>
       </p:sp>
@@ -8404,6 +9290,7 @@
           <a:lstStyle/>
           <a:p>
             <a:pPr algn="ctr"/>
+            <a:endParaRPr/>
           </a:p>
         </p:txBody>
       </p:sp>
@@ -8695,7 +9582,7 @@
 </file>
 
 <file path=ppt/slides/slide3.xml><?xml version="1.0" encoding="utf-8"?>
-<p:sld xmlns:a="http://schemas.openxmlformats.org/drawingml/2006/main" xmlns:p="http://schemas.openxmlformats.org/presentationml/2006/main" xmlns:r="http://schemas.openxmlformats.org/officeDocument/2006/relationships">
+<p:sld xmlns:a="http://schemas.openxmlformats.org/drawingml/2006/main" xmlns:r="http://schemas.openxmlformats.org/officeDocument/2006/relationships" xmlns:p="http://schemas.openxmlformats.org/presentationml/2006/main">
   <p:cSld>
     <p:spTree>
       <p:nvGrpSpPr>
@@ -8703,7 +9590,14 @@
         <p:cNvGrpSpPr/>
         <p:nvPr/>
       </p:nvGrpSpPr>
-      <p:grpSpPr/>
+      <p:grpSpPr>
+        <a:xfrm>
+          <a:off x="0" y="0"/>
+          <a:ext cx="0" cy="0"/>
+          <a:chOff x="0" y="0"/>
+          <a:chExt cx="0" cy="0"/>
+        </a:xfrm>
+      </p:grpSpPr>
       <p:sp>
         <p:nvSpPr>
           <p:cNvPr id="2" name="Rectangle 1"/>
@@ -8744,6 +9638,7 @@
           <a:lstStyle/>
           <a:p>
             <a:pPr algn="ctr"/>
+            <a:endParaRPr/>
           </a:p>
         </p:txBody>
       </p:sp>
@@ -8787,6 +9682,7 @@
           <a:lstStyle/>
           <a:p>
             <a:pPr algn="ctr"/>
+            <a:endParaRPr/>
           </a:p>
         </p:txBody>
       </p:sp>
@@ -8898,6 +9794,7 @@
           <a:lstStyle/>
           <a:p>
             <a:pPr algn="ctr"/>
+            <a:endParaRPr/>
           </a:p>
         </p:txBody>
       </p:sp>
@@ -8998,6 +9895,7 @@
                 <a:latin typeface="Calibri"/>
               </a:defRPr>
             </a:pPr>
+            <a:endParaRPr/>
           </a:p>
           <a:p>
             <a:pPr>
@@ -9090,7 +9988,7 @@
 </file>
 
 <file path=ppt/slides/slide4.xml><?xml version="1.0" encoding="utf-8"?>
-<p:sld xmlns:a="http://schemas.openxmlformats.org/drawingml/2006/main" xmlns:p="http://schemas.openxmlformats.org/presentationml/2006/main" xmlns:r="http://schemas.openxmlformats.org/officeDocument/2006/relationships">
+<p:sld xmlns:a="http://schemas.openxmlformats.org/drawingml/2006/main" xmlns:r="http://schemas.openxmlformats.org/officeDocument/2006/relationships" xmlns:p="http://schemas.openxmlformats.org/presentationml/2006/main">
   <p:cSld>
     <p:spTree>
       <p:nvGrpSpPr>
@@ -9098,7 +9996,14 @@
         <p:cNvGrpSpPr/>
         <p:nvPr/>
       </p:nvGrpSpPr>
-      <p:grpSpPr/>
+      <p:grpSpPr>
+        <a:xfrm>
+          <a:off x="0" y="0"/>
+          <a:ext cx="0" cy="0"/>
+          <a:chOff x="0" y="0"/>
+          <a:chExt cx="0" cy="0"/>
+        </a:xfrm>
+      </p:grpSpPr>
       <p:sp>
         <p:nvSpPr>
           <p:cNvPr id="2" name="Rectangle 1"/>
@@ -9139,6 +10044,7 @@
           <a:lstStyle/>
           <a:p>
             <a:pPr algn="ctr"/>
+            <a:endParaRPr/>
           </a:p>
         </p:txBody>
       </p:sp>
@@ -9216,6 +10122,7 @@
           <a:lstStyle/>
           <a:p>
             <a:pPr algn="ctr"/>
+            <a:endParaRPr/>
           </a:p>
         </p:txBody>
       </p:sp>
@@ -9379,7 +10286,7 @@
 </file>
 
 <file path=ppt/slides/slide5.xml><?xml version="1.0" encoding="utf-8"?>
-<p:sld xmlns:a="http://schemas.openxmlformats.org/drawingml/2006/main" xmlns:p="http://schemas.openxmlformats.org/presentationml/2006/main" xmlns:r="http://schemas.openxmlformats.org/officeDocument/2006/relationships">
+<p:sld xmlns:a="http://schemas.openxmlformats.org/drawingml/2006/main" xmlns:r="http://schemas.openxmlformats.org/officeDocument/2006/relationships" xmlns:p="http://schemas.openxmlformats.org/presentationml/2006/main">
   <p:cSld>
     <p:spTree>
       <p:nvGrpSpPr>
@@ -9387,7 +10294,14 @@
         <p:cNvGrpSpPr/>
         <p:nvPr/>
       </p:nvGrpSpPr>
-      <p:grpSpPr/>
+      <p:grpSpPr>
+        <a:xfrm>
+          <a:off x="0" y="0"/>
+          <a:ext cx="0" cy="0"/>
+          <a:chOff x="0" y="0"/>
+          <a:chExt cx="0" cy="0"/>
+        </a:xfrm>
+      </p:grpSpPr>
       <p:sp>
         <p:nvSpPr>
           <p:cNvPr id="2" name="Rectangle 1"/>
@@ -9428,6 +10342,7 @@
           <a:lstStyle/>
           <a:p>
             <a:pPr algn="ctr"/>
+            <a:endParaRPr/>
           </a:p>
         </p:txBody>
       </p:sp>
@@ -9505,6 +10420,7 @@
           <a:lstStyle/>
           <a:p>
             <a:pPr algn="ctr"/>
+            <a:endParaRPr/>
           </a:p>
         </p:txBody>
       </p:sp>
@@ -9668,7 +10584,7 @@
 </file>
 
 <file path=ppt/slides/slide6.xml><?xml version="1.0" encoding="utf-8"?>
-<p:sld xmlns:a="http://schemas.openxmlformats.org/drawingml/2006/main" xmlns:p="http://schemas.openxmlformats.org/presentationml/2006/main" xmlns:r="http://schemas.openxmlformats.org/officeDocument/2006/relationships">
+<p:sld xmlns:a="http://schemas.openxmlformats.org/drawingml/2006/main" xmlns:r="http://schemas.openxmlformats.org/officeDocument/2006/relationships" xmlns:p="http://schemas.openxmlformats.org/presentationml/2006/main">
   <p:cSld>
     <p:spTree>
       <p:nvGrpSpPr>
@@ -9676,7 +10592,14 @@
         <p:cNvGrpSpPr/>
         <p:nvPr/>
       </p:nvGrpSpPr>
-      <p:grpSpPr/>
+      <p:grpSpPr>
+        <a:xfrm>
+          <a:off x="0" y="0"/>
+          <a:ext cx="0" cy="0"/>
+          <a:chOff x="0" y="0"/>
+          <a:chExt cx="0" cy="0"/>
+        </a:xfrm>
+      </p:grpSpPr>
       <p:sp>
         <p:nvSpPr>
           <p:cNvPr id="2" name="Rectangle 1"/>
@@ -9717,6 +10640,7 @@
           <a:lstStyle/>
           <a:p>
             <a:pPr algn="ctr"/>
+            <a:endParaRPr/>
           </a:p>
         </p:txBody>
       </p:sp>
@@ -9828,6 +10752,7 @@
           <a:lstStyle/>
           <a:p>
             <a:pPr algn="ctr"/>
+            <a:endParaRPr/>
           </a:p>
         </p:txBody>
       </p:sp>
@@ -9905,6 +10830,7 @@
           <a:lstStyle/>
           <a:p>
             <a:pPr algn="ctr"/>
+            <a:endParaRPr/>
           </a:p>
         </p:txBody>
       </p:sp>
@@ -9929,14 +10855,6 @@
           <a:lstStyle/>
           <a:p>
             <a:br/>
-            <a:pPr algn="l">
-              <a:defRPr sz="1500" b="0">
-                <a:solidFill>
-                  <a:srgbClr val="D4D4D4"/>
-                </a:solidFill>
-                <a:latin typeface="Consolas"/>
-              </a:defRPr>
-            </a:pPr>
             <a:r>
               <a:t>func (s *SmartContract) TransferProperty(ctx contractapi.TransactionContextInterface,</a:t>
             </a:r>
@@ -10048,7 +10966,7 @@
 </file>
 
 <file path=ppt/slides/slide7.xml><?xml version="1.0" encoding="utf-8"?>
-<p:sld xmlns:a="http://schemas.openxmlformats.org/drawingml/2006/main" xmlns:p="http://schemas.openxmlformats.org/presentationml/2006/main" xmlns:r="http://schemas.openxmlformats.org/officeDocument/2006/relationships">
+<p:sld xmlns:a="http://schemas.openxmlformats.org/drawingml/2006/main" xmlns:r="http://schemas.openxmlformats.org/officeDocument/2006/relationships" xmlns:p="http://schemas.openxmlformats.org/presentationml/2006/main">
   <p:cSld>
     <p:spTree>
       <p:nvGrpSpPr>
@@ -10056,7 +10974,14 @@
         <p:cNvGrpSpPr/>
         <p:nvPr/>
       </p:nvGrpSpPr>
-      <p:grpSpPr/>
+      <p:grpSpPr>
+        <a:xfrm>
+          <a:off x="0" y="0"/>
+          <a:ext cx="0" cy="0"/>
+          <a:chOff x="0" y="0"/>
+          <a:chExt cx="0" cy="0"/>
+        </a:xfrm>
+      </p:grpSpPr>
       <p:sp>
         <p:nvSpPr>
           <p:cNvPr id="2" name="Rectangle 1"/>
@@ -10097,6 +11022,7 @@
           <a:lstStyle/>
           <a:p>
             <a:pPr algn="ctr"/>
+            <a:endParaRPr/>
           </a:p>
         </p:txBody>
       </p:sp>
@@ -10208,6 +11134,7 @@
           <a:lstStyle/>
           <a:p>
             <a:pPr algn="ctr"/>
+            <a:endParaRPr/>
           </a:p>
         </p:txBody>
       </p:sp>
@@ -10285,6 +11212,7 @@
           <a:lstStyle/>
           <a:p>
             <a:pPr algn="ctr"/>
+            <a:endParaRPr/>
           </a:p>
         </p:txBody>
       </p:sp>
@@ -10309,14 +11237,6 @@
           <a:lstStyle/>
           <a:p>
             <a:br/>
-            <a:pPr algn="l">
-              <a:defRPr sz="1500" b="0">
-                <a:solidFill>
-                  <a:srgbClr val="D4D4D4"/>
-                </a:solidFill>
-                <a:latin typeface="Consolas"/>
-              </a:defRPr>
-            </a:pPr>
             <a:r>
               <a:t>// Solo un usuario con rol "registrador" puede registrar propiedades</a:t>
             </a:r>
@@ -10399,7 +11319,7 @@
 </file>
 
 <file path=ppt/slides/slide8.xml><?xml version="1.0" encoding="utf-8"?>
-<p:sld xmlns:a="http://schemas.openxmlformats.org/drawingml/2006/main" xmlns:p="http://schemas.openxmlformats.org/presentationml/2006/main" xmlns:r="http://schemas.openxmlformats.org/officeDocument/2006/relationships">
+<p:sld xmlns:a="http://schemas.openxmlformats.org/drawingml/2006/main" xmlns:r="http://schemas.openxmlformats.org/officeDocument/2006/relationships" xmlns:p="http://schemas.openxmlformats.org/presentationml/2006/main">
   <p:cSld>
     <p:spTree>
       <p:nvGrpSpPr>
@@ -10407,7 +11327,14 @@
         <p:cNvGrpSpPr/>
         <p:nvPr/>
       </p:nvGrpSpPr>
-      <p:grpSpPr/>
+      <p:grpSpPr>
+        <a:xfrm>
+          <a:off x="0" y="0"/>
+          <a:ext cx="0" cy="0"/>
+          <a:chOff x="0" y="0"/>
+          <a:chExt cx="0" cy="0"/>
+        </a:xfrm>
+      </p:grpSpPr>
       <p:sp>
         <p:nvSpPr>
           <p:cNvPr id="2" name="Rectangle 1"/>
@@ -10448,6 +11375,7 @@
           <a:lstStyle/>
           <a:p>
             <a:pPr algn="ctr"/>
+            <a:endParaRPr/>
           </a:p>
         </p:txBody>
       </p:sp>
@@ -10525,6 +11453,7 @@
           <a:lstStyle/>
           <a:p>
             <a:pPr algn="ctr"/>
+            <a:endParaRPr/>
           </a:p>
         </p:txBody>
       </p:sp>
@@ -10752,7 +11681,7 @@
 </file>
 
 <file path=ppt/slides/slide9.xml><?xml version="1.0" encoding="utf-8"?>
-<p:sld xmlns:a="http://schemas.openxmlformats.org/drawingml/2006/main" xmlns:p="http://schemas.openxmlformats.org/presentationml/2006/main" xmlns:r="http://schemas.openxmlformats.org/officeDocument/2006/relationships">
+<p:sld xmlns:a="http://schemas.openxmlformats.org/drawingml/2006/main" xmlns:r="http://schemas.openxmlformats.org/officeDocument/2006/relationships" xmlns:p="http://schemas.openxmlformats.org/presentationml/2006/main">
   <p:cSld>
     <p:spTree>
       <p:nvGrpSpPr>
@@ -10760,7 +11689,14 @@
         <p:cNvGrpSpPr/>
         <p:nvPr/>
       </p:nvGrpSpPr>
-      <p:grpSpPr/>
+      <p:grpSpPr>
+        <a:xfrm>
+          <a:off x="0" y="0"/>
+          <a:ext cx="0" cy="0"/>
+          <a:chOff x="0" y="0"/>
+          <a:chExt cx="0" cy="0"/>
+        </a:xfrm>
+      </p:grpSpPr>
       <p:sp>
         <p:nvSpPr>
           <p:cNvPr id="2" name="Rectangle 1"/>
@@ -10801,6 +11737,7 @@
           <a:lstStyle/>
           <a:p>
             <a:pPr algn="ctr"/>
+            <a:endParaRPr/>
           </a:p>
         </p:txBody>
       </p:sp>
@@ -10878,6 +11815,7 @@
           <a:lstStyle/>
           <a:p>
             <a:pPr algn="ctr"/>
+            <a:endParaRPr/>
           </a:p>
         </p:txBody>
       </p:sp>
@@ -10921,6 +11859,7 @@
           <a:lstStyle/>
           <a:p>
             <a:pPr algn="ctr"/>
+            <a:endParaRPr/>
           </a:p>
         </p:txBody>
       </p:sp>
@@ -10998,6 +11937,7 @@
           <a:lstStyle/>
           <a:p>
             <a:pPr algn="ctr"/>
+            <a:endParaRPr/>
           </a:p>
         </p:txBody>
       </p:sp>

--- a/docs/slides/Modulo 4/dia_3.pptx
+++ b/docs/slides/Modulo 4/dia_3.pptx
@@ -3483,7 +3483,7 @@
               </a:defRPr>
             </a:pPr>
             <a:r>
-              <a:t>GO</a:t>
+              <a:t>NODE.JS</a:t>
             </a:r>
           </a:p>
         </p:txBody>
@@ -3552,6 +3552,7 @@
           <a:bodyPr wrap="square"/>
           <a:lstStyle/>
           <a:p>
+            <a:pPr/>
             <a:r>
               <a:rPr sz="1600" dirty="0">
                 <a:solidFill>
@@ -3560,18 +3561,11 @@
                   </a:schemeClr>
                 </a:solidFill>
               </a:rPr>
-              <a:t>// Mapa de </a:t>
-            </a:r>
-            <a:r>
-              <a:rPr sz="1600" dirty="0" err="1">
-                <a:solidFill>
-                  <a:schemeClr val="bg1">
-                    <a:lumMod val="95000"/>
-                  </a:schemeClr>
-                </a:solidFill>
-              </a:rPr>
-              <a:t>transiciones</a:t>
-            </a:r>
+              <a:t>// Mapa de transiciones validas</a:t>
+            </a:r>
+          </a:p>
+          <a:p>
+            <a:pPr/>
             <a:r>
               <a:rPr sz="1600" dirty="0">
                 <a:solidFill>
@@ -3580,19 +3574,12 @@
                   </a:schemeClr>
                 </a:solidFill>
               </a:rPr>
-              <a:t> </a:t>
-            </a:r>
-            <a:r>
-              <a:rPr sz="1600" dirty="0" err="1">
-                <a:solidFill>
-                  <a:schemeClr val="bg1">
-                    <a:lumMod val="95000"/>
-                  </a:schemeClr>
-                </a:solidFill>
-              </a:rPr>
-              <a:t>validas</a:t>
-            </a:r>
-            <a:br>
+              <a:t>const validTransitions = {</a:t>
+            </a:r>
+          </a:p>
+          <a:p>
+            <a:pPr/>
+            <a:r>
               <a:rPr sz="1600" dirty="0">
                 <a:solidFill>
                   <a:schemeClr val="bg1">
@@ -3600,7 +3587,11 @@
                   </a:schemeClr>
                 </a:solidFill>
               </a:rPr>
-            </a:br>
+              <a:t>    active:       ['transferring', 'blocked'],</a:t>
+            </a:r>
+          </a:p>
+          <a:p>
+            <a:pPr/>
             <a:r>
               <a:rPr sz="1600" dirty="0">
                 <a:solidFill>
@@ -3609,18 +3600,11 @@
                   </a:schemeClr>
                 </a:solidFill>
               </a:rPr>
-              <a:t>var </a:t>
-            </a:r>
-            <a:r>
-              <a:rPr sz="1600" dirty="0" err="1">
-                <a:solidFill>
-                  <a:schemeClr val="bg1">
-                    <a:lumMod val="95000"/>
-                  </a:schemeClr>
-                </a:solidFill>
-              </a:rPr>
-              <a:t>validTransitions</a:t>
-            </a:r>
+              <a:t>    transferring: ['active'],</a:t>
+            </a:r>
+          </a:p>
+          <a:p>
+            <a:pPr/>
             <a:r>
               <a:rPr sz="1600" dirty="0">
                 <a:solidFill>
@@ -3629,9 +3613,12 @@
                   </a:schemeClr>
                 </a:solidFill>
               </a:rPr>
-              <a:t> = map[string][]string{</a:t>
-            </a:r>
-            <a:br>
+              <a:t>    blocked:      ['active'],</a:t>
+            </a:r>
+          </a:p>
+          <a:p>
+            <a:pPr/>
+            <a:r>
               <a:rPr sz="1600" dirty="0">
                 <a:solidFill>
                   <a:schemeClr val="bg1">
@@ -3639,7 +3626,11 @@
                   </a:schemeClr>
                 </a:solidFill>
               </a:rPr>
-            </a:br>
+              <a:t>};</a:t>
+            </a:r>
+          </a:p>
+          <a:p>
+            <a:pPr/>
             <a:r>
               <a:rPr sz="1600" dirty="0">
                 <a:solidFill>
@@ -3648,9 +3639,12 @@
                   </a:schemeClr>
                 </a:solidFill>
               </a:rPr>
-              <a:t>    "active":       {"transferring", "blocked"},</a:t>
-            </a:r>
-            <a:br>
+              <a:t/>
+            </a:r>
+          </a:p>
+          <a:p>
+            <a:pPr/>
+            <a:r>
               <a:rPr sz="1600" dirty="0">
                 <a:solidFill>
                   <a:schemeClr val="bg1">
@@ -3658,7 +3652,11 @@
                   </a:schemeClr>
                 </a:solidFill>
               </a:rPr>
-            </a:br>
+              <a:t>function isValidTransition(currentStatus, newStatus) {</a:t>
+            </a:r>
+          </a:p>
+          <a:p>
+            <a:pPr/>
             <a:r>
               <a:rPr sz="1600" dirty="0">
                 <a:solidFill>
@@ -3667,9 +3665,12 @@
                   </a:schemeClr>
                 </a:solidFill>
               </a:rPr>
-              <a:t>    "transferring": {"active"},</a:t>
-            </a:r>
-            <a:br>
+              <a:t>    const allowed = validTransitions[currentStatus];</a:t>
+            </a:r>
+          </a:p>
+          <a:p>
+            <a:pPr/>
+            <a:r>
               <a:rPr sz="1600" dirty="0">
                 <a:solidFill>
                   <a:schemeClr val="bg1">
@@ -3677,7 +3678,11 @@
                   </a:schemeClr>
                 </a:solidFill>
               </a:rPr>
-            </a:br>
+              <a:t>    if (!allowed) {</a:t>
+            </a:r>
+          </a:p>
+          <a:p>
+            <a:pPr/>
             <a:r>
               <a:rPr sz="1600" dirty="0">
                 <a:solidFill>
@@ -3686,9 +3691,12 @@
                   </a:schemeClr>
                 </a:solidFill>
               </a:rPr>
-              <a:t>    "blocked":      {"active"},</a:t>
-            </a:r>
-            <a:br>
+              <a:t>        return false;</a:t>
+            </a:r>
+          </a:p>
+          <a:p>
+            <a:pPr/>
+            <a:r>
               <a:rPr sz="1600" dirty="0">
                 <a:solidFill>
                   <a:schemeClr val="bg1">
@@ -3696,7 +3704,11 @@
                   </a:schemeClr>
                 </a:solidFill>
               </a:rPr>
-            </a:br>
+              <a:t>    }</a:t>
+            </a:r>
+          </a:p>
+          <a:p>
+            <a:pPr/>
             <a:r>
               <a:rPr sz="1600" dirty="0">
                 <a:solidFill>
@@ -3705,391 +3717,21 @@
                   </a:schemeClr>
                 </a:solidFill>
               </a:rPr>
+              <a:t>    return allowed.includes(newStatus);</a:t>
+            </a:r>
+          </a:p>
+          <a:p>
+            <a:pPr/>
+            <a:r>
+              <a:rPr sz="1600" dirty="0">
+                <a:solidFill>
+                  <a:schemeClr val="bg1">
+                    <a:lumMod val="95000"/>
+                  </a:schemeClr>
+                </a:solidFill>
+              </a:rPr>
               <a:t>}</a:t>
             </a:r>
-            <a:br>
-              <a:rPr sz="1600" dirty="0">
-                <a:solidFill>
-                  <a:schemeClr val="bg1">
-                    <a:lumMod val="95000"/>
-                  </a:schemeClr>
-                </a:solidFill>
-              </a:rPr>
-            </a:br>
-            <a:br>
-              <a:rPr sz="1600" dirty="0">
-                <a:solidFill>
-                  <a:schemeClr val="bg1">
-                    <a:lumMod val="95000"/>
-                  </a:schemeClr>
-                </a:solidFill>
-              </a:rPr>
-            </a:br>
-            <a:r>
-              <a:rPr sz="1600" dirty="0" err="1">
-                <a:solidFill>
-                  <a:schemeClr val="bg1">
-                    <a:lumMod val="95000"/>
-                  </a:schemeClr>
-                </a:solidFill>
-              </a:rPr>
-              <a:t>func</a:t>
-            </a:r>
-            <a:r>
-              <a:rPr sz="1600" dirty="0">
-                <a:solidFill>
-                  <a:schemeClr val="bg1">
-                    <a:lumMod val="95000"/>
-                  </a:schemeClr>
-                </a:solidFill>
-              </a:rPr>
-              <a:t> </a:t>
-            </a:r>
-            <a:r>
-              <a:rPr sz="1600" dirty="0" err="1">
-                <a:solidFill>
-                  <a:schemeClr val="bg1">
-                    <a:lumMod val="95000"/>
-                  </a:schemeClr>
-                </a:solidFill>
-              </a:rPr>
-              <a:t>isValidTransition</a:t>
-            </a:r>
-            <a:r>
-              <a:rPr sz="1600" dirty="0">
-                <a:solidFill>
-                  <a:schemeClr val="bg1">
-                    <a:lumMod val="95000"/>
-                  </a:schemeClr>
-                </a:solidFill>
-              </a:rPr>
-              <a:t>(</a:t>
-            </a:r>
-            <a:r>
-              <a:rPr sz="1600" dirty="0" err="1">
-                <a:solidFill>
-                  <a:schemeClr val="bg1">
-                    <a:lumMod val="95000"/>
-                  </a:schemeClr>
-                </a:solidFill>
-              </a:rPr>
-              <a:t>currentStatus</a:t>
-            </a:r>
-            <a:r>
-              <a:rPr sz="1600" dirty="0">
-                <a:solidFill>
-                  <a:schemeClr val="bg1">
-                    <a:lumMod val="95000"/>
-                  </a:schemeClr>
-                </a:solidFill>
-              </a:rPr>
-              <a:t>, </a:t>
-            </a:r>
-            <a:r>
-              <a:rPr sz="1600" dirty="0" err="1">
-                <a:solidFill>
-                  <a:schemeClr val="bg1">
-                    <a:lumMod val="95000"/>
-                  </a:schemeClr>
-                </a:solidFill>
-              </a:rPr>
-              <a:t>newStatus</a:t>
-            </a:r>
-            <a:r>
-              <a:rPr sz="1600" dirty="0">
-                <a:solidFill>
-                  <a:schemeClr val="bg1">
-                    <a:lumMod val="95000"/>
-                  </a:schemeClr>
-                </a:solidFill>
-              </a:rPr>
-              <a:t> string) bool {</a:t>
-            </a:r>
-            <a:br>
-              <a:rPr sz="1600" dirty="0">
-                <a:solidFill>
-                  <a:schemeClr val="bg1">
-                    <a:lumMod val="95000"/>
-                  </a:schemeClr>
-                </a:solidFill>
-              </a:rPr>
-            </a:br>
-            <a:r>
-              <a:rPr sz="1600" dirty="0">
-                <a:solidFill>
-                  <a:schemeClr val="bg1">
-                    <a:lumMod val="95000"/>
-                  </a:schemeClr>
-                </a:solidFill>
-              </a:rPr>
-              <a:t>    allowed, exists := </a:t>
-            </a:r>
-            <a:r>
-              <a:rPr sz="1600" dirty="0" err="1">
-                <a:solidFill>
-                  <a:schemeClr val="bg1">
-                    <a:lumMod val="95000"/>
-                  </a:schemeClr>
-                </a:solidFill>
-              </a:rPr>
-              <a:t>validTransitions</a:t>
-            </a:r>
-            <a:r>
-              <a:rPr sz="1600" dirty="0">
-                <a:solidFill>
-                  <a:schemeClr val="bg1">
-                    <a:lumMod val="95000"/>
-                  </a:schemeClr>
-                </a:solidFill>
-              </a:rPr>
-              <a:t>[</a:t>
-            </a:r>
-            <a:r>
-              <a:rPr sz="1600" dirty="0" err="1">
-                <a:solidFill>
-                  <a:schemeClr val="bg1">
-                    <a:lumMod val="95000"/>
-                  </a:schemeClr>
-                </a:solidFill>
-              </a:rPr>
-              <a:t>currentStatus</a:t>
-            </a:r>
-            <a:r>
-              <a:rPr sz="1600" dirty="0">
-                <a:solidFill>
-                  <a:schemeClr val="bg1">
-                    <a:lumMod val="95000"/>
-                  </a:schemeClr>
-                </a:solidFill>
-              </a:rPr>
-              <a:t>]</a:t>
-            </a:r>
-            <a:br>
-              <a:rPr sz="1600" dirty="0">
-                <a:solidFill>
-                  <a:schemeClr val="bg1">
-                    <a:lumMod val="95000"/>
-                  </a:schemeClr>
-                </a:solidFill>
-              </a:rPr>
-            </a:br>
-            <a:r>
-              <a:rPr sz="1600" dirty="0">
-                <a:solidFill>
-                  <a:schemeClr val="bg1">
-                    <a:lumMod val="95000"/>
-                  </a:schemeClr>
-                </a:solidFill>
-              </a:rPr>
-              <a:t>    if !exists {</a:t>
-            </a:r>
-            <a:br>
-              <a:rPr sz="1600" dirty="0">
-                <a:solidFill>
-                  <a:schemeClr val="bg1">
-                    <a:lumMod val="95000"/>
-                  </a:schemeClr>
-                </a:solidFill>
-              </a:rPr>
-            </a:br>
-            <a:r>
-              <a:rPr sz="1600" dirty="0">
-                <a:solidFill>
-                  <a:schemeClr val="bg1">
-                    <a:lumMod val="95000"/>
-                  </a:schemeClr>
-                </a:solidFill>
-              </a:rPr>
-              <a:t>        return false</a:t>
-            </a:r>
-            <a:br>
-              <a:rPr sz="1600" dirty="0">
-                <a:solidFill>
-                  <a:schemeClr val="bg1">
-                    <a:lumMod val="95000"/>
-                  </a:schemeClr>
-                </a:solidFill>
-              </a:rPr>
-            </a:br>
-            <a:r>
-              <a:rPr sz="1600" dirty="0">
-                <a:solidFill>
-                  <a:schemeClr val="bg1">
-                    <a:lumMod val="95000"/>
-                  </a:schemeClr>
-                </a:solidFill>
-              </a:rPr>
-              <a:t>    }</a:t>
-            </a:r>
-            <a:br>
-              <a:rPr sz="1600" dirty="0">
-                <a:solidFill>
-                  <a:schemeClr val="bg1">
-                    <a:lumMod val="95000"/>
-                  </a:schemeClr>
-                </a:solidFill>
-              </a:rPr>
-            </a:br>
-            <a:r>
-              <a:rPr sz="1600" dirty="0">
-                <a:solidFill>
-                  <a:schemeClr val="bg1">
-                    <a:lumMod val="95000"/>
-                  </a:schemeClr>
-                </a:solidFill>
-              </a:rPr>
-              <a:t>    for _, s := range allowed {</a:t>
-            </a:r>
-            <a:br>
-              <a:rPr sz="1600" dirty="0">
-                <a:solidFill>
-                  <a:schemeClr val="bg1">
-                    <a:lumMod val="95000"/>
-                  </a:schemeClr>
-                </a:solidFill>
-              </a:rPr>
-            </a:br>
-            <a:r>
-              <a:rPr sz="1600" dirty="0">
-                <a:solidFill>
-                  <a:schemeClr val="bg1">
-                    <a:lumMod val="95000"/>
-                  </a:schemeClr>
-                </a:solidFill>
-              </a:rPr>
-              <a:t>        if s == </a:t>
-            </a:r>
-            <a:r>
-              <a:rPr sz="1600" dirty="0" err="1">
-                <a:solidFill>
-                  <a:schemeClr val="bg1">
-                    <a:lumMod val="95000"/>
-                  </a:schemeClr>
-                </a:solidFill>
-              </a:rPr>
-              <a:t>newStatus</a:t>
-            </a:r>
-            <a:r>
-              <a:rPr sz="1600" dirty="0">
-                <a:solidFill>
-                  <a:schemeClr val="bg1">
-                    <a:lumMod val="95000"/>
-                  </a:schemeClr>
-                </a:solidFill>
-              </a:rPr>
-              <a:t> {</a:t>
-            </a:r>
-            <a:br>
-              <a:rPr sz="1600" dirty="0">
-                <a:solidFill>
-                  <a:schemeClr val="bg1">
-                    <a:lumMod val="95000"/>
-                  </a:schemeClr>
-                </a:solidFill>
-              </a:rPr>
-            </a:br>
-            <a:r>
-              <a:rPr sz="1600" dirty="0">
-                <a:solidFill>
-                  <a:schemeClr val="bg1">
-                    <a:lumMod val="95000"/>
-                  </a:schemeClr>
-                </a:solidFill>
-              </a:rPr>
-              <a:t>            return true</a:t>
-            </a:r>
-            <a:br>
-              <a:rPr sz="1600" dirty="0">
-                <a:solidFill>
-                  <a:schemeClr val="bg1">
-                    <a:lumMod val="95000"/>
-                  </a:schemeClr>
-                </a:solidFill>
-              </a:rPr>
-            </a:br>
-            <a:r>
-              <a:rPr sz="1600" dirty="0">
-                <a:solidFill>
-                  <a:schemeClr val="bg1">
-                    <a:lumMod val="95000"/>
-                  </a:schemeClr>
-                </a:solidFill>
-              </a:rPr>
-              <a:t>        }</a:t>
-            </a:r>
-            <a:br>
-              <a:rPr sz="1600" dirty="0">
-                <a:solidFill>
-                  <a:schemeClr val="bg1">
-                    <a:lumMod val="95000"/>
-                  </a:schemeClr>
-                </a:solidFill>
-              </a:rPr>
-            </a:br>
-            <a:r>
-              <a:rPr sz="1600" dirty="0">
-                <a:solidFill>
-                  <a:schemeClr val="bg1">
-                    <a:lumMod val="95000"/>
-                  </a:schemeClr>
-                </a:solidFill>
-              </a:rPr>
-              <a:t>    }</a:t>
-            </a:r>
-            <a:br>
-              <a:rPr sz="1600" dirty="0">
-                <a:solidFill>
-                  <a:schemeClr val="bg1">
-                    <a:lumMod val="95000"/>
-                  </a:schemeClr>
-                </a:solidFill>
-              </a:rPr>
-            </a:br>
-            <a:r>
-              <a:rPr sz="1600" dirty="0">
-                <a:solidFill>
-                  <a:schemeClr val="bg1">
-                    <a:lumMod val="95000"/>
-                  </a:schemeClr>
-                </a:solidFill>
-              </a:rPr>
-              <a:t>    return false</a:t>
-            </a:r>
-            <a:br>
-              <a:rPr sz="1600" dirty="0">
-                <a:solidFill>
-                  <a:schemeClr val="bg1">
-                    <a:lumMod val="95000"/>
-                  </a:schemeClr>
-                </a:solidFill>
-              </a:rPr>
-            </a:br>
-            <a:r>
-              <a:rPr sz="1600" dirty="0">
-                <a:solidFill>
-                  <a:schemeClr val="bg1">
-                    <a:lumMod val="95000"/>
-                  </a:schemeClr>
-                </a:solidFill>
-              </a:rPr>
-              <a:t>}</a:t>
-            </a:r>
-            <a:br>
-              <a:rPr sz="1600" dirty="0">
-                <a:solidFill>
-                  <a:schemeClr val="bg1">
-                    <a:lumMod val="95000"/>
-                  </a:schemeClr>
-                </a:solidFill>
-              </a:rPr>
-            </a:br>
-            <a:endParaRPr sz="1600" dirty="0">
-              <a:solidFill>
-                <a:schemeClr val="bg1">
-                  <a:lumMod val="95000"/>
-                </a:schemeClr>
-              </a:solidFill>
-            </a:endParaRPr>
           </a:p>
         </p:txBody>
       </p:sp>
@@ -4121,7 +3763,8 @@
           </a:bodyPr>
           <a:lstStyle/>
           <a:p>
-            <a:br>
+            <a:pPr/>
+            <a:r>
               <a:rPr lang="es-ES" sz="1600" dirty="0">
                 <a:solidFill>
                   <a:schemeClr val="bg1">
@@ -4129,7 +3772,11 @@
                   </a:schemeClr>
                 </a:solidFill>
               </a:rPr>
-            </a:br>
+              <a:t>// Uso en una funcion del chaincode:</a:t>
+            </a:r>
+          </a:p>
+          <a:p>
+            <a:pPr/>
             <a:r>
               <a:rPr lang="es-ES" sz="1600" dirty="0">
                 <a:solidFill>
@@ -4138,18 +3785,11 @@
                   </a:schemeClr>
                 </a:solidFill>
               </a:rPr>
-              <a:t>// Uso en una </a:t>
-            </a:r>
-            <a:r>
-              <a:rPr lang="es-ES" sz="1600" dirty="0" err="1">
-                <a:solidFill>
-                  <a:schemeClr val="bg1">
-                    <a:lumMod val="95000"/>
-                  </a:schemeClr>
-                </a:solidFill>
-              </a:rPr>
-              <a:t>funcion</a:t>
-            </a:r>
+              <a:t>if (!isValidTransition(property.status, newStatus)) {</a:t>
+            </a:r>
+          </a:p>
+          <a:p>
+            <a:pPr/>
             <a:r>
               <a:rPr lang="es-ES" sz="1600" dirty="0">
                 <a:solidFill>
@@ -4158,18 +3798,11 @@
                   </a:schemeClr>
                 </a:solidFill>
               </a:rPr>
-              <a:t> del </a:t>
-            </a:r>
-            <a:r>
-              <a:rPr lang="es-ES" sz="1600" dirty="0" err="1">
-                <a:solidFill>
-                  <a:schemeClr val="bg1">
-                    <a:lumMod val="95000"/>
-                  </a:schemeClr>
-                </a:solidFill>
-              </a:rPr>
-              <a:t>chaincode</a:t>
-            </a:r>
+              <a:t>    throw new Error(</a:t>
+            </a:r>
+          </a:p>
+          <a:p>
+            <a:pPr/>
             <a:r>
               <a:rPr lang="es-ES" sz="1600" dirty="0">
                 <a:solidFill>
@@ -4178,9 +3811,12 @@
                   </a:schemeClr>
                 </a:solidFill>
               </a:rPr>
-              <a:t>:</a:t>
-            </a:r>
-            <a:br>
+              <a:t>        `transicion no permitida: ` +</a:t>
+            </a:r>
+          </a:p>
+          <a:p>
+            <a:pPr/>
+            <a:r>
               <a:rPr lang="es-ES" sz="1600" dirty="0">
                 <a:solidFill>
                   <a:schemeClr val="bg1">
@@ -4188,17 +3824,11 @@
                   </a:schemeClr>
                 </a:solidFill>
               </a:rPr>
-            </a:br>
-            <a:r>
-              <a:rPr lang="es-ES" sz="1600" dirty="0" err="1">
-                <a:solidFill>
-                  <a:schemeClr val="bg1">
-                    <a:lumMod val="95000"/>
-                  </a:schemeClr>
-                </a:solidFill>
-              </a:rPr>
-              <a:t>if</a:t>
-            </a:r>
+              <a:t>        `${property.status} -&gt; ${newStatus}`);</a:t>
+            </a:r>
+          </a:p>
+          <a:p>
+            <a:pPr/>
             <a:r>
               <a:rPr lang="es-ES" sz="1600" dirty="0">
                 <a:solidFill>
@@ -4207,226 +3837,8 @@
                   </a:schemeClr>
                 </a:solidFill>
               </a:rPr>
-              <a:t> !</a:t>
-            </a:r>
-            <a:r>
-              <a:rPr lang="es-ES" sz="1600" dirty="0" err="1">
-                <a:solidFill>
-                  <a:schemeClr val="bg1">
-                    <a:lumMod val="95000"/>
-                  </a:schemeClr>
-                </a:solidFill>
-              </a:rPr>
-              <a:t>isValidTransition</a:t>
-            </a:r>
-            <a:r>
-              <a:rPr lang="es-ES" sz="1600" dirty="0">
-                <a:solidFill>
-                  <a:schemeClr val="bg1">
-                    <a:lumMod val="95000"/>
-                  </a:schemeClr>
-                </a:solidFill>
-              </a:rPr>
-              <a:t>(</a:t>
-            </a:r>
-            <a:r>
-              <a:rPr lang="es-ES" sz="1600" dirty="0" err="1">
-                <a:solidFill>
-                  <a:schemeClr val="bg1">
-                    <a:lumMod val="95000"/>
-                  </a:schemeClr>
-                </a:solidFill>
-              </a:rPr>
-              <a:t>property.Status</a:t>
-            </a:r>
-            <a:r>
-              <a:rPr lang="es-ES" sz="1600" dirty="0">
-                <a:solidFill>
-                  <a:schemeClr val="bg1">
-                    <a:lumMod val="95000"/>
-                  </a:schemeClr>
-                </a:solidFill>
-              </a:rPr>
-              <a:t>, </a:t>
-            </a:r>
-            <a:r>
-              <a:rPr lang="es-ES" sz="1600" dirty="0" err="1">
-                <a:solidFill>
-                  <a:schemeClr val="bg1">
-                    <a:lumMod val="95000"/>
-                  </a:schemeClr>
-                </a:solidFill>
-              </a:rPr>
-              <a:t>newStatus</a:t>
-            </a:r>
-            <a:r>
-              <a:rPr lang="es-ES" sz="1600" dirty="0">
-                <a:solidFill>
-                  <a:schemeClr val="bg1">
-                    <a:lumMod val="95000"/>
-                  </a:schemeClr>
-                </a:solidFill>
-              </a:rPr>
-              <a:t>) {</a:t>
-            </a:r>
-            <a:br>
-              <a:rPr lang="es-ES" sz="1600" dirty="0">
-                <a:solidFill>
-                  <a:schemeClr val="bg1">
-                    <a:lumMod val="95000"/>
-                  </a:schemeClr>
-                </a:solidFill>
-              </a:rPr>
-            </a:br>
-            <a:r>
-              <a:rPr lang="es-ES" sz="1600" dirty="0">
-                <a:solidFill>
-                  <a:schemeClr val="bg1">
-                    <a:lumMod val="95000"/>
-                  </a:schemeClr>
-                </a:solidFill>
-              </a:rPr>
-              <a:t>    </a:t>
-            </a:r>
-            <a:r>
-              <a:rPr lang="es-ES" sz="1600" dirty="0" err="1">
-                <a:solidFill>
-                  <a:schemeClr val="bg1">
-                    <a:lumMod val="95000"/>
-                  </a:schemeClr>
-                </a:solidFill>
-              </a:rPr>
-              <a:t>return</a:t>
-            </a:r>
-            <a:r>
-              <a:rPr lang="es-ES" sz="1600" dirty="0">
-                <a:solidFill>
-                  <a:schemeClr val="bg1">
-                    <a:lumMod val="95000"/>
-                  </a:schemeClr>
-                </a:solidFill>
-              </a:rPr>
-              <a:t> </a:t>
-            </a:r>
-            <a:r>
-              <a:rPr lang="es-ES" sz="1600" dirty="0" err="1">
-                <a:solidFill>
-                  <a:schemeClr val="bg1">
-                    <a:lumMod val="95000"/>
-                  </a:schemeClr>
-                </a:solidFill>
-              </a:rPr>
-              <a:t>fmt.Errorf</a:t>
-            </a:r>
-            <a:r>
-              <a:rPr lang="es-ES" sz="1600" dirty="0">
-                <a:solidFill>
-                  <a:schemeClr val="bg1">
-                    <a:lumMod val="95000"/>
-                  </a:schemeClr>
-                </a:solidFill>
-              </a:rPr>
-              <a:t>("</a:t>
-            </a:r>
-            <a:r>
-              <a:rPr lang="es-ES" sz="1600" dirty="0" err="1">
-                <a:solidFill>
-                  <a:schemeClr val="bg1">
-                    <a:lumMod val="95000"/>
-                  </a:schemeClr>
-                </a:solidFill>
-              </a:rPr>
-              <a:t>transicion</a:t>
-            </a:r>
-            <a:r>
-              <a:rPr lang="es-ES" sz="1600" dirty="0">
-                <a:solidFill>
-                  <a:schemeClr val="bg1">
-                    <a:lumMod val="95000"/>
-                  </a:schemeClr>
-                </a:solidFill>
-              </a:rPr>
-              <a:t> no permitida: %s -&gt; %s",</a:t>
-            </a:r>
-            <a:br>
-              <a:rPr lang="es-ES" sz="1600" dirty="0">
-                <a:solidFill>
-                  <a:schemeClr val="bg1">
-                    <a:lumMod val="95000"/>
-                  </a:schemeClr>
-                </a:solidFill>
-              </a:rPr>
-            </a:br>
-            <a:r>
-              <a:rPr lang="es-ES" sz="1600" dirty="0">
-                <a:solidFill>
-                  <a:schemeClr val="bg1">
-                    <a:lumMod val="95000"/>
-                  </a:schemeClr>
-                </a:solidFill>
-              </a:rPr>
-              <a:t>        </a:t>
-            </a:r>
-            <a:r>
-              <a:rPr lang="es-ES" sz="1600" dirty="0" err="1">
-                <a:solidFill>
-                  <a:schemeClr val="bg1">
-                    <a:lumMod val="95000"/>
-                  </a:schemeClr>
-                </a:solidFill>
-              </a:rPr>
-              <a:t>property.Status</a:t>
-            </a:r>
-            <a:r>
-              <a:rPr lang="es-ES" sz="1600" dirty="0">
-                <a:solidFill>
-                  <a:schemeClr val="bg1">
-                    <a:lumMod val="95000"/>
-                  </a:schemeClr>
-                </a:solidFill>
-              </a:rPr>
-              <a:t>, </a:t>
-            </a:r>
-            <a:r>
-              <a:rPr lang="es-ES" sz="1600" dirty="0" err="1">
-                <a:solidFill>
-                  <a:schemeClr val="bg1">
-                    <a:lumMod val="95000"/>
-                  </a:schemeClr>
-                </a:solidFill>
-              </a:rPr>
-              <a:t>newStatus</a:t>
-            </a:r>
-            <a:r>
-              <a:rPr lang="es-ES" sz="1600" dirty="0">
-                <a:solidFill>
-                  <a:schemeClr val="bg1">
-                    <a:lumMod val="95000"/>
-                  </a:schemeClr>
-                </a:solidFill>
-              </a:rPr>
-              <a:t>)</a:t>
-            </a:r>
-            <a:br>
-              <a:rPr lang="es-ES" sz="1600" dirty="0">
-                <a:solidFill>
-                  <a:schemeClr val="bg1">
-                    <a:lumMod val="95000"/>
-                  </a:schemeClr>
-                </a:solidFill>
-              </a:rPr>
-            </a:br>
-            <a:r>
-              <a:rPr lang="es-ES" sz="1600" dirty="0">
-                <a:solidFill>
-                  <a:schemeClr val="bg1">
-                    <a:lumMod val="95000"/>
-                  </a:schemeClr>
-                </a:solidFill>
-              </a:rPr>
               <a:t>}</a:t>
             </a:r>
-            <a:endParaRPr lang="es-ES" sz="1600" dirty="0"/>
           </a:p>
         </p:txBody>
       </p:sp>
@@ -6082,7 +5494,7 @@
               </a:defRPr>
             </a:pPr>
             <a:r>
-              <a:t>GO</a:t>
+              <a:t>NODE.JS</a:t>
             </a:r>
           </a:p>
         </p:txBody>
@@ -6151,7 +5563,8 @@
           <a:bodyPr wrap="square"/>
           <a:lstStyle/>
           <a:p>
-            <a:br>
+            <a:pPr/>
+            <a:r>
               <a:rPr sz="1600" dirty="0">
                 <a:solidFill>
                   <a:schemeClr val="bg1">
@@ -6159,7 +5572,11 @@
                   </a:schemeClr>
                 </a:solidFill>
               </a:rPr>
-            </a:br>
+              <a:t>// Escribir en una Private Data Collection</a:t>
+            </a:r>
+          </a:p>
+          <a:p>
+            <a:pPr/>
             <a:r>
               <a:rPr sz="1600" dirty="0">
                 <a:solidFill>
@@ -6168,18 +5585,11 @@
                   </a:schemeClr>
                 </a:solidFill>
               </a:rPr>
-              <a:t>// </a:t>
-            </a:r>
-            <a:r>
-              <a:rPr sz="1600" dirty="0" err="1">
-                <a:solidFill>
-                  <a:schemeClr val="bg1">
-                    <a:lumMod val="95000"/>
-                  </a:schemeClr>
-                </a:solidFill>
-              </a:rPr>
-              <a:t>Escribir</a:t>
-            </a:r>
+              <a:t>async SetPrivatePrice(ctx, propertyID) {</a:t>
+            </a:r>
+          </a:p>
+          <a:p>
+            <a:pPr/>
             <a:r>
               <a:rPr sz="1600" dirty="0">
                 <a:solidFill>
@@ -6188,18 +5598,11 @@
                   </a:schemeClr>
                 </a:solidFill>
               </a:rPr>
-              <a:t> </a:t>
-            </a:r>
-            <a:r>
-              <a:rPr sz="1600" dirty="0" err="1">
-                <a:solidFill>
-                  <a:schemeClr val="bg1">
-                    <a:lumMod val="95000"/>
-                  </a:schemeClr>
-                </a:solidFill>
-              </a:rPr>
-              <a:t>en</a:t>
-            </a:r>
+              <a:t>    // Los datos privados vienen en transient data (no en el ledger)</a:t>
+            </a:r>
+          </a:p>
+          <a:p>
+            <a:pPr/>
             <a:r>
               <a:rPr sz="1600" dirty="0">
                 <a:solidFill>
@@ -6208,18 +5611,11 @@
                   </a:schemeClr>
                 </a:solidFill>
               </a:rPr>
-              <a:t> </a:t>
-            </a:r>
-            <a:r>
-              <a:rPr sz="1600" dirty="0" err="1">
-                <a:solidFill>
-                  <a:schemeClr val="bg1">
-                    <a:lumMod val="95000"/>
-                  </a:schemeClr>
-                </a:solidFill>
-              </a:rPr>
-              <a:t>una</a:t>
-            </a:r>
+              <a:t>    const transientMap = ctx.stub.getTransient();</a:t>
+            </a:r>
+          </a:p>
+          <a:p>
+            <a:pPr/>
             <a:r>
               <a:rPr sz="1600" dirty="0">
                 <a:solidFill>
@@ -6228,9 +5624,12 @@
                   </a:schemeClr>
                 </a:solidFill>
               </a:rPr>
-              <a:t> Private Data Collection</a:t>
-            </a:r>
-            <a:br>
+              <a:t>    const priceData = transientMap.get('price');</a:t>
+            </a:r>
+          </a:p>
+          <a:p>
+            <a:pPr/>
+            <a:r>
               <a:rPr sz="1600" dirty="0">
                 <a:solidFill>
                   <a:schemeClr val="bg1">
@@ -6238,17 +5637,11 @@
                   </a:schemeClr>
                 </a:solidFill>
               </a:rPr>
-            </a:br>
-            <a:r>
-              <a:rPr sz="1600" dirty="0" err="1">
-                <a:solidFill>
-                  <a:schemeClr val="bg1">
-                    <a:lumMod val="95000"/>
-                  </a:schemeClr>
-                </a:solidFill>
-              </a:rPr>
-              <a:t>func</a:t>
-            </a:r>
+              <a:t>    if (!priceData) {</a:t>
+            </a:r>
+          </a:p>
+          <a:p>
+            <a:pPr/>
             <a:r>
               <a:rPr sz="1600" dirty="0">
                 <a:solidFill>
@@ -6257,18 +5650,11 @@
                   </a:schemeClr>
                 </a:solidFill>
               </a:rPr>
-              <a:t> (s *</a:t>
-            </a:r>
-            <a:r>
-              <a:rPr sz="1600" dirty="0" err="1">
-                <a:solidFill>
-                  <a:schemeClr val="bg1">
-                    <a:lumMod val="95000"/>
-                  </a:schemeClr>
-                </a:solidFill>
-              </a:rPr>
-              <a:t>SmartContract</a:t>
-            </a:r>
+              <a:t>        throw new Error(</a:t>
+            </a:r>
+          </a:p>
+          <a:p>
+            <a:pPr/>
             <a:r>
               <a:rPr sz="1600" dirty="0">
                 <a:solidFill>
@@ -6277,18 +5663,11 @@
                   </a:schemeClr>
                 </a:solidFill>
               </a:rPr>
-              <a:t>) </a:t>
-            </a:r>
-            <a:r>
-              <a:rPr sz="1600" dirty="0" err="1">
-                <a:solidFill>
-                  <a:schemeClr val="bg1">
-                    <a:lumMod val="95000"/>
-                  </a:schemeClr>
-                </a:solidFill>
-              </a:rPr>
-              <a:t>SetPrivatePrice</a:t>
-            </a:r>
+              <a:t>            'falta el campo "price" en transient data');</a:t>
+            </a:r>
+          </a:p>
+          <a:p>
+            <a:pPr/>
             <a:r>
               <a:rPr sz="1600" dirty="0">
                 <a:solidFill>
@@ -6297,18 +5676,11 @@
                   </a:schemeClr>
                 </a:solidFill>
               </a:rPr>
-              <a:t>(</a:t>
-            </a:r>
-            <a:r>
-              <a:rPr sz="1600" dirty="0" err="1">
-                <a:solidFill>
-                  <a:schemeClr val="bg1">
-                    <a:lumMod val="95000"/>
-                  </a:schemeClr>
-                </a:solidFill>
-              </a:rPr>
-              <a:t>ctx</a:t>
-            </a:r>
+              <a:t>    }</a:t>
+            </a:r>
+          </a:p>
+          <a:p>
+            <a:pPr/>
             <a:r>
               <a:rPr sz="1600" dirty="0">
                 <a:solidFill>
@@ -6317,18 +5689,11 @@
                   </a:schemeClr>
                 </a:solidFill>
               </a:rPr>
-              <a:t> </a:t>
-            </a:r>
-            <a:r>
-              <a:rPr sz="1600" dirty="0" err="1">
-                <a:solidFill>
-                  <a:schemeClr val="bg1">
-                    <a:lumMod val="95000"/>
-                  </a:schemeClr>
-                </a:solidFill>
-              </a:rPr>
-              <a:t>contractapi.TransactionContextInterface</a:t>
-            </a:r>
+              <a:t/>
+            </a:r>
+          </a:p>
+          <a:p>
+            <a:pPr/>
             <a:r>
               <a:rPr sz="1600" dirty="0">
                 <a:solidFill>
@@ -6337,9 +5702,12 @@
                   </a:schemeClr>
                 </a:solidFill>
               </a:rPr>
-              <a:t>,</a:t>
-            </a:r>
-            <a:br>
+              <a:t>    // Guardar en la coleccion privada</a:t>
+            </a:r>
+          </a:p>
+          <a:p>
+            <a:pPr/>
+            <a:r>
               <a:rPr sz="1600" dirty="0">
                 <a:solidFill>
                   <a:schemeClr val="bg1">
@@ -6347,7 +5715,11 @@
                   </a:schemeClr>
                 </a:solidFill>
               </a:rPr>
-            </a:br>
+              <a:t>    await ctx.stub.putPrivateData(</a:t>
+            </a:r>
+          </a:p>
+          <a:p>
+            <a:pPr/>
             <a:r>
               <a:rPr sz="1600" dirty="0">
                 <a:solidFill>
@@ -6356,18 +5728,11 @@
                   </a:schemeClr>
                 </a:solidFill>
               </a:rPr>
-              <a:t>    </a:t>
-            </a:r>
-            <a:r>
-              <a:rPr sz="1600" dirty="0" err="1">
-                <a:solidFill>
-                  <a:schemeClr val="bg1">
-                    <a:lumMod val="95000"/>
-                  </a:schemeClr>
-                </a:solidFill>
-              </a:rPr>
-              <a:t>propertyID</a:t>
-            </a:r>
+              <a:t>        'priceAgreement', propertyID, priceData);</a:t>
+            </a:r>
+          </a:p>
+          <a:p>
+            <a:pPr/>
             <a:r>
               <a:rPr sz="1600" dirty="0">
                 <a:solidFill>
@@ -6376,602 +5741,8 @@
                   </a:schemeClr>
                 </a:solidFill>
               </a:rPr>
-              <a:t> string) error {</a:t>
-            </a:r>
-            <a:br>
-              <a:rPr sz="1600" dirty="0">
-                <a:solidFill>
-                  <a:schemeClr val="bg1">
-                    <a:lumMod val="95000"/>
-                  </a:schemeClr>
-                </a:solidFill>
-              </a:rPr>
-            </a:br>
-            <a:br>
-              <a:rPr sz="1600" dirty="0">
-                <a:solidFill>
-                  <a:schemeClr val="bg1">
-                    <a:lumMod val="95000"/>
-                  </a:schemeClr>
-                </a:solidFill>
-              </a:rPr>
-            </a:br>
-            <a:r>
-              <a:rPr sz="1600" dirty="0">
-                <a:solidFill>
-                  <a:schemeClr val="bg1">
-                    <a:lumMod val="95000"/>
-                  </a:schemeClr>
-                </a:solidFill>
-              </a:rPr>
-              <a:t>    // Los </a:t>
-            </a:r>
-            <a:r>
-              <a:rPr sz="1600" dirty="0" err="1">
-                <a:solidFill>
-                  <a:schemeClr val="bg1">
-                    <a:lumMod val="95000"/>
-                  </a:schemeClr>
-                </a:solidFill>
-              </a:rPr>
-              <a:t>datos</a:t>
-            </a:r>
-            <a:r>
-              <a:rPr sz="1600" dirty="0">
-                <a:solidFill>
-                  <a:schemeClr val="bg1">
-                    <a:lumMod val="95000"/>
-                  </a:schemeClr>
-                </a:solidFill>
-              </a:rPr>
-              <a:t> privados </a:t>
-            </a:r>
-            <a:r>
-              <a:rPr sz="1600" dirty="0" err="1">
-                <a:solidFill>
-                  <a:schemeClr val="bg1">
-                    <a:lumMod val="95000"/>
-                  </a:schemeClr>
-                </a:solidFill>
-              </a:rPr>
-              <a:t>vienen</a:t>
-            </a:r>
-            <a:r>
-              <a:rPr sz="1600" dirty="0">
-                <a:solidFill>
-                  <a:schemeClr val="bg1">
-                    <a:lumMod val="95000"/>
-                  </a:schemeClr>
-                </a:solidFill>
-              </a:rPr>
-              <a:t> </a:t>
-            </a:r>
-            <a:r>
-              <a:rPr sz="1600" dirty="0" err="1">
-                <a:solidFill>
-                  <a:schemeClr val="bg1">
-                    <a:lumMod val="95000"/>
-                  </a:schemeClr>
-                </a:solidFill>
-              </a:rPr>
-              <a:t>en</a:t>
-            </a:r>
-            <a:r>
-              <a:rPr sz="1600" dirty="0">
-                <a:solidFill>
-                  <a:schemeClr val="bg1">
-                    <a:lumMod val="95000"/>
-                  </a:schemeClr>
-                </a:solidFill>
-              </a:rPr>
-              <a:t> transient data (no </a:t>
-            </a:r>
-            <a:r>
-              <a:rPr sz="1600" dirty="0" err="1">
-                <a:solidFill>
-                  <a:schemeClr val="bg1">
-                    <a:lumMod val="95000"/>
-                  </a:schemeClr>
-                </a:solidFill>
-              </a:rPr>
-              <a:t>en</a:t>
-            </a:r>
-            <a:r>
-              <a:rPr sz="1600" dirty="0">
-                <a:solidFill>
-                  <a:schemeClr val="bg1">
-                    <a:lumMod val="95000"/>
-                  </a:schemeClr>
-                </a:solidFill>
-              </a:rPr>
-              <a:t> </a:t>
-            </a:r>
-            <a:r>
-              <a:rPr sz="1600" dirty="0" err="1">
-                <a:solidFill>
-                  <a:schemeClr val="bg1">
-                    <a:lumMod val="95000"/>
-                  </a:schemeClr>
-                </a:solidFill>
-              </a:rPr>
-              <a:t>el</a:t>
-            </a:r>
-            <a:r>
-              <a:rPr sz="1600" dirty="0">
-                <a:solidFill>
-                  <a:schemeClr val="bg1">
-                    <a:lumMod val="95000"/>
-                  </a:schemeClr>
-                </a:solidFill>
-              </a:rPr>
-              <a:t> ledger)</a:t>
-            </a:r>
-            <a:br>
-              <a:rPr sz="1600" dirty="0">
-                <a:solidFill>
-                  <a:schemeClr val="bg1">
-                    <a:lumMod val="95000"/>
-                  </a:schemeClr>
-                </a:solidFill>
-              </a:rPr>
-            </a:br>
-            <a:r>
-              <a:rPr sz="1600" dirty="0">
-                <a:solidFill>
-                  <a:schemeClr val="bg1">
-                    <a:lumMod val="95000"/>
-                  </a:schemeClr>
-                </a:solidFill>
-              </a:rPr>
-              <a:t>    </a:t>
-            </a:r>
-            <a:r>
-              <a:rPr sz="1600" dirty="0" err="1">
-                <a:solidFill>
-                  <a:schemeClr val="bg1">
-                    <a:lumMod val="95000"/>
-                  </a:schemeClr>
-                </a:solidFill>
-              </a:rPr>
-              <a:t>transientMap</a:t>
-            </a:r>
-            <a:r>
-              <a:rPr sz="1600" dirty="0">
-                <a:solidFill>
-                  <a:schemeClr val="bg1">
-                    <a:lumMod val="95000"/>
-                  </a:schemeClr>
-                </a:solidFill>
-              </a:rPr>
-              <a:t>, err := </a:t>
-            </a:r>
-            <a:r>
-              <a:rPr sz="1600" dirty="0" err="1">
-                <a:solidFill>
-                  <a:schemeClr val="bg1">
-                    <a:lumMod val="95000"/>
-                  </a:schemeClr>
-                </a:solidFill>
-              </a:rPr>
-              <a:t>ctx.GetStub</a:t>
-            </a:r>
-            <a:r>
-              <a:rPr sz="1600" dirty="0">
-                <a:solidFill>
-                  <a:schemeClr val="bg1">
-                    <a:lumMod val="95000"/>
-                  </a:schemeClr>
-                </a:solidFill>
-              </a:rPr>
-              <a:t>().</a:t>
-            </a:r>
-            <a:r>
-              <a:rPr sz="1600" dirty="0" err="1">
-                <a:solidFill>
-                  <a:schemeClr val="bg1">
-                    <a:lumMod val="95000"/>
-                  </a:schemeClr>
-                </a:solidFill>
-              </a:rPr>
-              <a:t>GetTransient</a:t>
-            </a:r>
-            <a:r>
-              <a:rPr sz="1600" dirty="0">
-                <a:solidFill>
-                  <a:schemeClr val="bg1">
-                    <a:lumMod val="95000"/>
-                  </a:schemeClr>
-                </a:solidFill>
-              </a:rPr>
-              <a:t>()</a:t>
-            </a:r>
-            <a:br>
-              <a:rPr sz="1600" dirty="0">
-                <a:solidFill>
-                  <a:schemeClr val="bg1">
-                    <a:lumMod val="95000"/>
-                  </a:schemeClr>
-                </a:solidFill>
-              </a:rPr>
-            </a:br>
-            <a:r>
-              <a:rPr sz="1600" dirty="0">
-                <a:solidFill>
-                  <a:schemeClr val="bg1">
-                    <a:lumMod val="95000"/>
-                  </a:schemeClr>
-                </a:solidFill>
-              </a:rPr>
-              <a:t>    if err != nil {</a:t>
-            </a:r>
-            <a:br>
-              <a:rPr sz="1600" dirty="0">
-                <a:solidFill>
-                  <a:schemeClr val="bg1">
-                    <a:lumMod val="95000"/>
-                  </a:schemeClr>
-                </a:solidFill>
-              </a:rPr>
-            </a:br>
-            <a:r>
-              <a:rPr sz="1600" dirty="0">
-                <a:solidFill>
-                  <a:schemeClr val="bg1">
-                    <a:lumMod val="95000"/>
-                  </a:schemeClr>
-                </a:solidFill>
-              </a:rPr>
-              <a:t>        return err</a:t>
-            </a:r>
-            <a:br>
-              <a:rPr sz="1600" dirty="0">
-                <a:solidFill>
-                  <a:schemeClr val="bg1">
-                    <a:lumMod val="95000"/>
-                  </a:schemeClr>
-                </a:solidFill>
-              </a:rPr>
-            </a:br>
-            <a:r>
-              <a:rPr sz="1600" dirty="0">
-                <a:solidFill>
-                  <a:schemeClr val="bg1">
-                    <a:lumMod val="95000"/>
-                  </a:schemeClr>
-                </a:solidFill>
-              </a:rPr>
-              <a:t>    }</a:t>
-            </a:r>
-            <a:br>
-              <a:rPr sz="1600" dirty="0">
-                <a:solidFill>
-                  <a:schemeClr val="bg1">
-                    <a:lumMod val="95000"/>
-                  </a:schemeClr>
-                </a:solidFill>
-              </a:rPr>
-            </a:br>
-            <a:r>
-              <a:rPr sz="1600" dirty="0">
-                <a:solidFill>
-                  <a:schemeClr val="bg1">
-                    <a:lumMod val="95000"/>
-                  </a:schemeClr>
-                </a:solidFill>
-              </a:rPr>
-              <a:t>    </a:t>
-            </a:r>
-            <a:r>
-              <a:rPr sz="1600" dirty="0" err="1">
-                <a:solidFill>
-                  <a:schemeClr val="bg1">
-                    <a:lumMod val="95000"/>
-                  </a:schemeClr>
-                </a:solidFill>
-              </a:rPr>
-              <a:t>priceData</a:t>
-            </a:r>
-            <a:r>
-              <a:rPr sz="1600" dirty="0">
-                <a:solidFill>
-                  <a:schemeClr val="bg1">
-                    <a:lumMod val="95000"/>
-                  </a:schemeClr>
-                </a:solidFill>
-              </a:rPr>
-              <a:t> := </a:t>
-            </a:r>
-            <a:r>
-              <a:rPr sz="1600" dirty="0" err="1">
-                <a:solidFill>
-                  <a:schemeClr val="bg1">
-                    <a:lumMod val="95000"/>
-                  </a:schemeClr>
-                </a:solidFill>
-              </a:rPr>
-              <a:t>transientMap</a:t>
-            </a:r>
-            <a:r>
-              <a:rPr sz="1600" dirty="0">
-                <a:solidFill>
-                  <a:schemeClr val="bg1">
-                    <a:lumMod val="95000"/>
-                  </a:schemeClr>
-                </a:solidFill>
-              </a:rPr>
-              <a:t>["price"]</a:t>
-            </a:r>
-            <a:br>
-              <a:rPr sz="1600" dirty="0">
-                <a:solidFill>
-                  <a:schemeClr val="bg1">
-                    <a:lumMod val="95000"/>
-                  </a:schemeClr>
-                </a:solidFill>
-              </a:rPr>
-            </a:br>
-            <a:br>
-              <a:rPr sz="1600" dirty="0">
-                <a:solidFill>
-                  <a:schemeClr val="bg1">
-                    <a:lumMod val="95000"/>
-                  </a:schemeClr>
-                </a:solidFill>
-              </a:rPr>
-            </a:br>
-            <a:r>
-              <a:rPr sz="1600" dirty="0">
-                <a:solidFill>
-                  <a:schemeClr val="bg1">
-                    <a:lumMod val="95000"/>
-                  </a:schemeClr>
-                </a:solidFill>
-              </a:rPr>
-              <a:t>    // </a:t>
-            </a:r>
-            <a:r>
-              <a:rPr sz="1600" dirty="0" err="1">
-                <a:solidFill>
-                  <a:schemeClr val="bg1">
-                    <a:lumMod val="95000"/>
-                  </a:schemeClr>
-                </a:solidFill>
-              </a:rPr>
-              <a:t>Guardar</a:t>
-            </a:r>
-            <a:r>
-              <a:rPr sz="1600" dirty="0">
-                <a:solidFill>
-                  <a:schemeClr val="bg1">
-                    <a:lumMod val="95000"/>
-                  </a:schemeClr>
-                </a:solidFill>
-              </a:rPr>
-              <a:t> </a:t>
-            </a:r>
-            <a:r>
-              <a:rPr sz="1600" dirty="0" err="1">
-                <a:solidFill>
-                  <a:schemeClr val="bg1">
-                    <a:lumMod val="95000"/>
-                  </a:schemeClr>
-                </a:solidFill>
-              </a:rPr>
-              <a:t>en</a:t>
-            </a:r>
-            <a:r>
-              <a:rPr sz="1600" dirty="0">
-                <a:solidFill>
-                  <a:schemeClr val="bg1">
-                    <a:lumMod val="95000"/>
-                  </a:schemeClr>
-                </a:solidFill>
-              </a:rPr>
-              <a:t> la </a:t>
-            </a:r>
-            <a:r>
-              <a:rPr sz="1600" dirty="0" err="1">
-                <a:solidFill>
-                  <a:schemeClr val="bg1">
-                    <a:lumMod val="95000"/>
-                  </a:schemeClr>
-                </a:solidFill>
-              </a:rPr>
-              <a:t>coleccion</a:t>
-            </a:r>
-            <a:r>
-              <a:rPr sz="1600" dirty="0">
-                <a:solidFill>
-                  <a:schemeClr val="bg1">
-                    <a:lumMod val="95000"/>
-                  </a:schemeClr>
-                </a:solidFill>
-              </a:rPr>
-              <a:t> </a:t>
-            </a:r>
-            <a:r>
-              <a:rPr sz="1600" dirty="0" err="1">
-                <a:solidFill>
-                  <a:schemeClr val="bg1">
-                    <a:lumMod val="95000"/>
-                  </a:schemeClr>
-                </a:solidFill>
-              </a:rPr>
-              <a:t>privada</a:t>
-            </a:r>
-            <a:br>
-              <a:rPr sz="1600" dirty="0">
-                <a:solidFill>
-                  <a:schemeClr val="bg1">
-                    <a:lumMod val="95000"/>
-                  </a:schemeClr>
-                </a:solidFill>
-              </a:rPr>
-            </a:br>
-            <a:r>
-              <a:rPr sz="1600" dirty="0">
-                <a:solidFill>
-                  <a:schemeClr val="bg1">
-                    <a:lumMod val="95000"/>
-                  </a:schemeClr>
-                </a:solidFill>
-              </a:rPr>
-              <a:t>    return </a:t>
-            </a:r>
-            <a:r>
-              <a:rPr sz="1600" dirty="0" err="1">
-                <a:solidFill>
-                  <a:schemeClr val="bg1">
-                    <a:lumMod val="95000"/>
-                  </a:schemeClr>
-                </a:solidFill>
-              </a:rPr>
-              <a:t>ctx.GetStub</a:t>
-            </a:r>
-            <a:r>
-              <a:rPr sz="1600" dirty="0">
-                <a:solidFill>
-                  <a:schemeClr val="bg1">
-                    <a:lumMod val="95000"/>
-                  </a:schemeClr>
-                </a:solidFill>
-              </a:rPr>
-              <a:t>().</a:t>
-            </a:r>
-            <a:r>
-              <a:rPr sz="1600" dirty="0" err="1">
-                <a:solidFill>
-                  <a:schemeClr val="bg1">
-                    <a:lumMod val="95000"/>
-                  </a:schemeClr>
-                </a:solidFill>
-              </a:rPr>
-              <a:t>PutPrivateData</a:t>
-            </a:r>
-            <a:r>
-              <a:rPr sz="1600" dirty="0">
-                <a:solidFill>
-                  <a:schemeClr val="bg1">
-                    <a:lumMod val="95000"/>
-                  </a:schemeClr>
-                </a:solidFill>
-              </a:rPr>
-              <a:t>("</a:t>
-            </a:r>
-            <a:r>
-              <a:rPr sz="1600" dirty="0" err="1">
-                <a:solidFill>
-                  <a:schemeClr val="bg1">
-                    <a:lumMod val="95000"/>
-                  </a:schemeClr>
-                </a:solidFill>
-              </a:rPr>
-              <a:t>priceAgreement</a:t>
-            </a:r>
-            <a:r>
-              <a:rPr sz="1600" dirty="0">
-                <a:solidFill>
-                  <a:schemeClr val="bg1">
-                    <a:lumMod val="95000"/>
-                  </a:schemeClr>
-                </a:solidFill>
-              </a:rPr>
-              <a:t>",</a:t>
-            </a:r>
-            <a:br>
-              <a:rPr sz="1600" dirty="0">
-                <a:solidFill>
-                  <a:schemeClr val="bg1">
-                    <a:lumMod val="95000"/>
-                  </a:schemeClr>
-                </a:solidFill>
-              </a:rPr>
-            </a:br>
-            <a:r>
-              <a:rPr sz="1600" dirty="0">
-                <a:solidFill>
-                  <a:schemeClr val="bg1">
-                    <a:lumMod val="95000"/>
-                  </a:schemeClr>
-                </a:solidFill>
-              </a:rPr>
-              <a:t>        </a:t>
-            </a:r>
-            <a:r>
-              <a:rPr sz="1600" dirty="0" err="1">
-                <a:solidFill>
-                  <a:schemeClr val="bg1">
-                    <a:lumMod val="95000"/>
-                  </a:schemeClr>
-                </a:solidFill>
-              </a:rPr>
-              <a:t>propertyID</a:t>
-            </a:r>
-            <a:r>
-              <a:rPr sz="1600" dirty="0">
-                <a:solidFill>
-                  <a:schemeClr val="bg1">
-                    <a:lumMod val="95000"/>
-                  </a:schemeClr>
-                </a:solidFill>
-              </a:rPr>
-              <a:t>, </a:t>
-            </a:r>
-            <a:r>
-              <a:rPr sz="1600" dirty="0" err="1">
-                <a:solidFill>
-                  <a:schemeClr val="bg1">
-                    <a:lumMod val="95000"/>
-                  </a:schemeClr>
-                </a:solidFill>
-              </a:rPr>
-              <a:t>priceData</a:t>
-            </a:r>
-            <a:r>
-              <a:rPr sz="1600" dirty="0">
-                <a:solidFill>
-                  <a:schemeClr val="bg1">
-                    <a:lumMod val="95000"/>
-                  </a:schemeClr>
-                </a:solidFill>
-              </a:rPr>
-              <a:t>)</a:t>
-            </a:r>
-            <a:br>
-              <a:rPr sz="1600" dirty="0">
-                <a:solidFill>
-                  <a:schemeClr val="bg1">
-                    <a:lumMod val="95000"/>
-                  </a:schemeClr>
-                </a:solidFill>
-              </a:rPr>
-            </a:br>
-            <a:r>
-              <a:rPr sz="1600" dirty="0">
-                <a:solidFill>
-                  <a:schemeClr val="bg1">
-                    <a:lumMod val="95000"/>
-                  </a:schemeClr>
-                </a:solidFill>
-              </a:rPr>
               <a:t>}</a:t>
             </a:r>
-            <a:br>
-              <a:rPr sz="1600" dirty="0">
-                <a:solidFill>
-                  <a:schemeClr val="bg1">
-                    <a:lumMod val="95000"/>
-                  </a:schemeClr>
-                </a:solidFill>
-              </a:rPr>
-            </a:br>
-            <a:endParaRPr sz="1600" dirty="0">
-              <a:solidFill>
-                <a:schemeClr val="bg1">
-                  <a:lumMod val="95000"/>
-                </a:schemeClr>
-              </a:solidFill>
-            </a:endParaRPr>
           </a:p>
         </p:txBody>
       </p:sp>
@@ -7003,7 +5774,8 @@
           </a:bodyPr>
           <a:lstStyle/>
           <a:p>
-            <a:br>
+            <a:pPr/>
+            <a:r>
               <a:rPr lang="es-ES" sz="1600" dirty="0">
                 <a:solidFill>
                   <a:schemeClr val="bg1">
@@ -7011,7 +5783,11 @@
                   </a:schemeClr>
                 </a:solidFill>
               </a:rPr>
-            </a:br>
+              <a:t>// Leer de una Private Data Collection</a:t>
+            </a:r>
+          </a:p>
+          <a:p>
+            <a:pPr/>
             <a:r>
               <a:rPr lang="es-ES" sz="1600" dirty="0">
                 <a:solidFill>
@@ -7020,18 +5796,11 @@
                   </a:schemeClr>
                 </a:solidFill>
               </a:rPr>
-              <a:t>// Leer de una </a:t>
-            </a:r>
-            <a:r>
-              <a:rPr lang="es-ES" sz="1600" dirty="0" err="1">
-                <a:solidFill>
-                  <a:schemeClr val="bg1">
-                    <a:lumMod val="95000"/>
-                  </a:schemeClr>
-                </a:solidFill>
-              </a:rPr>
-              <a:t>Private</a:t>
-            </a:r>
+              <a:t>async GetPrivatePrice(ctx, propertyID) {</a:t>
+            </a:r>
+          </a:p>
+          <a:p>
+            <a:pPr/>
             <a:r>
               <a:rPr lang="es-ES" sz="1600" dirty="0">
                 <a:solidFill>
@@ -7040,19 +5809,12 @@
                   </a:schemeClr>
                 </a:solidFill>
               </a:rPr>
-              <a:t> Data </a:t>
-            </a:r>
-            <a:r>
-              <a:rPr lang="es-ES" sz="1600" dirty="0" err="1">
-                <a:solidFill>
-                  <a:schemeClr val="bg1">
-                    <a:lumMod val="95000"/>
-                  </a:schemeClr>
-                </a:solidFill>
-              </a:rPr>
-              <a:t>Collection</a:t>
-            </a:r>
-            <a:br>
+              <a:t>    const priceData = await ctx.stub.getPrivateData(</a:t>
+            </a:r>
+          </a:p>
+          <a:p>
+            <a:pPr/>
+            <a:r>
               <a:rPr lang="es-ES" sz="1600" dirty="0">
                 <a:solidFill>
                   <a:schemeClr val="bg1">
@@ -7060,17 +5822,11 @@
                   </a:schemeClr>
                 </a:solidFill>
               </a:rPr>
-            </a:br>
-            <a:r>
-              <a:rPr lang="es-ES" sz="1600" dirty="0" err="1">
-                <a:solidFill>
-                  <a:schemeClr val="bg1">
-                    <a:lumMod val="95000"/>
-                  </a:schemeClr>
-                </a:solidFill>
-              </a:rPr>
-              <a:t>func</a:t>
-            </a:r>
+              <a:t>        'priceAgreement', propertyID);</a:t>
+            </a:r>
+          </a:p>
+          <a:p>
+            <a:pPr/>
             <a:r>
               <a:rPr lang="es-ES" sz="1600" dirty="0">
                 <a:solidFill>
@@ -7079,18 +5835,11 @@
                   </a:schemeClr>
                 </a:solidFill>
               </a:rPr>
-              <a:t> (s *</a:t>
-            </a:r>
-            <a:r>
-              <a:rPr lang="es-ES" sz="1600" dirty="0" err="1">
-                <a:solidFill>
-                  <a:schemeClr val="bg1">
-                    <a:lumMod val="95000"/>
-                  </a:schemeClr>
-                </a:solidFill>
-              </a:rPr>
-              <a:t>SmartContract</a:t>
-            </a:r>
+              <a:t/>
+            </a:r>
+          </a:p>
+          <a:p>
+            <a:pPr/>
             <a:r>
               <a:rPr lang="es-ES" sz="1600" dirty="0">
                 <a:solidFill>
@@ -7099,18 +5848,11 @@
                   </a:schemeClr>
                 </a:solidFill>
               </a:rPr>
-              <a:t>) </a:t>
-            </a:r>
-            <a:r>
-              <a:rPr lang="es-ES" sz="1600" dirty="0" err="1">
-                <a:solidFill>
-                  <a:schemeClr val="bg1">
-                    <a:lumMod val="95000"/>
-                  </a:schemeClr>
-                </a:solidFill>
-              </a:rPr>
-              <a:t>GetPrivatePrice</a:t>
-            </a:r>
+              <a:t>    if (!priceData || priceData.length === 0) {</a:t>
+            </a:r>
+          </a:p>
+          <a:p>
+            <a:pPr/>
             <a:r>
               <a:rPr lang="es-ES" sz="1600" dirty="0">
                 <a:solidFill>
@@ -7119,18 +5861,11 @@
                   </a:schemeClr>
                 </a:solidFill>
               </a:rPr>
-              <a:t>(</a:t>
-            </a:r>
-            <a:r>
-              <a:rPr lang="es-ES" sz="1600" dirty="0" err="1">
-                <a:solidFill>
-                  <a:schemeClr val="bg1">
-                    <a:lumMod val="95000"/>
-                  </a:schemeClr>
-                </a:solidFill>
-              </a:rPr>
-              <a:t>ctx</a:t>
-            </a:r>
+              <a:t>        return '';</a:t>
+            </a:r>
+          </a:p>
+          <a:p>
+            <a:pPr/>
             <a:r>
               <a:rPr lang="es-ES" sz="1600" dirty="0">
                 <a:solidFill>
@@ -7139,18 +5874,11 @@
                   </a:schemeClr>
                 </a:solidFill>
               </a:rPr>
-              <a:t> </a:t>
-            </a:r>
-            <a:r>
-              <a:rPr lang="es-ES" sz="1600" dirty="0" err="1">
-                <a:solidFill>
-                  <a:schemeClr val="bg1">
-                    <a:lumMod val="95000"/>
-                  </a:schemeClr>
-                </a:solidFill>
-              </a:rPr>
-              <a:t>contractapi.TransactionContextInterface</a:t>
-            </a:r>
+              <a:t>    }</a:t>
+            </a:r>
+          </a:p>
+          <a:p>
+            <a:pPr/>
             <a:r>
               <a:rPr lang="es-ES" sz="1600" dirty="0">
                 <a:solidFill>
@@ -7159,9 +5887,12 @@
                   </a:schemeClr>
                 </a:solidFill>
               </a:rPr>
-              <a:t>,</a:t>
-            </a:r>
-            <a:br>
+              <a:t>    return priceData.toString();</a:t>
+            </a:r>
+          </a:p>
+          <a:p>
+            <a:pPr/>
+            <a:r>
               <a:rPr lang="es-ES" sz="1600" dirty="0">
                 <a:solidFill>
                   <a:schemeClr val="bg1">
@@ -7169,500 +5900,8 @@
                   </a:schemeClr>
                 </a:solidFill>
               </a:rPr>
-            </a:br>
-            <a:r>
-              <a:rPr lang="es-ES" sz="1600" dirty="0">
-                <a:solidFill>
-                  <a:schemeClr val="bg1">
-                    <a:lumMod val="95000"/>
-                  </a:schemeClr>
-                </a:solidFill>
-              </a:rPr>
-              <a:t>    </a:t>
-            </a:r>
-            <a:r>
-              <a:rPr lang="es-ES" sz="1600" dirty="0" err="1">
-                <a:solidFill>
-                  <a:schemeClr val="bg1">
-                    <a:lumMod val="95000"/>
-                  </a:schemeClr>
-                </a:solidFill>
-              </a:rPr>
-              <a:t>propertyID</a:t>
-            </a:r>
-            <a:r>
-              <a:rPr lang="es-ES" sz="1600" dirty="0">
-                <a:solidFill>
-                  <a:schemeClr val="bg1">
-                    <a:lumMod val="95000"/>
-                  </a:schemeClr>
-                </a:solidFill>
-              </a:rPr>
-              <a:t> </a:t>
-            </a:r>
-            <a:r>
-              <a:rPr lang="es-ES" sz="1600" dirty="0" err="1">
-                <a:solidFill>
-                  <a:schemeClr val="bg1">
-                    <a:lumMod val="95000"/>
-                  </a:schemeClr>
-                </a:solidFill>
-              </a:rPr>
-              <a:t>string</a:t>
-            </a:r>
-            <a:r>
-              <a:rPr lang="es-ES" sz="1600" dirty="0">
-                <a:solidFill>
-                  <a:schemeClr val="bg1">
-                    <a:lumMod val="95000"/>
-                  </a:schemeClr>
-                </a:solidFill>
-              </a:rPr>
-              <a:t>) (</a:t>
-            </a:r>
-            <a:r>
-              <a:rPr lang="es-ES" sz="1600" dirty="0" err="1">
-                <a:solidFill>
-                  <a:schemeClr val="bg1">
-                    <a:lumMod val="95000"/>
-                  </a:schemeClr>
-                </a:solidFill>
-              </a:rPr>
-              <a:t>string</a:t>
-            </a:r>
-            <a:r>
-              <a:rPr lang="es-ES" sz="1600" dirty="0">
-                <a:solidFill>
-                  <a:schemeClr val="bg1">
-                    <a:lumMod val="95000"/>
-                  </a:schemeClr>
-                </a:solidFill>
-              </a:rPr>
-              <a:t>, error) {</a:t>
-            </a:r>
-            <a:br>
-              <a:rPr lang="es-ES" sz="1600" dirty="0">
-                <a:solidFill>
-                  <a:schemeClr val="bg1">
-                    <a:lumMod val="95000"/>
-                  </a:schemeClr>
-                </a:solidFill>
-              </a:rPr>
-            </a:br>
-            <a:br>
-              <a:rPr lang="es-ES" sz="1600" dirty="0">
-                <a:solidFill>
-                  <a:schemeClr val="bg1">
-                    <a:lumMod val="95000"/>
-                  </a:schemeClr>
-                </a:solidFill>
-              </a:rPr>
-            </a:br>
-            <a:r>
-              <a:rPr lang="es-ES" sz="1600" dirty="0">
-                <a:solidFill>
-                  <a:schemeClr val="bg1">
-                    <a:lumMod val="95000"/>
-                  </a:schemeClr>
-                </a:solidFill>
-              </a:rPr>
-              <a:t>    </a:t>
-            </a:r>
-            <a:r>
-              <a:rPr lang="es-ES" sz="1600" dirty="0" err="1">
-                <a:solidFill>
-                  <a:schemeClr val="bg1">
-                    <a:lumMod val="95000"/>
-                  </a:schemeClr>
-                </a:solidFill>
-              </a:rPr>
-              <a:t>priceData</a:t>
-            </a:r>
-            <a:r>
-              <a:rPr lang="es-ES" sz="1600" dirty="0">
-                <a:solidFill>
-                  <a:schemeClr val="bg1">
-                    <a:lumMod val="95000"/>
-                  </a:schemeClr>
-                </a:solidFill>
-              </a:rPr>
-              <a:t>, </a:t>
-            </a:r>
-            <a:r>
-              <a:rPr lang="es-ES" sz="1600" dirty="0" err="1">
-                <a:solidFill>
-                  <a:schemeClr val="bg1">
-                    <a:lumMod val="95000"/>
-                  </a:schemeClr>
-                </a:solidFill>
-              </a:rPr>
-              <a:t>err</a:t>
-            </a:r>
-            <a:r>
-              <a:rPr lang="es-ES" sz="1600" dirty="0">
-                <a:solidFill>
-                  <a:schemeClr val="bg1">
-                    <a:lumMod val="95000"/>
-                  </a:schemeClr>
-                </a:solidFill>
-              </a:rPr>
-              <a:t> := </a:t>
-            </a:r>
-            <a:r>
-              <a:rPr lang="es-ES" sz="1600" dirty="0" err="1">
-                <a:solidFill>
-                  <a:schemeClr val="bg1">
-                    <a:lumMod val="95000"/>
-                  </a:schemeClr>
-                </a:solidFill>
-              </a:rPr>
-              <a:t>ctx.GetStub</a:t>
-            </a:r>
-            <a:r>
-              <a:rPr lang="es-ES" sz="1600" dirty="0">
-                <a:solidFill>
-                  <a:schemeClr val="bg1">
-                    <a:lumMod val="95000"/>
-                  </a:schemeClr>
-                </a:solidFill>
-              </a:rPr>
-              <a:t>().</a:t>
-            </a:r>
-            <a:r>
-              <a:rPr lang="es-ES" sz="1600" dirty="0" err="1">
-                <a:solidFill>
-                  <a:schemeClr val="bg1">
-                    <a:lumMod val="95000"/>
-                  </a:schemeClr>
-                </a:solidFill>
-              </a:rPr>
-              <a:t>GetPrivateData</a:t>
-            </a:r>
-            <a:r>
-              <a:rPr lang="es-ES" sz="1600" dirty="0">
-                <a:solidFill>
-                  <a:schemeClr val="bg1">
-                    <a:lumMod val="95000"/>
-                  </a:schemeClr>
-                </a:solidFill>
-              </a:rPr>
-              <a:t>("</a:t>
-            </a:r>
-            <a:r>
-              <a:rPr lang="es-ES" sz="1600" dirty="0" err="1">
-                <a:solidFill>
-                  <a:schemeClr val="bg1">
-                    <a:lumMod val="95000"/>
-                  </a:schemeClr>
-                </a:solidFill>
-              </a:rPr>
-              <a:t>priceAgreement</a:t>
-            </a:r>
-            <a:r>
-              <a:rPr lang="es-ES" sz="1600" dirty="0">
-                <a:solidFill>
-                  <a:schemeClr val="bg1">
-                    <a:lumMod val="95000"/>
-                  </a:schemeClr>
-                </a:solidFill>
-              </a:rPr>
-              <a:t>",</a:t>
-            </a:r>
-            <a:br>
-              <a:rPr lang="es-ES" sz="1600" dirty="0">
-                <a:solidFill>
-                  <a:schemeClr val="bg1">
-                    <a:lumMod val="95000"/>
-                  </a:schemeClr>
-                </a:solidFill>
-              </a:rPr>
-            </a:br>
-            <a:r>
-              <a:rPr lang="es-ES" sz="1600" dirty="0">
-                <a:solidFill>
-                  <a:schemeClr val="bg1">
-                    <a:lumMod val="95000"/>
-                  </a:schemeClr>
-                </a:solidFill>
-              </a:rPr>
-              <a:t>        </a:t>
-            </a:r>
-            <a:r>
-              <a:rPr lang="es-ES" sz="1600" dirty="0" err="1">
-                <a:solidFill>
-                  <a:schemeClr val="bg1">
-                    <a:lumMod val="95000"/>
-                  </a:schemeClr>
-                </a:solidFill>
-              </a:rPr>
-              <a:t>propertyID</a:t>
-            </a:r>
-            <a:r>
-              <a:rPr lang="es-ES" sz="1600" dirty="0">
-                <a:solidFill>
-                  <a:schemeClr val="bg1">
-                    <a:lumMod val="95000"/>
-                  </a:schemeClr>
-                </a:solidFill>
-              </a:rPr>
-              <a:t>)</a:t>
-            </a:r>
-            <a:br>
-              <a:rPr lang="es-ES" sz="1600" dirty="0">
-                <a:solidFill>
-                  <a:schemeClr val="bg1">
-                    <a:lumMod val="95000"/>
-                  </a:schemeClr>
-                </a:solidFill>
-              </a:rPr>
-            </a:br>
-            <a:r>
-              <a:rPr lang="es-ES" sz="1600" dirty="0">
-                <a:solidFill>
-                  <a:schemeClr val="bg1">
-                    <a:lumMod val="95000"/>
-                  </a:schemeClr>
-                </a:solidFill>
-              </a:rPr>
-              <a:t>    </a:t>
-            </a:r>
-            <a:r>
-              <a:rPr lang="es-ES" sz="1600" dirty="0" err="1">
-                <a:solidFill>
-                  <a:schemeClr val="bg1">
-                    <a:lumMod val="95000"/>
-                  </a:schemeClr>
-                </a:solidFill>
-              </a:rPr>
-              <a:t>if</a:t>
-            </a:r>
-            <a:r>
-              <a:rPr lang="es-ES" sz="1600" dirty="0">
-                <a:solidFill>
-                  <a:schemeClr val="bg1">
-                    <a:lumMod val="95000"/>
-                  </a:schemeClr>
-                </a:solidFill>
-              </a:rPr>
-              <a:t> </a:t>
-            </a:r>
-            <a:r>
-              <a:rPr lang="es-ES" sz="1600" dirty="0" err="1">
-                <a:solidFill>
-                  <a:schemeClr val="bg1">
-                    <a:lumMod val="95000"/>
-                  </a:schemeClr>
-                </a:solidFill>
-              </a:rPr>
-              <a:t>err</a:t>
-            </a:r>
-            <a:r>
-              <a:rPr lang="es-ES" sz="1600" dirty="0">
-                <a:solidFill>
-                  <a:schemeClr val="bg1">
-                    <a:lumMod val="95000"/>
-                  </a:schemeClr>
-                </a:solidFill>
-              </a:rPr>
-              <a:t> != </a:t>
-            </a:r>
-            <a:r>
-              <a:rPr lang="es-ES" sz="1600" dirty="0" err="1">
-                <a:solidFill>
-                  <a:schemeClr val="bg1">
-                    <a:lumMod val="95000"/>
-                  </a:schemeClr>
-                </a:solidFill>
-              </a:rPr>
-              <a:t>nil</a:t>
-            </a:r>
-            <a:r>
-              <a:rPr lang="es-ES" sz="1600" dirty="0">
-                <a:solidFill>
-                  <a:schemeClr val="bg1">
-                    <a:lumMod val="95000"/>
-                  </a:schemeClr>
-                </a:solidFill>
-              </a:rPr>
-              <a:t> {</a:t>
-            </a:r>
-            <a:br>
-              <a:rPr lang="es-ES" sz="1600" dirty="0">
-                <a:solidFill>
-                  <a:schemeClr val="bg1">
-                    <a:lumMod val="95000"/>
-                  </a:schemeClr>
-                </a:solidFill>
-              </a:rPr>
-            </a:br>
-            <a:r>
-              <a:rPr lang="es-ES" sz="1600" dirty="0">
-                <a:solidFill>
-                  <a:schemeClr val="bg1">
-                    <a:lumMod val="95000"/>
-                  </a:schemeClr>
-                </a:solidFill>
-              </a:rPr>
-              <a:t>        </a:t>
-            </a:r>
-            <a:r>
-              <a:rPr lang="es-ES" sz="1600" dirty="0" err="1">
-                <a:solidFill>
-                  <a:schemeClr val="bg1">
-                    <a:lumMod val="95000"/>
-                  </a:schemeClr>
-                </a:solidFill>
-              </a:rPr>
-              <a:t>return</a:t>
-            </a:r>
-            <a:r>
-              <a:rPr lang="es-ES" sz="1600" dirty="0">
-                <a:solidFill>
-                  <a:schemeClr val="bg1">
-                    <a:lumMod val="95000"/>
-                  </a:schemeClr>
-                </a:solidFill>
-              </a:rPr>
-              <a:t> "", </a:t>
-            </a:r>
-            <a:r>
-              <a:rPr lang="es-ES" sz="1600" dirty="0" err="1">
-                <a:solidFill>
-                  <a:schemeClr val="bg1">
-                    <a:lumMod val="95000"/>
-                  </a:schemeClr>
-                </a:solidFill>
-              </a:rPr>
-              <a:t>err</a:t>
-            </a:r>
-            <a:br>
-              <a:rPr lang="es-ES" sz="1600" dirty="0">
-                <a:solidFill>
-                  <a:schemeClr val="bg1">
-                    <a:lumMod val="95000"/>
-                  </a:schemeClr>
-                </a:solidFill>
-              </a:rPr>
-            </a:br>
-            <a:r>
-              <a:rPr lang="es-ES" sz="1600" dirty="0">
-                <a:solidFill>
-                  <a:schemeClr val="bg1">
-                    <a:lumMod val="95000"/>
-                  </a:schemeClr>
-                </a:solidFill>
-              </a:rPr>
-              <a:t>    }</a:t>
-            </a:r>
-            <a:br>
-              <a:rPr lang="es-ES" sz="1600" dirty="0">
-                <a:solidFill>
-                  <a:schemeClr val="bg1">
-                    <a:lumMod val="95000"/>
-                  </a:schemeClr>
-                </a:solidFill>
-              </a:rPr>
-            </a:br>
-            <a:r>
-              <a:rPr lang="es-ES" sz="1600" dirty="0">
-                <a:solidFill>
-                  <a:schemeClr val="bg1">
-                    <a:lumMod val="95000"/>
-                  </a:schemeClr>
-                </a:solidFill>
-              </a:rPr>
-              <a:t>    </a:t>
-            </a:r>
-            <a:r>
-              <a:rPr lang="es-ES" sz="1600" dirty="0" err="1">
-                <a:solidFill>
-                  <a:schemeClr val="bg1">
-                    <a:lumMod val="95000"/>
-                  </a:schemeClr>
-                </a:solidFill>
-              </a:rPr>
-              <a:t>return</a:t>
-            </a:r>
-            <a:r>
-              <a:rPr lang="es-ES" sz="1600" dirty="0">
-                <a:solidFill>
-                  <a:schemeClr val="bg1">
-                    <a:lumMod val="95000"/>
-                  </a:schemeClr>
-                </a:solidFill>
-              </a:rPr>
-              <a:t> </a:t>
-            </a:r>
-            <a:r>
-              <a:rPr lang="es-ES" sz="1600" dirty="0" err="1">
-                <a:solidFill>
-                  <a:schemeClr val="bg1">
-                    <a:lumMod val="95000"/>
-                  </a:schemeClr>
-                </a:solidFill>
-              </a:rPr>
-              <a:t>string</a:t>
-            </a:r>
-            <a:r>
-              <a:rPr lang="es-ES" sz="1600" dirty="0">
-                <a:solidFill>
-                  <a:schemeClr val="bg1">
-                    <a:lumMod val="95000"/>
-                  </a:schemeClr>
-                </a:solidFill>
-              </a:rPr>
-              <a:t>(</a:t>
-            </a:r>
-            <a:r>
-              <a:rPr lang="es-ES" sz="1600" dirty="0" err="1">
-                <a:solidFill>
-                  <a:schemeClr val="bg1">
-                    <a:lumMod val="95000"/>
-                  </a:schemeClr>
-                </a:solidFill>
-              </a:rPr>
-              <a:t>priceData</a:t>
-            </a:r>
-            <a:r>
-              <a:rPr lang="es-ES" sz="1600" dirty="0">
-                <a:solidFill>
-                  <a:schemeClr val="bg1">
-                    <a:lumMod val="95000"/>
-                  </a:schemeClr>
-                </a:solidFill>
-              </a:rPr>
-              <a:t>), </a:t>
-            </a:r>
-            <a:r>
-              <a:rPr lang="es-ES" sz="1600" dirty="0" err="1">
-                <a:solidFill>
-                  <a:schemeClr val="bg1">
-                    <a:lumMod val="95000"/>
-                  </a:schemeClr>
-                </a:solidFill>
-              </a:rPr>
-              <a:t>nil</a:t>
-            </a:r>
-            <a:br>
-              <a:rPr lang="es-ES" sz="1600" dirty="0">
-                <a:solidFill>
-                  <a:schemeClr val="bg1">
-                    <a:lumMod val="95000"/>
-                  </a:schemeClr>
-                </a:solidFill>
-              </a:rPr>
-            </a:br>
-            <a:r>
-              <a:rPr lang="es-ES" sz="1600" dirty="0">
-                <a:solidFill>
-                  <a:schemeClr val="bg1">
-                    <a:lumMod val="95000"/>
-                  </a:schemeClr>
-                </a:solidFill>
-              </a:rPr>
               <a:t>}</a:t>
             </a:r>
-            <a:endParaRPr lang="es-ES" sz="1600" dirty="0"/>
           </a:p>
         </p:txBody>
       </p:sp>
@@ -8168,7 +6407,7 @@
               </a:defRPr>
             </a:pPr>
             <a:r>
-              <a:t>GO</a:t>
+              <a:t>NODE.JS</a:t>
             </a:r>
           </a:p>
         </p:txBody>
@@ -8237,6 +6476,7 @@
           <a:bodyPr wrap="square"/>
           <a:lstStyle/>
           <a:p>
+            <a:pPr/>
             <a:r>
               <a:rPr sz="1600" dirty="0">
                 <a:solidFill>
@@ -8245,18 +6485,11 @@
                   </a:schemeClr>
                 </a:solidFill>
               </a:rPr>
-              <a:t>// En </a:t>
-            </a:r>
-            <a:r>
-              <a:rPr sz="1600" dirty="0" err="1">
-                <a:solidFill>
-                  <a:schemeClr val="bg1">
-                    <a:lumMod val="95000"/>
-                  </a:schemeClr>
-                </a:solidFill>
-              </a:rPr>
-              <a:t>el</a:t>
-            </a:r>
+              <a:t>// En el chaincode: emitir evento al transferir</a:t>
+            </a:r>
+          </a:p>
+          <a:p>
+            <a:pPr/>
             <a:r>
               <a:rPr sz="1600" dirty="0">
                 <a:solidFill>
@@ -8265,18 +6498,11 @@
                   </a:schemeClr>
                 </a:solidFill>
               </a:rPr>
-              <a:t> </a:t>
-            </a:r>
-            <a:r>
-              <a:rPr sz="1600" dirty="0" err="1">
-                <a:solidFill>
-                  <a:schemeClr val="bg1">
-                    <a:lumMod val="95000"/>
-                  </a:schemeClr>
-                </a:solidFill>
-              </a:rPr>
-              <a:t>chaincode</a:t>
-            </a:r>
+              <a:t>// (en JS no hay struct, se construye el objeto directamente)</a:t>
+            </a:r>
+          </a:p>
+          <a:p>
+            <a:pPr/>
             <a:r>
               <a:rPr sz="1600" dirty="0">
                 <a:solidFill>
@@ -8285,18 +6511,11 @@
                   </a:schemeClr>
                 </a:solidFill>
               </a:rPr>
-              <a:t>: </a:t>
-            </a:r>
-            <a:r>
-              <a:rPr sz="1600" dirty="0" err="1">
-                <a:solidFill>
-                  <a:schemeClr val="bg1">
-                    <a:lumMod val="95000"/>
-                  </a:schemeClr>
-                </a:solidFill>
-              </a:rPr>
-              <a:t>emitir</a:t>
-            </a:r>
+              <a:t/>
+            </a:r>
+          </a:p>
+          <a:p>
+            <a:pPr/>
             <a:r>
               <a:rPr sz="1600" dirty="0">
                 <a:solidFill>
@@ -8305,18 +6524,11 @@
                   </a:schemeClr>
                 </a:solidFill>
               </a:rPr>
-              <a:t> </a:t>
-            </a:r>
-            <a:r>
-              <a:rPr sz="1600" dirty="0" err="1">
-                <a:solidFill>
-                  <a:schemeClr val="bg1">
-                    <a:lumMod val="95000"/>
-                  </a:schemeClr>
-                </a:solidFill>
-              </a:rPr>
-              <a:t>evento</a:t>
-            </a:r>
+              <a:t>async TransferProperty(ctx, id, newOwner) {</a:t>
+            </a:r>
+          </a:p>
+          <a:p>
+            <a:pPr/>
             <a:r>
               <a:rPr sz="1600" dirty="0">
                 <a:solidFill>
@@ -8325,19 +6537,12 @@
                   </a:schemeClr>
                 </a:solidFill>
               </a:rPr>
-              <a:t> al </a:t>
-            </a:r>
-            <a:r>
-              <a:rPr sz="1600" dirty="0" err="1">
-                <a:solidFill>
-                  <a:schemeClr val="bg1">
-                    <a:lumMod val="95000"/>
-                  </a:schemeClr>
-                </a:solidFill>
-              </a:rPr>
-              <a:t>transferir</a:t>
-            </a:r>
-            <a:br>
+              <a:t>    // ... logica de transferencia ...</a:t>
+            </a:r>
+          </a:p>
+          <a:p>
+            <a:pPr/>
+            <a:r>
               <a:rPr sz="1600" dirty="0">
                 <a:solidFill>
                   <a:schemeClr val="bg1">
@@ -8345,7 +6550,11 @@
                   </a:schemeClr>
                 </a:solidFill>
               </a:rPr>
-            </a:br>
+              <a:t/>
+            </a:r>
+          </a:p>
+          <a:p>
+            <a:pPr/>
             <a:r>
               <a:rPr sz="1600" dirty="0">
                 <a:solidFill>
@@ -8354,18 +6563,11 @@
                   </a:schemeClr>
                 </a:solidFill>
               </a:rPr>
-              <a:t>type </a:t>
-            </a:r>
-            <a:r>
-              <a:rPr sz="1600" dirty="0" err="1">
-                <a:solidFill>
-                  <a:schemeClr val="bg1">
-                    <a:lumMod val="95000"/>
-                  </a:schemeClr>
-                </a:solidFill>
-              </a:rPr>
-              <a:t>TransferEvent</a:t>
-            </a:r>
+              <a:t>    const event = {</a:t>
+            </a:r>
+          </a:p>
+          <a:p>
+            <a:pPr/>
             <a:r>
               <a:rPr sz="1600" dirty="0">
                 <a:solidFill>
@@ -8374,9 +6576,12 @@
                   </a:schemeClr>
                 </a:solidFill>
               </a:rPr>
-              <a:t> struct {</a:t>
-            </a:r>
-            <a:br>
+              <a:t>        propertyID: id,</a:t>
+            </a:r>
+          </a:p>
+          <a:p>
+            <a:pPr/>
+            <a:r>
               <a:rPr sz="1600" dirty="0">
                 <a:solidFill>
                   <a:schemeClr val="bg1">
@@ -8384,7 +6589,11 @@
                   </a:schemeClr>
                 </a:solidFill>
               </a:rPr>
-            </a:br>
+              <a:t>        from: property.owner,</a:t>
+            </a:r>
+          </a:p>
+          <a:p>
+            <a:pPr/>
             <a:r>
               <a:rPr sz="1600" dirty="0">
                 <a:solidFill>
@@ -8393,18 +6602,11 @@
                   </a:schemeClr>
                 </a:solidFill>
               </a:rPr>
-              <a:t>    </a:t>
-            </a:r>
-            <a:r>
-              <a:rPr sz="1600" dirty="0" err="1">
-                <a:solidFill>
-                  <a:schemeClr val="bg1">
-                    <a:lumMod val="95000"/>
-                  </a:schemeClr>
-                </a:solidFill>
-              </a:rPr>
-              <a:t>PropertyID</a:t>
-            </a:r>
+              <a:t>        to: newOwner,</a:t>
+            </a:r>
+          </a:p>
+          <a:p>
+            <a:pPr/>
             <a:r>
               <a:rPr sz="1600" dirty="0">
                 <a:solidFill>
@@ -8413,18 +6615,11 @@
                   </a:schemeClr>
                 </a:solidFill>
               </a:rPr>
-              <a:t> string `</a:t>
-            </a:r>
-            <a:r>
-              <a:rPr sz="1600" dirty="0" err="1">
-                <a:solidFill>
-                  <a:schemeClr val="bg1">
-                    <a:lumMod val="95000"/>
-                  </a:schemeClr>
-                </a:solidFill>
-              </a:rPr>
-              <a:t>json</a:t>
-            </a:r>
+              <a:t>        timestamp: new Date().toISOString()</a:t>
+            </a:r>
+          </a:p>
+          <a:p>
+            <a:pPr/>
             <a:r>
               <a:rPr sz="1600" dirty="0">
                 <a:solidFill>
@@ -8433,563 +6628,7 @@
                   </a:schemeClr>
                 </a:solidFill>
               </a:rPr>
-              <a:t>:"</a:t>
-            </a:r>
-            <a:r>
-              <a:rPr sz="1600" dirty="0" err="1">
-                <a:solidFill>
-                  <a:schemeClr val="bg1">
-                    <a:lumMod val="95000"/>
-                  </a:schemeClr>
-                </a:solidFill>
-              </a:rPr>
-              <a:t>propertyID</a:t>
-            </a:r>
-            <a:r>
-              <a:rPr sz="1600" dirty="0">
-                <a:solidFill>
-                  <a:schemeClr val="bg1">
-                    <a:lumMod val="95000"/>
-                  </a:schemeClr>
-                </a:solidFill>
-              </a:rPr>
-              <a:t>"`</a:t>
-            </a:r>
-            <a:br>
-              <a:rPr sz="1600" dirty="0">
-                <a:solidFill>
-                  <a:schemeClr val="bg1">
-                    <a:lumMod val="95000"/>
-                  </a:schemeClr>
-                </a:solidFill>
-              </a:rPr>
-            </a:br>
-            <a:r>
-              <a:rPr sz="1600" dirty="0">
-                <a:solidFill>
-                  <a:schemeClr val="bg1">
-                    <a:lumMod val="95000"/>
-                  </a:schemeClr>
-                </a:solidFill>
-              </a:rPr>
-              <a:t>    From       string `</a:t>
-            </a:r>
-            <a:r>
-              <a:rPr sz="1600" dirty="0" err="1">
-                <a:solidFill>
-                  <a:schemeClr val="bg1">
-                    <a:lumMod val="95000"/>
-                  </a:schemeClr>
-                </a:solidFill>
-              </a:rPr>
-              <a:t>json</a:t>
-            </a:r>
-            <a:r>
-              <a:rPr sz="1600" dirty="0">
-                <a:solidFill>
-                  <a:schemeClr val="bg1">
-                    <a:lumMod val="95000"/>
-                  </a:schemeClr>
-                </a:solidFill>
-              </a:rPr>
-              <a:t>:"from"`</a:t>
-            </a:r>
-            <a:br>
-              <a:rPr sz="1600" dirty="0">
-                <a:solidFill>
-                  <a:schemeClr val="bg1">
-                    <a:lumMod val="95000"/>
-                  </a:schemeClr>
-                </a:solidFill>
-              </a:rPr>
-            </a:br>
-            <a:r>
-              <a:rPr sz="1600" dirty="0">
-                <a:solidFill>
-                  <a:schemeClr val="bg1">
-                    <a:lumMod val="95000"/>
-                  </a:schemeClr>
-                </a:solidFill>
-              </a:rPr>
-              <a:t>    To         string `</a:t>
-            </a:r>
-            <a:r>
-              <a:rPr sz="1600" dirty="0" err="1">
-                <a:solidFill>
-                  <a:schemeClr val="bg1">
-                    <a:lumMod val="95000"/>
-                  </a:schemeClr>
-                </a:solidFill>
-              </a:rPr>
-              <a:t>json</a:t>
-            </a:r>
-            <a:r>
-              <a:rPr sz="1600" dirty="0">
-                <a:solidFill>
-                  <a:schemeClr val="bg1">
-                    <a:lumMod val="95000"/>
-                  </a:schemeClr>
-                </a:solidFill>
-              </a:rPr>
-              <a:t>:"to"`</a:t>
-            </a:r>
-            <a:br>
-              <a:rPr sz="1600" dirty="0">
-                <a:solidFill>
-                  <a:schemeClr val="bg1">
-                    <a:lumMod val="95000"/>
-                  </a:schemeClr>
-                </a:solidFill>
-              </a:rPr>
-            </a:br>
-            <a:r>
-              <a:rPr sz="1600" dirty="0">
-                <a:solidFill>
-                  <a:schemeClr val="bg1">
-                    <a:lumMod val="95000"/>
-                  </a:schemeClr>
-                </a:solidFill>
-              </a:rPr>
-              <a:t>    Timestamp  string `</a:t>
-            </a:r>
-            <a:r>
-              <a:rPr sz="1600" dirty="0" err="1">
-                <a:solidFill>
-                  <a:schemeClr val="bg1">
-                    <a:lumMod val="95000"/>
-                  </a:schemeClr>
-                </a:solidFill>
-              </a:rPr>
-              <a:t>json</a:t>
-            </a:r>
-            <a:r>
-              <a:rPr sz="1600" dirty="0">
-                <a:solidFill>
-                  <a:schemeClr val="bg1">
-                    <a:lumMod val="95000"/>
-                  </a:schemeClr>
-                </a:solidFill>
-              </a:rPr>
-              <a:t>:"timestamp"`</a:t>
-            </a:r>
-            <a:br>
-              <a:rPr sz="1600" dirty="0">
-                <a:solidFill>
-                  <a:schemeClr val="bg1">
-                    <a:lumMod val="95000"/>
-                  </a:schemeClr>
-                </a:solidFill>
-              </a:rPr>
-            </a:br>
-            <a:r>
-              <a:rPr sz="1600" dirty="0">
-                <a:solidFill>
-                  <a:schemeClr val="bg1">
-                    <a:lumMod val="95000"/>
-                  </a:schemeClr>
-                </a:solidFill>
-              </a:rPr>
-              <a:t>}</a:t>
-            </a:r>
-            <a:br>
-              <a:rPr sz="1600" dirty="0">
-                <a:solidFill>
-                  <a:schemeClr val="bg1">
-                    <a:lumMod val="95000"/>
-                  </a:schemeClr>
-                </a:solidFill>
-              </a:rPr>
-            </a:br>
-            <a:br>
-              <a:rPr sz="1600" dirty="0">
-                <a:solidFill>
-                  <a:schemeClr val="bg1">
-                    <a:lumMod val="95000"/>
-                  </a:schemeClr>
-                </a:solidFill>
-              </a:rPr>
-            </a:br>
-            <a:r>
-              <a:rPr sz="1600" dirty="0" err="1">
-                <a:solidFill>
-                  <a:schemeClr val="bg1">
-                    <a:lumMod val="95000"/>
-                  </a:schemeClr>
-                </a:solidFill>
-              </a:rPr>
-              <a:t>func</a:t>
-            </a:r>
-            <a:r>
-              <a:rPr sz="1600" dirty="0">
-                <a:solidFill>
-                  <a:schemeClr val="bg1">
-                    <a:lumMod val="95000"/>
-                  </a:schemeClr>
-                </a:solidFill>
-              </a:rPr>
-              <a:t> (s *</a:t>
-            </a:r>
-            <a:r>
-              <a:rPr sz="1600" dirty="0" err="1">
-                <a:solidFill>
-                  <a:schemeClr val="bg1">
-                    <a:lumMod val="95000"/>
-                  </a:schemeClr>
-                </a:solidFill>
-              </a:rPr>
-              <a:t>SmartContract</a:t>
-            </a:r>
-            <a:r>
-              <a:rPr sz="1600" dirty="0">
-                <a:solidFill>
-                  <a:schemeClr val="bg1">
-                    <a:lumMod val="95000"/>
-                  </a:schemeClr>
-                </a:solidFill>
-              </a:rPr>
-              <a:t>) </a:t>
-            </a:r>
-            <a:r>
-              <a:rPr sz="1600" dirty="0" err="1">
-                <a:solidFill>
-                  <a:schemeClr val="bg1">
-                    <a:lumMod val="95000"/>
-                  </a:schemeClr>
-                </a:solidFill>
-              </a:rPr>
-              <a:t>TransferProperty</a:t>
-            </a:r>
-            <a:r>
-              <a:rPr sz="1600" dirty="0">
-                <a:solidFill>
-                  <a:schemeClr val="bg1">
-                    <a:lumMod val="95000"/>
-                  </a:schemeClr>
-                </a:solidFill>
-              </a:rPr>
-              <a:t>(</a:t>
-            </a:r>
-            <a:r>
-              <a:rPr sz="1600" dirty="0" err="1">
-                <a:solidFill>
-                  <a:schemeClr val="bg1">
-                    <a:lumMod val="95000"/>
-                  </a:schemeClr>
-                </a:solidFill>
-              </a:rPr>
-              <a:t>ctx</a:t>
-            </a:r>
-            <a:r>
-              <a:rPr sz="1600" dirty="0">
-                <a:solidFill>
-                  <a:schemeClr val="bg1">
-                    <a:lumMod val="95000"/>
-                  </a:schemeClr>
-                </a:solidFill>
-              </a:rPr>
-              <a:t> </a:t>
-            </a:r>
-            <a:r>
-              <a:rPr sz="1600" dirty="0" err="1">
-                <a:solidFill>
-                  <a:schemeClr val="bg1">
-                    <a:lumMod val="95000"/>
-                  </a:schemeClr>
-                </a:solidFill>
-              </a:rPr>
-              <a:t>contractapi.TransactionContextInterface</a:t>
-            </a:r>
-            <a:r>
-              <a:rPr sz="1600" dirty="0">
-                <a:solidFill>
-                  <a:schemeClr val="bg1">
-                    <a:lumMod val="95000"/>
-                  </a:schemeClr>
-                </a:solidFill>
-              </a:rPr>
-              <a:t>,</a:t>
-            </a:r>
-            <a:br>
-              <a:rPr sz="1600" dirty="0">
-                <a:solidFill>
-                  <a:schemeClr val="bg1">
-                    <a:lumMod val="95000"/>
-                  </a:schemeClr>
-                </a:solidFill>
-              </a:rPr>
-            </a:br>
-            <a:r>
-              <a:rPr sz="1600" dirty="0">
-                <a:solidFill>
-                  <a:schemeClr val="bg1">
-                    <a:lumMod val="95000"/>
-                  </a:schemeClr>
-                </a:solidFill>
-              </a:rPr>
-              <a:t>    id string, </a:t>
-            </a:r>
-            <a:r>
-              <a:rPr sz="1600" dirty="0" err="1">
-                <a:solidFill>
-                  <a:schemeClr val="bg1">
-                    <a:lumMod val="95000"/>
-                  </a:schemeClr>
-                </a:solidFill>
-              </a:rPr>
-              <a:t>newOwner</a:t>
-            </a:r>
-            <a:r>
-              <a:rPr sz="1600" dirty="0">
-                <a:solidFill>
-                  <a:schemeClr val="bg1">
-                    <a:lumMod val="95000"/>
-                  </a:schemeClr>
-                </a:solidFill>
-              </a:rPr>
-              <a:t> string) error {</a:t>
-            </a:r>
-            <a:br>
-              <a:rPr sz="1600" dirty="0">
-                <a:solidFill>
-                  <a:schemeClr val="bg1">
-                    <a:lumMod val="95000"/>
-                  </a:schemeClr>
-                </a:solidFill>
-              </a:rPr>
-            </a:br>
-            <a:r>
-              <a:rPr sz="1600" dirty="0">
-                <a:solidFill>
-                  <a:schemeClr val="bg1">
-                    <a:lumMod val="95000"/>
-                  </a:schemeClr>
-                </a:solidFill>
-              </a:rPr>
-              <a:t>    // ... </a:t>
-            </a:r>
-            <a:r>
-              <a:rPr sz="1600" dirty="0" err="1">
-                <a:solidFill>
-                  <a:schemeClr val="bg1">
-                    <a:lumMod val="95000"/>
-                  </a:schemeClr>
-                </a:solidFill>
-              </a:rPr>
-              <a:t>logica</a:t>
-            </a:r>
-            <a:r>
-              <a:rPr sz="1600" dirty="0">
-                <a:solidFill>
-                  <a:schemeClr val="bg1">
-                    <a:lumMod val="95000"/>
-                  </a:schemeClr>
-                </a:solidFill>
-              </a:rPr>
-              <a:t> de </a:t>
-            </a:r>
-            <a:r>
-              <a:rPr sz="1600" dirty="0" err="1">
-                <a:solidFill>
-                  <a:schemeClr val="bg1">
-                    <a:lumMod val="95000"/>
-                  </a:schemeClr>
-                </a:solidFill>
-              </a:rPr>
-              <a:t>transferencia</a:t>
-            </a:r>
-            <a:r>
-              <a:rPr sz="1600" dirty="0">
-                <a:solidFill>
-                  <a:schemeClr val="bg1">
-                    <a:lumMod val="95000"/>
-                  </a:schemeClr>
-                </a:solidFill>
-              </a:rPr>
-              <a:t> ...</a:t>
-            </a:r>
-            <a:br>
-              <a:rPr sz="1600" dirty="0">
-                <a:solidFill>
-                  <a:schemeClr val="bg1">
-                    <a:lumMod val="95000"/>
-                  </a:schemeClr>
-                </a:solidFill>
-              </a:rPr>
-            </a:br>
-            <a:br>
-              <a:rPr sz="1600" dirty="0">
-                <a:solidFill>
-                  <a:schemeClr val="bg1">
-                    <a:lumMod val="95000"/>
-                  </a:schemeClr>
-                </a:solidFill>
-              </a:rPr>
-            </a:br>
-            <a:r>
-              <a:rPr sz="1600" dirty="0">
-                <a:solidFill>
-                  <a:schemeClr val="bg1">
-                    <a:lumMod val="95000"/>
-                  </a:schemeClr>
-                </a:solidFill>
-              </a:rPr>
-              <a:t>    event := </a:t>
-            </a:r>
-            <a:r>
-              <a:rPr sz="1600" dirty="0" err="1">
-                <a:solidFill>
-                  <a:schemeClr val="bg1">
-                    <a:lumMod val="95000"/>
-                  </a:schemeClr>
-                </a:solidFill>
-              </a:rPr>
-              <a:t>TransferEvent</a:t>
-            </a:r>
-            <a:r>
-              <a:rPr sz="1600" dirty="0">
-                <a:solidFill>
-                  <a:schemeClr val="bg1">
-                    <a:lumMod val="95000"/>
-                  </a:schemeClr>
-                </a:solidFill>
-              </a:rPr>
-              <a:t>{</a:t>
-            </a:r>
-            <a:br>
-              <a:rPr sz="1600" dirty="0">
-                <a:solidFill>
-                  <a:schemeClr val="bg1">
-                    <a:lumMod val="95000"/>
-                  </a:schemeClr>
-                </a:solidFill>
-              </a:rPr>
-            </a:br>
-            <a:r>
-              <a:rPr sz="1600" dirty="0">
-                <a:solidFill>
-                  <a:schemeClr val="bg1">
-                    <a:lumMod val="95000"/>
-                  </a:schemeClr>
-                </a:solidFill>
-              </a:rPr>
-              <a:t>        </a:t>
-            </a:r>
-            <a:r>
-              <a:rPr sz="1600" dirty="0" err="1">
-                <a:solidFill>
-                  <a:schemeClr val="bg1">
-                    <a:lumMod val="95000"/>
-                  </a:schemeClr>
-                </a:solidFill>
-              </a:rPr>
-              <a:t>PropertyID</a:t>
-            </a:r>
-            <a:r>
-              <a:rPr sz="1600" dirty="0">
-                <a:solidFill>
-                  <a:schemeClr val="bg1">
-                    <a:lumMod val="95000"/>
-                  </a:schemeClr>
-                </a:solidFill>
-              </a:rPr>
-              <a:t>: id,</a:t>
-            </a:r>
-            <a:br>
-              <a:rPr sz="1600" dirty="0">
-                <a:solidFill>
-                  <a:schemeClr val="bg1">
-                    <a:lumMod val="95000"/>
-                  </a:schemeClr>
-                </a:solidFill>
-              </a:rPr>
-            </a:br>
-            <a:r>
-              <a:rPr sz="1600" dirty="0">
-                <a:solidFill>
-                  <a:schemeClr val="bg1">
-                    <a:lumMod val="95000"/>
-                  </a:schemeClr>
-                </a:solidFill>
-              </a:rPr>
-              <a:t>        From:       </a:t>
-            </a:r>
-            <a:r>
-              <a:rPr sz="1600" dirty="0" err="1">
-                <a:solidFill>
-                  <a:schemeClr val="bg1">
-                    <a:lumMod val="95000"/>
-                  </a:schemeClr>
-                </a:solidFill>
-              </a:rPr>
-              <a:t>property.Owner</a:t>
-            </a:r>
-            <a:r>
-              <a:rPr sz="1600" dirty="0">
-                <a:solidFill>
-                  <a:schemeClr val="bg1">
-                    <a:lumMod val="95000"/>
-                  </a:schemeClr>
-                </a:solidFill>
-              </a:rPr>
-              <a:t>,</a:t>
-            </a:r>
-            <a:br>
-              <a:rPr sz="1600" dirty="0">
-                <a:solidFill>
-                  <a:schemeClr val="bg1">
-                    <a:lumMod val="95000"/>
-                  </a:schemeClr>
-                </a:solidFill>
-              </a:rPr>
-            </a:br>
-            <a:r>
-              <a:rPr sz="1600" dirty="0">
-                <a:solidFill>
-                  <a:schemeClr val="bg1">
-                    <a:lumMod val="95000"/>
-                  </a:schemeClr>
-                </a:solidFill>
-              </a:rPr>
-              <a:t>        To:         </a:t>
-            </a:r>
-            <a:r>
-              <a:rPr sz="1600" dirty="0" err="1">
-                <a:solidFill>
-                  <a:schemeClr val="bg1">
-                    <a:lumMod val="95000"/>
-                  </a:schemeClr>
-                </a:solidFill>
-              </a:rPr>
-              <a:t>newOwner</a:t>
-            </a:r>
-            <a:r>
-              <a:rPr sz="1600" dirty="0">
-                <a:solidFill>
-                  <a:schemeClr val="bg1">
-                    <a:lumMod val="95000"/>
-                  </a:schemeClr>
-                </a:solidFill>
-              </a:rPr>
-              <a:t>,</a:t>
-            </a:r>
-            <a:br>
-              <a:rPr sz="1600" dirty="0">
-                <a:solidFill>
-                  <a:schemeClr val="bg1">
-                    <a:lumMod val="95000"/>
-                  </a:schemeClr>
-                </a:solidFill>
-              </a:rPr>
-            </a:br>
-            <a:r>
-              <a:rPr sz="1600" dirty="0">
-                <a:solidFill>
-                  <a:schemeClr val="bg1">
-                    <a:lumMod val="95000"/>
-                  </a:schemeClr>
-                </a:solidFill>
-              </a:rPr>
-              <a:t>    } (listener);</a:t>
+              <a:t>    };</a:t>
             </a:r>
           </a:p>
         </p:txBody>
@@ -9022,7 +6661,8 @@
           </a:bodyPr>
           <a:lstStyle/>
           <a:p>
-            <a:br>
+            <a:pPr/>
+            <a:r>
               <a:rPr lang="es-ES" sz="1600" dirty="0">
                 <a:solidFill>
                   <a:schemeClr val="bg1">
@@ -9030,7 +6670,11 @@
                   </a:schemeClr>
                 </a:solidFill>
               </a:rPr>
-            </a:br>
+              <a:t>    const eventJSON = Buffer.from(JSON.stringify(event));</a:t>
+            </a:r>
+          </a:p>
+          <a:p>
+            <a:pPr/>
             <a:r>
               <a:rPr lang="es-ES" sz="1600" dirty="0">
                 <a:solidFill>
@@ -9039,18 +6683,11 @@
                   </a:schemeClr>
                 </a:solidFill>
               </a:rPr>
-              <a:t>    </a:t>
-            </a:r>
-            <a:r>
-              <a:rPr lang="es-ES" sz="1600" dirty="0" err="1">
-                <a:solidFill>
-                  <a:schemeClr val="bg1">
-                    <a:lumMod val="95000"/>
-                  </a:schemeClr>
-                </a:solidFill>
-              </a:rPr>
-              <a:t>eventJSON</a:t>
-            </a:r>
+              <a:t>    ctx.stub.setEvent('PropertyTransferred', eventJSON);</a:t>
+            </a:r>
+          </a:p>
+          <a:p>
+            <a:pPr/>
             <a:r>
               <a:rPr lang="es-ES" sz="1600" dirty="0">
                 <a:solidFill>
@@ -9059,18 +6696,11 @@
                   </a:schemeClr>
                 </a:solidFill>
               </a:rPr>
-              <a:t>, _ := </a:t>
-            </a:r>
-            <a:r>
-              <a:rPr lang="es-ES" sz="1600" dirty="0" err="1">
-                <a:solidFill>
-                  <a:schemeClr val="bg1">
-                    <a:lumMod val="95000"/>
-                  </a:schemeClr>
-                </a:solidFill>
-              </a:rPr>
-              <a:t>json.Marshal</a:t>
-            </a:r>
+              <a:t>}</a:t>
+            </a:r>
+          </a:p>
+          <a:p>
+            <a:pPr/>
             <a:r>
               <a:rPr lang="es-ES" sz="1600" dirty="0">
                 <a:solidFill>
@@ -9079,18 +6709,11 @@
                   </a:schemeClr>
                 </a:solidFill>
               </a:rPr>
-              <a:t>(</a:t>
-            </a:r>
-            <a:r>
-              <a:rPr lang="es-ES" sz="1600" dirty="0" err="1">
-                <a:solidFill>
-                  <a:schemeClr val="bg1">
-                    <a:lumMod val="95000"/>
-                  </a:schemeClr>
-                </a:solidFill>
-              </a:rPr>
-              <a:t>event</a:t>
-            </a:r>
+              <a:t/>
+            </a:r>
+          </a:p>
+          <a:p>
+            <a:pPr/>
             <a:r>
               <a:rPr lang="es-ES" sz="1600" dirty="0">
                 <a:solidFill>
@@ -9099,9 +6722,12 @@
                   </a:schemeClr>
                 </a:solidFill>
               </a:rPr>
-              <a:t>)</a:t>
-            </a:r>
-            <a:br>
+              <a:t>// En el cliente Node.js: escuchar eventos</a:t>
+            </a:r>
+          </a:p>
+          <a:p>
+            <a:pPr/>
+            <a:r>
               <a:rPr lang="es-ES" sz="1600" dirty="0">
                 <a:solidFill>
                   <a:schemeClr val="bg1">
@@ -9109,7 +6735,11 @@
                   </a:schemeClr>
                 </a:solidFill>
               </a:rPr>
-            </a:br>
+              <a:t>// const listener = async (event) =&gt; {</a:t>
+            </a:r>
+          </a:p>
+          <a:p>
+            <a:pPr/>
             <a:r>
               <a:rPr lang="es-ES" sz="1600" dirty="0">
                 <a:solidFill>
@@ -9118,18 +6748,11 @@
                   </a:schemeClr>
                 </a:solidFill>
               </a:rPr>
-              <a:t>    </a:t>
-            </a:r>
-            <a:r>
-              <a:rPr lang="es-ES" sz="1600" dirty="0" err="1">
-                <a:solidFill>
-                  <a:schemeClr val="bg1">
-                    <a:lumMod val="95000"/>
-                  </a:schemeClr>
-                </a:solidFill>
-              </a:rPr>
-              <a:t>ctx.GetStub</a:t>
-            </a:r>
+              <a:t>//     const payload = JSON.parse(</a:t>
+            </a:r>
+          </a:p>
+          <a:p>
+            <a:pPr/>
             <a:r>
               <a:rPr lang="es-ES" sz="1600" dirty="0">
                 <a:solidFill>
@@ -9138,18 +6761,11 @@
                   </a:schemeClr>
                 </a:solidFill>
               </a:rPr>
-              <a:t>().</a:t>
-            </a:r>
-            <a:r>
-              <a:rPr lang="es-ES" sz="1600" dirty="0" err="1">
-                <a:solidFill>
-                  <a:schemeClr val="bg1">
-                    <a:lumMod val="95000"/>
-                  </a:schemeClr>
-                </a:solidFill>
-              </a:rPr>
-              <a:t>SetEvent</a:t>
-            </a:r>
+              <a:t>//         event.payload.toString());</a:t>
+            </a:r>
+          </a:p>
+          <a:p>
+            <a:pPr/>
             <a:r>
               <a:rPr lang="es-ES" sz="1600" dirty="0">
                 <a:solidFill>
@@ -9158,18 +6774,11 @@
                   </a:schemeClr>
                 </a:solidFill>
               </a:rPr>
-              <a:t>("</a:t>
-            </a:r>
-            <a:r>
-              <a:rPr lang="es-ES" sz="1600" dirty="0" err="1">
-                <a:solidFill>
-                  <a:schemeClr val="bg1">
-                    <a:lumMod val="95000"/>
-                  </a:schemeClr>
-                </a:solidFill>
-              </a:rPr>
-              <a:t>PropertyTransferred</a:t>
-            </a:r>
+              <a:t>//     console.log('Transferencia:', payload.propertyID);</a:t>
+            </a:r>
+          </a:p>
+          <a:p>
+            <a:pPr/>
             <a:r>
               <a:rPr lang="es-ES" sz="1600" dirty="0">
                 <a:solidFill>
@@ -9178,18 +6787,11 @@
                   </a:schemeClr>
                 </a:solidFill>
               </a:rPr>
-              <a:t>", </a:t>
-            </a:r>
-            <a:r>
-              <a:rPr lang="es-ES" sz="1600" dirty="0" err="1">
-                <a:solidFill>
-                  <a:schemeClr val="bg1">
-                    <a:lumMod val="95000"/>
-                  </a:schemeClr>
-                </a:solidFill>
-              </a:rPr>
-              <a:t>eventJSON</a:t>
-            </a:r>
+              <a:t>// };</a:t>
+            </a:r>
+          </a:p>
+          <a:p>
+            <a:pPr/>
             <a:r>
               <a:rPr lang="es-ES" sz="1600" dirty="0">
                 <a:solidFill>
@@ -9198,390 +6800,8 @@
                   </a:schemeClr>
                 </a:solidFill>
               </a:rPr>
-              <a:t>)</a:t>
-            </a:r>
-            <a:br>
-              <a:rPr lang="es-ES" sz="1600" dirty="0">
-                <a:solidFill>
-                  <a:schemeClr val="bg1">
-                    <a:lumMod val="95000"/>
-                  </a:schemeClr>
-                </a:solidFill>
-              </a:rPr>
-            </a:br>
-            <a:r>
-              <a:rPr lang="es-ES" sz="1600" dirty="0">
-                <a:solidFill>
-                  <a:schemeClr val="bg1">
-                    <a:lumMod val="95000"/>
-                  </a:schemeClr>
-                </a:solidFill>
-              </a:rPr>
-              <a:t>    </a:t>
-            </a:r>
-            <a:r>
-              <a:rPr lang="es-ES" sz="1600" dirty="0" err="1">
-                <a:solidFill>
-                  <a:schemeClr val="bg1">
-                    <a:lumMod val="95000"/>
-                  </a:schemeClr>
-                </a:solidFill>
-              </a:rPr>
-              <a:t>return</a:t>
-            </a:r>
-            <a:r>
-              <a:rPr lang="es-ES" sz="1600" dirty="0">
-                <a:solidFill>
-                  <a:schemeClr val="bg1">
-                    <a:lumMod val="95000"/>
-                  </a:schemeClr>
-                </a:solidFill>
-              </a:rPr>
-              <a:t> </a:t>
-            </a:r>
-            <a:r>
-              <a:rPr lang="es-ES" sz="1600" dirty="0" err="1">
-                <a:solidFill>
-                  <a:schemeClr val="bg1">
-                    <a:lumMod val="95000"/>
-                  </a:schemeClr>
-                </a:solidFill>
-              </a:rPr>
-              <a:t>nil</a:t>
-            </a:r>
-            <a:br>
-              <a:rPr lang="es-ES" sz="1600" dirty="0">
-                <a:solidFill>
-                  <a:schemeClr val="bg1">
-                    <a:lumMod val="95000"/>
-                  </a:schemeClr>
-                </a:solidFill>
-              </a:rPr>
-            </a:br>
-            <a:r>
-              <a:rPr lang="es-ES" sz="1600" dirty="0">
-                <a:solidFill>
-                  <a:schemeClr val="bg1">
-                    <a:lumMod val="95000"/>
-                  </a:schemeClr>
-                </a:solidFill>
-              </a:rPr>
-              <a:t>}</a:t>
-            </a:r>
-            <a:br>
-              <a:rPr lang="es-ES" sz="1600" dirty="0">
-                <a:solidFill>
-                  <a:schemeClr val="bg1">
-                    <a:lumMod val="95000"/>
-                  </a:schemeClr>
-                </a:solidFill>
-              </a:rPr>
-            </a:br>
-            <a:br>
-              <a:rPr lang="es-ES" sz="1600" dirty="0">
-                <a:solidFill>
-                  <a:schemeClr val="bg1">
-                    <a:lumMod val="95000"/>
-                  </a:schemeClr>
-                </a:solidFill>
-              </a:rPr>
-            </a:br>
-            <a:r>
-              <a:rPr lang="es-ES" sz="1600" dirty="0">
-                <a:solidFill>
-                  <a:schemeClr val="bg1">
-                    <a:lumMod val="95000"/>
-                  </a:schemeClr>
-                </a:solidFill>
-              </a:rPr>
-              <a:t>// En el cliente Node.js: escuchar eventos</a:t>
-            </a:r>
-            <a:br>
-              <a:rPr lang="es-ES" sz="1600" dirty="0">
-                <a:solidFill>
-                  <a:schemeClr val="bg1">
-                    <a:lumMod val="95000"/>
-                  </a:schemeClr>
-                </a:solidFill>
-              </a:rPr>
-            </a:br>
-            <a:r>
-              <a:rPr lang="es-ES" sz="1600" dirty="0">
-                <a:solidFill>
-                  <a:schemeClr val="bg1">
-                    <a:lumMod val="95000"/>
-                  </a:schemeClr>
-                </a:solidFill>
-              </a:rPr>
-              <a:t>// </a:t>
-            </a:r>
-            <a:r>
-              <a:rPr lang="es-ES" sz="1600" dirty="0" err="1">
-                <a:solidFill>
-                  <a:schemeClr val="bg1">
-                    <a:lumMod val="95000"/>
-                  </a:schemeClr>
-                </a:solidFill>
-              </a:rPr>
-              <a:t>const</a:t>
-            </a:r>
-            <a:r>
-              <a:rPr lang="es-ES" sz="1600" dirty="0">
-                <a:solidFill>
-                  <a:schemeClr val="bg1">
-                    <a:lumMod val="95000"/>
-                  </a:schemeClr>
-                </a:solidFill>
-              </a:rPr>
-              <a:t> </a:t>
-            </a:r>
-            <a:r>
-              <a:rPr lang="es-ES" sz="1600" dirty="0" err="1">
-                <a:solidFill>
-                  <a:schemeClr val="bg1">
-                    <a:lumMod val="95000"/>
-                  </a:schemeClr>
-                </a:solidFill>
-              </a:rPr>
-              <a:t>listener</a:t>
-            </a:r>
-            <a:r>
-              <a:rPr lang="es-ES" sz="1600" dirty="0">
-                <a:solidFill>
-                  <a:schemeClr val="bg1">
-                    <a:lumMod val="95000"/>
-                  </a:schemeClr>
-                </a:solidFill>
-              </a:rPr>
-              <a:t> = </a:t>
-            </a:r>
-            <a:r>
-              <a:rPr lang="es-ES" sz="1600" dirty="0" err="1">
-                <a:solidFill>
-                  <a:schemeClr val="bg1">
-                    <a:lumMod val="95000"/>
-                  </a:schemeClr>
-                </a:solidFill>
-              </a:rPr>
-              <a:t>async</a:t>
-            </a:r>
-            <a:r>
-              <a:rPr lang="es-ES" sz="1600" dirty="0">
-                <a:solidFill>
-                  <a:schemeClr val="bg1">
-                    <a:lumMod val="95000"/>
-                  </a:schemeClr>
-                </a:solidFill>
-              </a:rPr>
-              <a:t> (</a:t>
-            </a:r>
-            <a:r>
-              <a:rPr lang="es-ES" sz="1600" dirty="0" err="1">
-                <a:solidFill>
-                  <a:schemeClr val="bg1">
-                    <a:lumMod val="95000"/>
-                  </a:schemeClr>
-                </a:solidFill>
-              </a:rPr>
-              <a:t>event</a:t>
-            </a:r>
-            <a:r>
-              <a:rPr lang="es-ES" sz="1600" dirty="0">
-                <a:solidFill>
-                  <a:schemeClr val="bg1">
-                    <a:lumMod val="95000"/>
-                  </a:schemeClr>
-                </a:solidFill>
-              </a:rPr>
-              <a:t>) =&gt; {</a:t>
-            </a:r>
-            <a:br>
-              <a:rPr lang="es-ES" sz="1600" dirty="0">
-                <a:solidFill>
-                  <a:schemeClr val="bg1">
-                    <a:lumMod val="95000"/>
-                  </a:schemeClr>
-                </a:solidFill>
-              </a:rPr>
-            </a:br>
-            <a:r>
-              <a:rPr lang="es-ES" sz="1600" dirty="0">
-                <a:solidFill>
-                  <a:schemeClr val="bg1">
-                    <a:lumMod val="95000"/>
-                  </a:schemeClr>
-                </a:solidFill>
-              </a:rPr>
-              <a:t>//     </a:t>
-            </a:r>
-            <a:r>
-              <a:rPr lang="es-ES" sz="1600" dirty="0" err="1">
-                <a:solidFill>
-                  <a:schemeClr val="bg1">
-                    <a:lumMod val="95000"/>
-                  </a:schemeClr>
-                </a:solidFill>
-              </a:rPr>
-              <a:t>const</a:t>
-            </a:r>
-            <a:r>
-              <a:rPr lang="es-ES" sz="1600" dirty="0">
-                <a:solidFill>
-                  <a:schemeClr val="bg1">
-                    <a:lumMod val="95000"/>
-                  </a:schemeClr>
-                </a:solidFill>
-              </a:rPr>
-              <a:t> </a:t>
-            </a:r>
-            <a:r>
-              <a:rPr lang="es-ES" sz="1600" dirty="0" err="1">
-                <a:solidFill>
-                  <a:schemeClr val="bg1">
-                    <a:lumMod val="95000"/>
-                  </a:schemeClr>
-                </a:solidFill>
-              </a:rPr>
-              <a:t>payload</a:t>
-            </a:r>
-            <a:r>
-              <a:rPr lang="es-ES" sz="1600" dirty="0">
-                <a:solidFill>
-                  <a:schemeClr val="bg1">
-                    <a:lumMod val="95000"/>
-                  </a:schemeClr>
-                </a:solidFill>
-              </a:rPr>
-              <a:t> = </a:t>
-            </a:r>
-            <a:r>
-              <a:rPr lang="es-ES" sz="1600" dirty="0" err="1">
-                <a:solidFill>
-                  <a:schemeClr val="bg1">
-                    <a:lumMod val="95000"/>
-                  </a:schemeClr>
-                </a:solidFill>
-              </a:rPr>
-              <a:t>JSON.parse</a:t>
-            </a:r>
-            <a:r>
-              <a:rPr lang="es-ES" sz="1600" dirty="0">
-                <a:solidFill>
-                  <a:schemeClr val="bg1">
-                    <a:lumMod val="95000"/>
-                  </a:schemeClr>
-                </a:solidFill>
-              </a:rPr>
-              <a:t>(</a:t>
-            </a:r>
-            <a:r>
-              <a:rPr lang="es-ES" sz="1600" dirty="0" err="1">
-                <a:solidFill>
-                  <a:schemeClr val="bg1">
-                    <a:lumMod val="95000"/>
-                  </a:schemeClr>
-                </a:solidFill>
-              </a:rPr>
-              <a:t>event.payload.toString</a:t>
-            </a:r>
-            <a:r>
-              <a:rPr lang="es-ES" sz="1600" dirty="0">
-                <a:solidFill>
-                  <a:schemeClr val="bg1">
-                    <a:lumMod val="95000"/>
-                  </a:schemeClr>
-                </a:solidFill>
-              </a:rPr>
-              <a:t>());</a:t>
-            </a:r>
-            <a:br>
-              <a:rPr lang="es-ES" sz="1600" dirty="0">
-                <a:solidFill>
-                  <a:schemeClr val="bg1">
-                    <a:lumMod val="95000"/>
-                  </a:schemeClr>
-                </a:solidFill>
-              </a:rPr>
-            </a:br>
-            <a:r>
-              <a:rPr lang="es-ES" sz="1600" dirty="0">
-                <a:solidFill>
-                  <a:schemeClr val="bg1">
-                    <a:lumMod val="95000"/>
-                  </a:schemeClr>
-                </a:solidFill>
-              </a:rPr>
-              <a:t>//     console.log('Transferencia:', </a:t>
-            </a:r>
-            <a:r>
-              <a:rPr lang="es-ES" sz="1600" dirty="0" err="1">
-                <a:solidFill>
-                  <a:schemeClr val="bg1">
-                    <a:lumMod val="95000"/>
-                  </a:schemeClr>
-                </a:solidFill>
-              </a:rPr>
-              <a:t>payload.propertyID</a:t>
-            </a:r>
-            <a:r>
-              <a:rPr lang="es-ES" sz="1600" dirty="0">
-                <a:solidFill>
-                  <a:schemeClr val="bg1">
-                    <a:lumMod val="95000"/>
-                  </a:schemeClr>
-                </a:solidFill>
-              </a:rPr>
-              <a:t>);</a:t>
-            </a:r>
-            <a:br>
-              <a:rPr lang="es-ES" sz="1600" dirty="0">
-                <a:solidFill>
-                  <a:schemeClr val="bg1">
-                    <a:lumMod val="95000"/>
-                  </a:schemeClr>
-                </a:solidFill>
-              </a:rPr>
-            </a:br>
-            <a:r>
-              <a:rPr lang="es-ES" sz="1600" dirty="0">
-                <a:solidFill>
-                  <a:schemeClr val="bg1">
-                    <a:lumMod val="95000"/>
-                  </a:schemeClr>
-                </a:solidFill>
-              </a:rPr>
-              <a:t>// };</a:t>
-            </a:r>
-            <a:br>
-              <a:rPr lang="es-ES" sz="1600" dirty="0">
-                <a:solidFill>
-                  <a:schemeClr val="bg1">
-                    <a:lumMod val="95000"/>
-                  </a:schemeClr>
-                </a:solidFill>
-              </a:rPr>
-            </a:br>
-            <a:r>
-              <a:rPr lang="es-ES" sz="1600" dirty="0">
-                <a:solidFill>
-                  <a:schemeClr val="bg1">
-                    <a:lumMod val="95000"/>
-                  </a:schemeClr>
-                </a:solidFill>
-              </a:rPr>
-              <a:t>// </a:t>
-            </a:r>
-            <a:r>
-              <a:rPr lang="es-ES" sz="1600" dirty="0" err="1">
-                <a:solidFill>
-                  <a:schemeClr val="bg1">
-                    <a:lumMod val="95000"/>
-                  </a:schemeClr>
-                </a:solidFill>
-              </a:rPr>
-              <a:t>contract.addContractListener</a:t>
-            </a:r>
-            <a:endParaRPr lang="es-ES" sz="1600" dirty="0"/>
+              <a:t>// contract.addContractListener(listener);</a:t>
+            </a:r>
           </a:p>
         </p:txBody>
       </p:sp>
@@ -14957,7 +12177,7 @@
               </a:defRPr>
             </a:pPr>
             <a:r>
-              <a:t>GO</a:t>
+              <a:t>NODE.JS</a:t>
             </a:r>
           </a:p>
         </p:txBody>
@@ -15026,15 +12246,7 @@
           <a:bodyPr wrap="square"/>
           <a:lstStyle/>
           <a:p>
-            <a:br>
-              <a:rPr sz="1600" dirty="0">
-                <a:solidFill>
-                  <a:schemeClr val="bg1">
-                    <a:lumMod val="95000"/>
-                  </a:schemeClr>
-                </a:solidFill>
-              </a:rPr>
-            </a:br>
+            <a:pPr/>
             <a:r>
               <a:rPr sz="1600" dirty="0" err="1">
                 <a:solidFill>
@@ -15043,18 +12255,11 @@
                   </a:schemeClr>
                 </a:solidFill>
               </a:rPr>
-              <a:t>func</a:t>
-            </a:r>
-            <a:r>
-              <a:rPr sz="1600" dirty="0">
-                <a:solidFill>
-                  <a:schemeClr val="bg1">
-                    <a:lumMod val="95000"/>
-                  </a:schemeClr>
-                </a:solidFill>
-              </a:rPr>
-              <a:t> (s *</a:t>
-            </a:r>
+              <a:t>async TransferProperty(ctx, id, newOwner) {</a:t>
+            </a:r>
+          </a:p>
+          <a:p>
+            <a:pPr/>
             <a:r>
               <a:rPr sz="1600" dirty="0" err="1">
                 <a:solidFill>
@@ -15063,18 +12268,11 @@
                   </a:schemeClr>
                 </a:solidFill>
               </a:rPr>
-              <a:t>SmartContract</a:t>
-            </a:r>
-            <a:r>
-              <a:rPr sz="1600" dirty="0">
-                <a:solidFill>
-                  <a:schemeClr val="bg1">
-                    <a:lumMod val="95000"/>
-                  </a:schemeClr>
-                </a:solidFill>
-              </a:rPr>
-              <a:t>) </a:t>
-            </a:r>
+              <a:t>    // Leer propiedad</a:t>
+            </a:r>
+          </a:p>
+          <a:p>
+            <a:pPr/>
             <a:r>
               <a:rPr sz="1600" dirty="0" err="1">
                 <a:solidFill>
@@ -15083,18 +12281,11 @@
                   </a:schemeClr>
                 </a:solidFill>
               </a:rPr>
-              <a:t>TransferProperty</a:t>
-            </a:r>
-            <a:r>
-              <a:rPr sz="1600" dirty="0">
-                <a:solidFill>
-                  <a:schemeClr val="bg1">
-                    <a:lumMod val="95000"/>
-                  </a:schemeClr>
-                </a:solidFill>
-              </a:rPr>
-              <a:t>(</a:t>
-            </a:r>
+              <a:t>    const property = await this.ReadProperty(ctx, id);</a:t>
+            </a:r>
+          </a:p>
+          <a:p>
+            <a:pPr/>
             <a:r>
               <a:rPr sz="1600" dirty="0" err="1">
                 <a:solidFill>
@@ -15103,18 +12294,11 @@
                   </a:schemeClr>
                 </a:solidFill>
               </a:rPr>
-              <a:t>ctx</a:t>
-            </a:r>
-            <a:r>
-              <a:rPr sz="1600" dirty="0">
-                <a:solidFill>
-                  <a:schemeClr val="bg1">
-                    <a:lumMod val="95000"/>
-                  </a:schemeClr>
-                </a:solidFill>
-              </a:rPr>
-              <a:t> </a:t>
-            </a:r>
+              <a:t/>
+            </a:r>
+          </a:p>
+          <a:p>
+            <a:pPr/>
             <a:r>
               <a:rPr sz="1600" dirty="0" err="1">
                 <a:solidFill>
@@ -15123,37 +12307,11 @@
                   </a:schemeClr>
                 </a:solidFill>
               </a:rPr>
-              <a:t>contractapi.TransactionContextInterface</a:t>
-            </a:r>
-            <a:r>
-              <a:rPr sz="1600" dirty="0">
-                <a:solidFill>
-                  <a:schemeClr val="bg1">
-                    <a:lumMod val="95000"/>
-                  </a:schemeClr>
-                </a:solidFill>
-              </a:rPr>
-              <a:t>,</a:t>
-            </a:r>
-            <a:br>
-              <a:rPr sz="1600" dirty="0">
-                <a:solidFill>
-                  <a:schemeClr val="bg1">
-                    <a:lumMod val="95000"/>
-                  </a:schemeClr>
-                </a:solidFill>
-              </a:rPr>
-            </a:br>
-            <a:r>
-              <a:rPr sz="1600" dirty="0">
-                <a:solidFill>
-                  <a:schemeClr val="bg1">
-                    <a:lumMod val="95000"/>
-                  </a:schemeClr>
-                </a:solidFill>
-              </a:rPr>
-              <a:t>    id string, </a:t>
-            </a:r>
+              <a:t>    // Verificar: solo el propietario actual puede transferir</a:t>
+            </a:r>
+          </a:p>
+          <a:p>
+            <a:pPr/>
             <a:r>
               <a:rPr sz="1600" dirty="0" err="1">
                 <a:solidFill>
@@ -15162,46 +12320,11 @@
                   </a:schemeClr>
                 </a:solidFill>
               </a:rPr>
-              <a:t>newOwner</a:t>
-            </a:r>
-            <a:r>
-              <a:rPr sz="1600" dirty="0">
-                <a:solidFill>
-                  <a:schemeClr val="bg1">
-                    <a:lumMod val="95000"/>
-                  </a:schemeClr>
-                </a:solidFill>
-              </a:rPr>
-              <a:t> string) error {</a:t>
-            </a:r>
-            <a:br>
-              <a:rPr sz="1600" dirty="0">
-                <a:solidFill>
-                  <a:schemeClr val="bg1">
-                    <a:lumMod val="95000"/>
-                  </a:schemeClr>
-                </a:solidFill>
-              </a:rPr>
-            </a:br>
-            <a:br>
-              <a:rPr sz="1600" dirty="0">
-                <a:solidFill>
-                  <a:schemeClr val="bg1">
-                    <a:lumMod val="95000"/>
-                  </a:schemeClr>
-                </a:solidFill>
-              </a:rPr>
-            </a:br>
-            <a:r>
-              <a:rPr sz="1600" dirty="0">
-                <a:solidFill>
-                  <a:schemeClr val="bg1">
-                    <a:lumMod val="95000"/>
-                  </a:schemeClr>
-                </a:solidFill>
-              </a:rPr>
-              <a:t>    // Leer </a:t>
-            </a:r>
+              <a:t>    const clientMSP = ctx.clientIdentity.getMSPID();</a:t>
+            </a:r>
+          </a:p>
+          <a:p>
+            <a:pPr/>
             <a:r>
               <a:rPr sz="1600" dirty="0" err="1">
                 <a:solidFill>
@@ -15210,27 +12333,11 @@
                   </a:schemeClr>
                 </a:solidFill>
               </a:rPr>
-              <a:t>propiedad</a:t>
-            </a:r>
-            <a:br>
-              <a:rPr sz="1600" dirty="0">
-                <a:solidFill>
-                  <a:schemeClr val="bg1">
-                    <a:lumMod val="95000"/>
-                  </a:schemeClr>
-                </a:solidFill>
-              </a:rPr>
-            </a:br>
-            <a:r>
-              <a:rPr sz="1600" dirty="0">
-                <a:solidFill>
-                  <a:schemeClr val="bg1">
-                    <a:lumMod val="95000"/>
-                  </a:schemeClr>
-                </a:solidFill>
-              </a:rPr>
-              <a:t>    property, err := </a:t>
-            </a:r>
+              <a:t>    if (property.owner !== clientMSP) {</a:t>
+            </a:r>
+          </a:p>
+          <a:p>
+            <a:pPr/>
             <a:r>
               <a:rPr sz="1600" dirty="0" err="1">
                 <a:solidFill>
@@ -15239,18 +12346,11 @@
                   </a:schemeClr>
                 </a:solidFill>
               </a:rPr>
-              <a:t>s.ReadProperty</a:t>
-            </a:r>
-            <a:r>
-              <a:rPr sz="1600" dirty="0">
-                <a:solidFill>
-                  <a:schemeClr val="bg1">
-                    <a:lumMod val="95000"/>
-                  </a:schemeClr>
-                </a:solidFill>
-              </a:rPr>
-              <a:t>(</a:t>
-            </a:r>
+              <a:t>        throw new Error(</a:t>
+            </a:r>
+          </a:p>
+          <a:p>
+            <a:pPr/>
             <a:r>
               <a:rPr sz="1600" dirty="0" err="1">
                 <a:solidFill>
@@ -15259,103 +12359,11 @@
                   </a:schemeClr>
                 </a:solidFill>
               </a:rPr>
-              <a:t>ctx</a:t>
-            </a:r>
-            <a:r>
-              <a:rPr sz="1600" dirty="0">
-                <a:solidFill>
-                  <a:schemeClr val="bg1">
-                    <a:lumMod val="95000"/>
-                  </a:schemeClr>
-                </a:solidFill>
-              </a:rPr>
-              <a:t>, id)</a:t>
-            </a:r>
-            <a:br>
-              <a:rPr sz="1600" dirty="0">
-                <a:solidFill>
-                  <a:schemeClr val="bg1">
-                    <a:lumMod val="95000"/>
-                  </a:schemeClr>
-                </a:solidFill>
-              </a:rPr>
-            </a:br>
-            <a:r>
-              <a:rPr sz="1600" dirty="0">
-                <a:solidFill>
-                  <a:schemeClr val="bg1">
-                    <a:lumMod val="95000"/>
-                  </a:schemeClr>
-                </a:solidFill>
-              </a:rPr>
-              <a:t>    if err != nil {</a:t>
-            </a:r>
-            <a:br>
-              <a:rPr sz="1600" dirty="0">
-                <a:solidFill>
-                  <a:schemeClr val="bg1">
-                    <a:lumMod val="95000"/>
-                  </a:schemeClr>
-                </a:solidFill>
-              </a:rPr>
-            </a:br>
-            <a:r>
-              <a:rPr sz="1600" dirty="0">
-                <a:solidFill>
-                  <a:schemeClr val="bg1">
-                    <a:lumMod val="95000"/>
-                  </a:schemeClr>
-                </a:solidFill>
-              </a:rPr>
-              <a:t>        return err</a:t>
-            </a:r>
-            <a:br>
-              <a:rPr sz="1600" dirty="0">
-                <a:solidFill>
-                  <a:schemeClr val="bg1">
-                    <a:lumMod val="95000"/>
-                  </a:schemeClr>
-                </a:solidFill>
-              </a:rPr>
-            </a:br>
-            <a:r>
-              <a:rPr sz="1600" dirty="0">
-                <a:solidFill>
-                  <a:schemeClr val="bg1">
-                    <a:lumMod val="95000"/>
-                  </a:schemeClr>
-                </a:solidFill>
-              </a:rPr>
-              <a:t>    }</a:t>
-            </a:r>
-            <a:br>
-              <a:rPr sz="1600" dirty="0">
-                <a:solidFill>
-                  <a:schemeClr val="bg1">
-                    <a:lumMod val="95000"/>
-                  </a:schemeClr>
-                </a:solidFill>
-              </a:rPr>
-            </a:br>
-            <a:br>
-              <a:rPr sz="1600" dirty="0">
-                <a:solidFill>
-                  <a:schemeClr val="bg1">
-                    <a:lumMod val="95000"/>
-                  </a:schemeClr>
-                </a:solidFill>
-              </a:rPr>
-            </a:br>
-            <a:r>
-              <a:rPr sz="1600" dirty="0">
-                <a:solidFill>
-                  <a:schemeClr val="bg1">
-                    <a:lumMod val="95000"/>
-                  </a:schemeClr>
-                </a:solidFill>
-              </a:rPr>
-              <a:t>    // </a:t>
-            </a:r>
+              <a:t>            `solo el propietario actual (${property.owner}) ` +</a:t>
+            </a:r>
+          </a:p>
+          <a:p>
+            <a:pPr/>
             <a:r>
               <a:rPr sz="1600" dirty="0" err="1">
                 <a:solidFill>
@@ -15364,395 +12372,13 @@
                   </a:schemeClr>
                 </a:solidFill>
               </a:rPr>
-              <a:t>Verificar</a:t>
-            </a:r>
-            <a:r>
-              <a:rPr sz="1600" dirty="0">
-                <a:solidFill>
-                  <a:schemeClr val="bg1">
-                    <a:lumMod val="95000"/>
-                  </a:schemeClr>
-                </a:solidFill>
-              </a:rPr>
-              <a:t>: solo </a:t>
-            </a:r>
+              <a:t>            `puede transferir`);</a:t>
+            </a:r>
+          </a:p>
+          <a:p>
+            <a:pPr/>
             <a:r>
               <a:rPr sz="1600" dirty="0" err="1">
-                <a:solidFill>
-                  <a:schemeClr val="bg1">
-                    <a:lumMod val="95000"/>
-                  </a:schemeClr>
-                </a:solidFill>
-              </a:rPr>
-              <a:t>el</a:t>
-            </a:r>
-            <a:r>
-              <a:rPr sz="1600" dirty="0">
-                <a:solidFill>
-                  <a:schemeClr val="bg1">
-                    <a:lumMod val="95000"/>
-                  </a:schemeClr>
-                </a:solidFill>
-              </a:rPr>
-              <a:t> </a:t>
-            </a:r>
-            <a:r>
-              <a:rPr sz="1600" dirty="0" err="1">
-                <a:solidFill>
-                  <a:schemeClr val="bg1">
-                    <a:lumMod val="95000"/>
-                  </a:schemeClr>
-                </a:solidFill>
-              </a:rPr>
-              <a:t>propietario</a:t>
-            </a:r>
-            <a:r>
-              <a:rPr sz="1600" dirty="0">
-                <a:solidFill>
-                  <a:schemeClr val="bg1">
-                    <a:lumMod val="95000"/>
-                  </a:schemeClr>
-                </a:solidFill>
-              </a:rPr>
-              <a:t> actual </a:t>
-            </a:r>
-            <a:r>
-              <a:rPr sz="1600" dirty="0" err="1">
-                <a:solidFill>
-                  <a:schemeClr val="bg1">
-                    <a:lumMod val="95000"/>
-                  </a:schemeClr>
-                </a:solidFill>
-              </a:rPr>
-              <a:t>puede</a:t>
-            </a:r>
-            <a:r>
-              <a:rPr sz="1600" dirty="0">
-                <a:solidFill>
-                  <a:schemeClr val="bg1">
-                    <a:lumMod val="95000"/>
-                  </a:schemeClr>
-                </a:solidFill>
-              </a:rPr>
-              <a:t> </a:t>
-            </a:r>
-            <a:r>
-              <a:rPr sz="1600" dirty="0" err="1">
-                <a:solidFill>
-                  <a:schemeClr val="bg1">
-                    <a:lumMod val="95000"/>
-                  </a:schemeClr>
-                </a:solidFill>
-              </a:rPr>
-              <a:t>transferir</a:t>
-            </a:r>
-            <a:br>
-              <a:rPr sz="1600" dirty="0">
-                <a:solidFill>
-                  <a:schemeClr val="bg1">
-                    <a:lumMod val="95000"/>
-                  </a:schemeClr>
-                </a:solidFill>
-              </a:rPr>
-            </a:br>
-            <a:r>
-              <a:rPr sz="1600" dirty="0">
-                <a:solidFill>
-                  <a:schemeClr val="bg1">
-                    <a:lumMod val="95000"/>
-                  </a:schemeClr>
-                </a:solidFill>
-              </a:rPr>
-              <a:t>    </a:t>
-            </a:r>
-            <a:r>
-              <a:rPr sz="1600" dirty="0" err="1">
-                <a:solidFill>
-                  <a:schemeClr val="bg1">
-                    <a:lumMod val="95000"/>
-                  </a:schemeClr>
-                </a:solidFill>
-              </a:rPr>
-              <a:t>clientMSP</a:t>
-            </a:r>
-            <a:r>
-              <a:rPr sz="1600" dirty="0">
-                <a:solidFill>
-                  <a:schemeClr val="bg1">
-                    <a:lumMod val="95000"/>
-                  </a:schemeClr>
-                </a:solidFill>
-              </a:rPr>
-              <a:t>, _ := </a:t>
-            </a:r>
-            <a:r>
-              <a:rPr sz="1600" dirty="0" err="1">
-                <a:solidFill>
-                  <a:schemeClr val="bg1">
-                    <a:lumMod val="95000"/>
-                  </a:schemeClr>
-                </a:solidFill>
-              </a:rPr>
-              <a:t>ctx.GetClientIdentity</a:t>
-            </a:r>
-            <a:r>
-              <a:rPr sz="1600" dirty="0">
-                <a:solidFill>
-                  <a:schemeClr val="bg1">
-                    <a:lumMod val="95000"/>
-                  </a:schemeClr>
-                </a:solidFill>
-              </a:rPr>
-              <a:t>().</a:t>
-            </a:r>
-            <a:r>
-              <a:rPr sz="1600" dirty="0" err="1">
-                <a:solidFill>
-                  <a:schemeClr val="bg1">
-                    <a:lumMod val="95000"/>
-                  </a:schemeClr>
-                </a:solidFill>
-              </a:rPr>
-              <a:t>GetMSPID</a:t>
-            </a:r>
-            <a:r>
-              <a:rPr sz="1600" dirty="0">
-                <a:solidFill>
-                  <a:schemeClr val="bg1">
-                    <a:lumMod val="95000"/>
-                  </a:schemeClr>
-                </a:solidFill>
-              </a:rPr>
-              <a:t>()</a:t>
-            </a:r>
-            <a:br>
-              <a:rPr sz="1600" dirty="0">
-                <a:solidFill>
-                  <a:schemeClr val="bg1">
-                    <a:lumMod val="95000"/>
-                  </a:schemeClr>
-                </a:solidFill>
-              </a:rPr>
-            </a:br>
-            <a:r>
-              <a:rPr sz="1600" dirty="0">
-                <a:solidFill>
-                  <a:schemeClr val="bg1">
-                    <a:lumMod val="95000"/>
-                  </a:schemeClr>
-                </a:solidFill>
-              </a:rPr>
-              <a:t>    if </a:t>
-            </a:r>
-            <a:r>
-              <a:rPr sz="1600" dirty="0" err="1">
-                <a:solidFill>
-                  <a:schemeClr val="bg1">
-                    <a:lumMod val="95000"/>
-                  </a:schemeClr>
-                </a:solidFill>
-              </a:rPr>
-              <a:t>property.Owner</a:t>
-            </a:r>
-            <a:r>
-              <a:rPr sz="1600" dirty="0">
-                <a:solidFill>
-                  <a:schemeClr val="bg1">
-                    <a:lumMod val="95000"/>
-                  </a:schemeClr>
-                </a:solidFill>
-              </a:rPr>
-              <a:t> != </a:t>
-            </a:r>
-            <a:r>
-              <a:rPr sz="1600" dirty="0" err="1">
-                <a:solidFill>
-                  <a:schemeClr val="bg1">
-                    <a:lumMod val="95000"/>
-                  </a:schemeClr>
-                </a:solidFill>
-              </a:rPr>
-              <a:t>clientMSP</a:t>
-            </a:r>
-            <a:r>
-              <a:rPr sz="1600" dirty="0">
-                <a:solidFill>
-                  <a:schemeClr val="bg1">
-                    <a:lumMod val="95000"/>
-                  </a:schemeClr>
-                </a:solidFill>
-              </a:rPr>
-              <a:t> {</a:t>
-            </a:r>
-            <a:br>
-              <a:rPr sz="1600" dirty="0">
-                <a:solidFill>
-                  <a:schemeClr val="bg1">
-                    <a:lumMod val="95000"/>
-                  </a:schemeClr>
-                </a:solidFill>
-              </a:rPr>
-            </a:br>
-            <a:r>
-              <a:rPr sz="1600" dirty="0">
-                <a:solidFill>
-                  <a:schemeClr val="bg1">
-                    <a:lumMod val="95000"/>
-                  </a:schemeClr>
-                </a:solidFill>
-              </a:rPr>
-              <a:t>        return </a:t>
-            </a:r>
-            <a:r>
-              <a:rPr sz="1600" dirty="0" err="1">
-                <a:solidFill>
-                  <a:schemeClr val="bg1">
-                    <a:lumMod val="95000"/>
-                  </a:schemeClr>
-                </a:solidFill>
-              </a:rPr>
-              <a:t>fmt.Errorf</a:t>
-            </a:r>
-            <a:r>
-              <a:rPr sz="1600" dirty="0">
-                <a:solidFill>
-                  <a:schemeClr val="bg1">
-                    <a:lumMod val="95000"/>
-                  </a:schemeClr>
-                </a:solidFill>
-              </a:rPr>
-              <a:t>("solo </a:t>
-            </a:r>
-            <a:r>
-              <a:rPr sz="1600" dirty="0" err="1">
-                <a:solidFill>
-                  <a:schemeClr val="bg1">
-                    <a:lumMod val="95000"/>
-                  </a:schemeClr>
-                </a:solidFill>
-              </a:rPr>
-              <a:t>el</a:t>
-            </a:r>
-            <a:r>
-              <a:rPr sz="1600" dirty="0">
-                <a:solidFill>
-                  <a:schemeClr val="bg1">
-                    <a:lumMod val="95000"/>
-                  </a:schemeClr>
-                </a:solidFill>
-              </a:rPr>
-              <a:t> </a:t>
-            </a:r>
-            <a:r>
-              <a:rPr sz="1600" dirty="0" err="1">
-                <a:solidFill>
-                  <a:schemeClr val="bg1">
-                    <a:lumMod val="95000"/>
-                  </a:schemeClr>
-                </a:solidFill>
-              </a:rPr>
-              <a:t>propietario</a:t>
-            </a:r>
-            <a:r>
-              <a:rPr sz="1600" dirty="0">
-                <a:solidFill>
-                  <a:schemeClr val="bg1">
-                    <a:lumMod val="95000"/>
-                  </a:schemeClr>
-                </a:solidFill>
-              </a:rPr>
-              <a:t> actual (%s) </a:t>
-            </a:r>
-            <a:r>
-              <a:rPr sz="1600" dirty="0" err="1">
-                <a:solidFill>
-                  <a:schemeClr val="bg1">
-                    <a:lumMod val="95000"/>
-                  </a:schemeClr>
-                </a:solidFill>
-              </a:rPr>
-              <a:t>puede</a:t>
-            </a:r>
-            <a:r>
-              <a:rPr sz="1600" dirty="0">
-                <a:solidFill>
-                  <a:schemeClr val="bg1">
-                    <a:lumMod val="95000"/>
-                  </a:schemeClr>
-                </a:solidFill>
-              </a:rPr>
-              <a:t> </a:t>
-            </a:r>
-            <a:r>
-              <a:rPr sz="1600" dirty="0" err="1">
-                <a:solidFill>
-                  <a:schemeClr val="bg1">
-                    <a:lumMod val="95000"/>
-                  </a:schemeClr>
-                </a:solidFill>
-              </a:rPr>
-              <a:t>transferir</a:t>
-            </a:r>
-            <a:r>
-              <a:rPr sz="1600" dirty="0">
-                <a:solidFill>
-                  <a:schemeClr val="bg1">
-                    <a:lumMod val="95000"/>
-                  </a:schemeClr>
-                </a:solidFill>
-              </a:rPr>
-              <a:t>",</a:t>
-            </a:r>
-            <a:br>
-              <a:rPr sz="1600" dirty="0">
-                <a:solidFill>
-                  <a:schemeClr val="bg1">
-                    <a:lumMod val="95000"/>
-                  </a:schemeClr>
-                </a:solidFill>
-              </a:rPr>
-            </a:br>
-            <a:r>
-              <a:rPr sz="1600" dirty="0">
-                <a:solidFill>
-                  <a:schemeClr val="bg1">
-                    <a:lumMod val="95000"/>
-                  </a:schemeClr>
-                </a:solidFill>
-              </a:rPr>
-              <a:t>            </a:t>
-            </a:r>
-            <a:r>
-              <a:rPr sz="1600" dirty="0" err="1">
-                <a:solidFill>
-                  <a:schemeClr val="bg1">
-                    <a:lumMod val="95000"/>
-                  </a:schemeClr>
-                </a:solidFill>
-              </a:rPr>
-              <a:t>property.Owner</a:t>
-            </a:r>
-            <a:r>
-              <a:rPr sz="1600" dirty="0">
-                <a:solidFill>
-                  <a:schemeClr val="bg1">
-                    <a:lumMod val="95000"/>
-                  </a:schemeClr>
-                </a:solidFill>
-              </a:rPr>
-              <a:t>)</a:t>
-            </a:r>
-            <a:br>
-              <a:rPr sz="1600" dirty="0">
-                <a:solidFill>
-                  <a:schemeClr val="bg1">
-                    <a:lumMod val="95000"/>
-                  </a:schemeClr>
-                </a:solidFill>
-              </a:rPr>
-            </a:br>
-            <a:r>
-              <a:rPr sz="1600" dirty="0">
                 <a:solidFill>
                   <a:schemeClr val="bg1">
                     <a:lumMod val="95000"/>
@@ -15792,7 +12418,8 @@
           </a:bodyPr>
           <a:lstStyle/>
           <a:p>
-            <a:br>
+            <a:pPr/>
+            <a:r>
               <a:rPr lang="es-ES" sz="1600" dirty="0">
                 <a:solidFill>
                   <a:schemeClr val="bg1">
@@ -15800,8 +12427,12 @@
                   </a:schemeClr>
                 </a:solidFill>
               </a:rPr>
-            </a:br>
-            <a:br>
+              <a:t>    // Verificar: la propiedad debe estar en estado 'active'</a:t>
+            </a:r>
+          </a:p>
+          <a:p>
+            <a:pPr/>
+            <a:r>
               <a:rPr lang="es-ES" sz="1600" dirty="0">
                 <a:solidFill>
                   <a:schemeClr val="bg1">
@@ -15809,7 +12440,11 @@
                   </a:schemeClr>
                 </a:solidFill>
               </a:rPr>
-            </a:br>
+              <a:t>    if (property.status !== 'active') {</a:t>
+            </a:r>
+          </a:p>
+          <a:p>
+            <a:pPr/>
             <a:r>
               <a:rPr lang="es-ES" sz="1600" dirty="0">
                 <a:solidFill>
@@ -15818,9 +12453,12 @@
                   </a:schemeClr>
                 </a:solidFill>
               </a:rPr>
-              <a:t>    // Verificar: la propiedad debe estar en estado 'active'</a:t>
-            </a:r>
-            <a:br>
+              <a:t>        throw new Error(</a:t>
+            </a:r>
+          </a:p>
+          <a:p>
+            <a:pPr/>
+            <a:r>
               <a:rPr lang="es-ES" sz="1600" dirty="0">
                 <a:solidFill>
                   <a:schemeClr val="bg1">
@@ -15828,7 +12466,11 @@
                   </a:schemeClr>
                 </a:solidFill>
               </a:rPr>
-            </a:br>
+              <a:t>            `la propiedad esta en estado '${property.status}', ` +</a:t>
+            </a:r>
+          </a:p>
+          <a:p>
+            <a:pPr/>
             <a:r>
               <a:rPr lang="es-ES" sz="1600" dirty="0">
                 <a:solidFill>
@@ -15837,18 +12479,11 @@
                   </a:schemeClr>
                 </a:solidFill>
               </a:rPr>
-              <a:t>    </a:t>
-            </a:r>
-            <a:r>
-              <a:rPr lang="es-ES" sz="1600" dirty="0" err="1">
-                <a:solidFill>
-                  <a:schemeClr val="bg1">
-                    <a:lumMod val="95000"/>
-                  </a:schemeClr>
-                </a:solidFill>
-              </a:rPr>
-              <a:t>if</a:t>
-            </a:r>
+              <a:t>            `no se puede transferir`);</a:t>
+            </a:r>
+          </a:p>
+          <a:p>
+            <a:pPr/>
             <a:r>
               <a:rPr lang="es-ES" sz="1600" dirty="0">
                 <a:solidFill>
@@ -15857,18 +12492,11 @@
                   </a:schemeClr>
                 </a:solidFill>
               </a:rPr>
-              <a:t> </a:t>
-            </a:r>
-            <a:r>
-              <a:rPr lang="es-ES" sz="1600" dirty="0" err="1">
-                <a:solidFill>
-                  <a:schemeClr val="bg1">
-                    <a:lumMod val="95000"/>
-                  </a:schemeClr>
-                </a:solidFill>
-              </a:rPr>
-              <a:t>property.Status</a:t>
-            </a:r>
+              <a:t>    }</a:t>
+            </a:r>
+          </a:p>
+          <a:p>
+            <a:pPr/>
             <a:r>
               <a:rPr lang="es-ES" sz="1600" dirty="0">
                 <a:solidFill>
@@ -15877,9 +12505,12 @@
                   </a:schemeClr>
                 </a:solidFill>
               </a:rPr>
-              <a:t> != "active" {</a:t>
-            </a:r>
-            <a:br>
+              <a:t/>
+            </a:r>
+          </a:p>
+          <a:p>
+            <a:pPr/>
+            <a:r>
               <a:rPr lang="es-ES" sz="1600" dirty="0">
                 <a:solidFill>
                   <a:schemeClr val="bg1">
@@ -15887,7 +12518,11 @@
                   </a:schemeClr>
                 </a:solidFill>
               </a:rPr>
-            </a:br>
+              <a:t>    // Transferir</a:t>
+            </a:r>
+          </a:p>
+          <a:p>
+            <a:pPr/>
             <a:r>
               <a:rPr lang="es-ES" sz="1600" dirty="0">
                 <a:solidFill>
@@ -15896,18 +12531,11 @@
                   </a:schemeClr>
                 </a:solidFill>
               </a:rPr>
-              <a:t>        </a:t>
-            </a:r>
-            <a:r>
-              <a:rPr lang="es-ES" sz="1600" dirty="0" err="1">
-                <a:solidFill>
-                  <a:schemeClr val="bg1">
-                    <a:lumMod val="95000"/>
-                  </a:schemeClr>
-                </a:solidFill>
-              </a:rPr>
-              <a:t>return</a:t>
-            </a:r>
+              <a:t>    property.owner = newOwner;</a:t>
+            </a:r>
+          </a:p>
+          <a:p>
+            <a:pPr/>
             <a:r>
               <a:rPr lang="es-ES" sz="1600" dirty="0">
                 <a:solidFill>
@@ -15916,18 +12544,11 @@
                   </a:schemeClr>
                 </a:solidFill>
               </a:rPr>
-              <a:t> </a:t>
-            </a:r>
-            <a:r>
-              <a:rPr lang="es-ES" sz="1600" dirty="0" err="1">
-                <a:solidFill>
-                  <a:schemeClr val="bg1">
-                    <a:lumMod val="95000"/>
-                  </a:schemeClr>
-                </a:solidFill>
-              </a:rPr>
-              <a:t>fmt.Errorf</a:t>
-            </a:r>
+              <a:t>    property.status = 'active';</a:t>
+            </a:r>
+          </a:p>
+          <a:p>
+            <a:pPr/>
             <a:r>
               <a:rPr lang="es-ES" sz="1600" dirty="0">
                 <a:solidFill>
@@ -15936,9 +12557,12 @@
                   </a:schemeClr>
                 </a:solidFill>
               </a:rPr>
-              <a:t>("la propiedad esta en estado '%s', no se puede transferir",</a:t>
-            </a:r>
-            <a:br>
+              <a:t>    await ctx.stub.putState(id,</a:t>
+            </a:r>
+          </a:p>
+          <a:p>
+            <a:pPr/>
+            <a:r>
               <a:rPr lang="es-ES" sz="1600" dirty="0">
                 <a:solidFill>
                   <a:schemeClr val="bg1">
@@ -15946,7 +12570,11 @@
                   </a:schemeClr>
                 </a:solidFill>
               </a:rPr>
-            </a:br>
+              <a:t>        Buffer.from(JSON.stringify(property)));</a:t>
+            </a:r>
+          </a:p>
+          <a:p>
+            <a:pPr/>
             <a:r>
               <a:rPr lang="es-ES" sz="1600" dirty="0">
                 <a:solidFill>
@@ -15955,361 +12583,8 @@
                   </a:schemeClr>
                 </a:solidFill>
               </a:rPr>
-              <a:t>            </a:t>
-            </a:r>
-            <a:r>
-              <a:rPr lang="es-ES" sz="1600" dirty="0" err="1">
-                <a:solidFill>
-                  <a:schemeClr val="bg1">
-                    <a:lumMod val="95000"/>
-                  </a:schemeClr>
-                </a:solidFill>
-              </a:rPr>
-              <a:t>property.Status</a:t>
-            </a:r>
-            <a:r>
-              <a:rPr lang="es-ES" sz="1600" dirty="0">
-                <a:solidFill>
-                  <a:schemeClr val="bg1">
-                    <a:lumMod val="95000"/>
-                  </a:schemeClr>
-                </a:solidFill>
-              </a:rPr>
-              <a:t>)</a:t>
-            </a:r>
-            <a:br>
-              <a:rPr lang="es-ES" sz="1600" dirty="0">
-                <a:solidFill>
-                  <a:schemeClr val="bg1">
-                    <a:lumMod val="95000"/>
-                  </a:schemeClr>
-                </a:solidFill>
-              </a:rPr>
-            </a:br>
-            <a:r>
-              <a:rPr lang="es-ES" sz="1600" dirty="0">
-                <a:solidFill>
-                  <a:schemeClr val="bg1">
-                    <a:lumMod val="95000"/>
-                  </a:schemeClr>
-                </a:solidFill>
-              </a:rPr>
-              <a:t>    }</a:t>
-            </a:r>
-            <a:br>
-              <a:rPr lang="es-ES" sz="1600" dirty="0">
-                <a:solidFill>
-                  <a:schemeClr val="bg1">
-                    <a:lumMod val="95000"/>
-                  </a:schemeClr>
-                </a:solidFill>
-              </a:rPr>
-            </a:br>
-            <a:br>
-              <a:rPr lang="es-ES" sz="1600" dirty="0">
-                <a:solidFill>
-                  <a:schemeClr val="bg1">
-                    <a:lumMod val="95000"/>
-                  </a:schemeClr>
-                </a:solidFill>
-              </a:rPr>
-            </a:br>
-            <a:r>
-              <a:rPr lang="es-ES" sz="1600" dirty="0">
-                <a:solidFill>
-                  <a:schemeClr val="bg1">
-                    <a:lumMod val="95000"/>
-                  </a:schemeClr>
-                </a:solidFill>
-              </a:rPr>
-              <a:t>    // Transferir</a:t>
-            </a:r>
-            <a:br>
-              <a:rPr lang="es-ES" sz="1600" dirty="0">
-                <a:solidFill>
-                  <a:schemeClr val="bg1">
-                    <a:lumMod val="95000"/>
-                  </a:schemeClr>
-                </a:solidFill>
-              </a:rPr>
-            </a:br>
-            <a:r>
-              <a:rPr lang="es-ES" sz="1600" dirty="0">
-                <a:solidFill>
-                  <a:schemeClr val="bg1">
-                    <a:lumMod val="95000"/>
-                  </a:schemeClr>
-                </a:solidFill>
-              </a:rPr>
-              <a:t>    </a:t>
-            </a:r>
-            <a:r>
-              <a:rPr lang="es-ES" sz="1600" dirty="0" err="1">
-                <a:solidFill>
-                  <a:schemeClr val="bg1">
-                    <a:lumMod val="95000"/>
-                  </a:schemeClr>
-                </a:solidFill>
-              </a:rPr>
-              <a:t>property.Owner</a:t>
-            </a:r>
-            <a:r>
-              <a:rPr lang="es-ES" sz="1600" dirty="0">
-                <a:solidFill>
-                  <a:schemeClr val="bg1">
-                    <a:lumMod val="95000"/>
-                  </a:schemeClr>
-                </a:solidFill>
-              </a:rPr>
-              <a:t> = </a:t>
-            </a:r>
-            <a:r>
-              <a:rPr lang="es-ES" sz="1600" dirty="0" err="1">
-                <a:solidFill>
-                  <a:schemeClr val="bg1">
-                    <a:lumMod val="95000"/>
-                  </a:schemeClr>
-                </a:solidFill>
-              </a:rPr>
-              <a:t>newOwner</a:t>
-            </a:r>
-            <a:br>
-              <a:rPr lang="es-ES" sz="1600" dirty="0">
-                <a:solidFill>
-                  <a:schemeClr val="bg1">
-                    <a:lumMod val="95000"/>
-                  </a:schemeClr>
-                </a:solidFill>
-              </a:rPr>
-            </a:br>
-            <a:r>
-              <a:rPr lang="es-ES" sz="1600" dirty="0">
-                <a:solidFill>
-                  <a:schemeClr val="bg1">
-                    <a:lumMod val="95000"/>
-                  </a:schemeClr>
-                </a:solidFill>
-              </a:rPr>
-              <a:t>    </a:t>
-            </a:r>
-            <a:r>
-              <a:rPr lang="es-ES" sz="1600" dirty="0" err="1">
-                <a:solidFill>
-                  <a:schemeClr val="bg1">
-                    <a:lumMod val="95000"/>
-                  </a:schemeClr>
-                </a:solidFill>
-              </a:rPr>
-              <a:t>property.Status</a:t>
-            </a:r>
-            <a:r>
-              <a:rPr lang="es-ES" sz="1600" dirty="0">
-                <a:solidFill>
-                  <a:schemeClr val="bg1">
-                    <a:lumMod val="95000"/>
-                  </a:schemeClr>
-                </a:solidFill>
-              </a:rPr>
-              <a:t> = "active"</a:t>
-            </a:r>
-            <a:br>
-              <a:rPr lang="es-ES" sz="1600" dirty="0">
-                <a:solidFill>
-                  <a:schemeClr val="bg1">
-                    <a:lumMod val="95000"/>
-                  </a:schemeClr>
-                </a:solidFill>
-              </a:rPr>
-            </a:br>
-            <a:r>
-              <a:rPr lang="es-ES" sz="1600" dirty="0">
-                <a:solidFill>
-                  <a:schemeClr val="bg1">
-                    <a:lumMod val="95000"/>
-                  </a:schemeClr>
-                </a:solidFill>
-              </a:rPr>
-              <a:t>    </a:t>
-            </a:r>
-            <a:r>
-              <a:rPr lang="es-ES" sz="1600" dirty="0" err="1">
-                <a:solidFill>
-                  <a:schemeClr val="bg1">
-                    <a:lumMod val="95000"/>
-                  </a:schemeClr>
-                </a:solidFill>
-              </a:rPr>
-              <a:t>propertyJSON</a:t>
-            </a:r>
-            <a:r>
-              <a:rPr lang="es-ES" sz="1600" dirty="0">
-                <a:solidFill>
-                  <a:schemeClr val="bg1">
-                    <a:lumMod val="95000"/>
-                  </a:schemeClr>
-                </a:solidFill>
-              </a:rPr>
-              <a:t>, _ := </a:t>
-            </a:r>
-            <a:r>
-              <a:rPr lang="es-ES" sz="1600" dirty="0" err="1">
-                <a:solidFill>
-                  <a:schemeClr val="bg1">
-                    <a:lumMod val="95000"/>
-                  </a:schemeClr>
-                </a:solidFill>
-              </a:rPr>
-              <a:t>json.Marshal</a:t>
-            </a:r>
-            <a:r>
-              <a:rPr lang="es-ES" sz="1600" dirty="0">
-                <a:solidFill>
-                  <a:schemeClr val="bg1">
-                    <a:lumMod val="95000"/>
-                  </a:schemeClr>
-                </a:solidFill>
-              </a:rPr>
-              <a:t>(</a:t>
-            </a:r>
-            <a:r>
-              <a:rPr lang="es-ES" sz="1600" dirty="0" err="1">
-                <a:solidFill>
-                  <a:schemeClr val="bg1">
-                    <a:lumMod val="95000"/>
-                  </a:schemeClr>
-                </a:solidFill>
-              </a:rPr>
-              <a:t>property</a:t>
-            </a:r>
-            <a:r>
-              <a:rPr lang="es-ES" sz="1600" dirty="0">
-                <a:solidFill>
-                  <a:schemeClr val="bg1">
-                    <a:lumMod val="95000"/>
-                  </a:schemeClr>
-                </a:solidFill>
-              </a:rPr>
-              <a:t>)</a:t>
-            </a:r>
-            <a:br>
-              <a:rPr lang="es-ES" sz="1600" dirty="0">
-                <a:solidFill>
-                  <a:schemeClr val="bg1">
-                    <a:lumMod val="95000"/>
-                  </a:schemeClr>
-                </a:solidFill>
-              </a:rPr>
-            </a:br>
-            <a:r>
-              <a:rPr lang="es-ES" sz="1600" dirty="0">
-                <a:solidFill>
-                  <a:schemeClr val="bg1">
-                    <a:lumMod val="95000"/>
-                  </a:schemeClr>
-                </a:solidFill>
-              </a:rPr>
-              <a:t>    </a:t>
-            </a:r>
-            <a:r>
-              <a:rPr lang="es-ES" sz="1600" dirty="0" err="1">
-                <a:solidFill>
-                  <a:schemeClr val="bg1">
-                    <a:lumMod val="95000"/>
-                  </a:schemeClr>
-                </a:solidFill>
-              </a:rPr>
-              <a:t>return</a:t>
-            </a:r>
-            <a:r>
-              <a:rPr lang="es-ES" sz="1600" dirty="0">
-                <a:solidFill>
-                  <a:schemeClr val="bg1">
-                    <a:lumMod val="95000"/>
-                  </a:schemeClr>
-                </a:solidFill>
-              </a:rPr>
-              <a:t> </a:t>
-            </a:r>
-            <a:r>
-              <a:rPr lang="es-ES" sz="1600" dirty="0" err="1">
-                <a:solidFill>
-                  <a:schemeClr val="bg1">
-                    <a:lumMod val="95000"/>
-                  </a:schemeClr>
-                </a:solidFill>
-              </a:rPr>
-              <a:t>ctx.GetStub</a:t>
-            </a:r>
-            <a:r>
-              <a:rPr lang="es-ES" sz="1600" dirty="0">
-                <a:solidFill>
-                  <a:schemeClr val="bg1">
-                    <a:lumMod val="95000"/>
-                  </a:schemeClr>
-                </a:solidFill>
-              </a:rPr>
-              <a:t>().</a:t>
-            </a:r>
-            <a:r>
-              <a:rPr lang="es-ES" sz="1600" dirty="0" err="1">
-                <a:solidFill>
-                  <a:schemeClr val="bg1">
-                    <a:lumMod val="95000"/>
-                  </a:schemeClr>
-                </a:solidFill>
-              </a:rPr>
-              <a:t>PutState</a:t>
-            </a:r>
-            <a:r>
-              <a:rPr lang="es-ES" sz="1600" dirty="0">
-                <a:solidFill>
-                  <a:schemeClr val="bg1">
-                    <a:lumMod val="95000"/>
-                  </a:schemeClr>
-                </a:solidFill>
-              </a:rPr>
-              <a:t>(id, </a:t>
-            </a:r>
-            <a:r>
-              <a:rPr lang="es-ES" sz="1600" dirty="0" err="1">
-                <a:solidFill>
-                  <a:schemeClr val="bg1">
-                    <a:lumMod val="95000"/>
-                  </a:schemeClr>
-                </a:solidFill>
-              </a:rPr>
-              <a:t>propertyJSON</a:t>
-            </a:r>
-            <a:r>
-              <a:rPr lang="es-ES" sz="1600" dirty="0">
-                <a:solidFill>
-                  <a:schemeClr val="bg1">
-                    <a:lumMod val="95000"/>
-                  </a:schemeClr>
-                </a:solidFill>
-              </a:rPr>
-              <a:t>)</a:t>
-            </a:r>
-            <a:br>
-              <a:rPr lang="es-ES" sz="1600" dirty="0">
-                <a:solidFill>
-                  <a:schemeClr val="bg1">
-                    <a:lumMod val="95000"/>
-                  </a:schemeClr>
-                </a:solidFill>
-              </a:rPr>
-            </a:br>
-            <a:r>
-              <a:rPr lang="es-ES" sz="1600" dirty="0">
-                <a:solidFill>
-                  <a:schemeClr val="bg1">
-                    <a:lumMod val="95000"/>
-                  </a:schemeClr>
-                </a:solidFill>
-              </a:rPr>
               <a:t>}</a:t>
             </a:r>
-            <a:endParaRPr lang="es-ES" sz="1600" dirty="0"/>
           </a:p>
         </p:txBody>
       </p:sp>
@@ -16567,7 +12842,7 @@
               </a:defRPr>
             </a:pPr>
             <a:r>
-              <a:t>GO</a:t>
+              <a:t>NODE.JS</a:t>
             </a:r>
           </a:p>
         </p:txBody>
@@ -16636,7 +12911,8 @@
           <a:bodyPr wrap="square"/>
           <a:lstStyle/>
           <a:p>
-            <a:br>
+            <a:pPr/>
+            <a:r>
               <a:rPr sz="1600" dirty="0">
                 <a:solidFill>
                   <a:schemeClr val="bg1">
@@ -16644,7 +12920,11 @@
                   </a:schemeClr>
                 </a:solidFill>
               </a:rPr>
-            </a:br>
+              <a:t>// Solo un usuario con rol "registrador" puede registrar propiedades</a:t>
+            </a:r>
+          </a:p>
+          <a:p>
+            <a:pPr/>
             <a:r>
               <a:rPr sz="1600" dirty="0">
                 <a:solidFill>
@@ -16653,18 +12933,11 @@
                   </a:schemeClr>
                 </a:solidFill>
               </a:rPr>
-              <a:t>// Solo un </a:t>
-            </a:r>
-            <a:r>
-              <a:rPr sz="1600" dirty="0" err="1">
-                <a:solidFill>
-                  <a:schemeClr val="bg1">
-                    <a:lumMod val="95000"/>
-                  </a:schemeClr>
-                </a:solidFill>
-              </a:rPr>
-              <a:t>usuario</a:t>
-            </a:r>
+              <a:t>async RegisterProperty(ctx, id, address, owner) {</a:t>
+            </a:r>
+          </a:p>
+          <a:p>
+            <a:pPr/>
             <a:r>
               <a:rPr sz="1600" dirty="0">
                 <a:solidFill>
@@ -16673,18 +12946,11 @@
                   </a:schemeClr>
                 </a:solidFill>
               </a:rPr>
-              <a:t> con </a:t>
-            </a:r>
-            <a:r>
-              <a:rPr sz="1600" dirty="0" err="1">
-                <a:solidFill>
-                  <a:schemeClr val="bg1">
-                    <a:lumMod val="95000"/>
-                  </a:schemeClr>
-                </a:solidFill>
-              </a:rPr>
-              <a:t>rol</a:t>
-            </a:r>
+              <a:t>    // Verificar atributo "role" en el certificado X.509</a:t>
+            </a:r>
+          </a:p>
+          <a:p>
+            <a:pPr/>
             <a:r>
               <a:rPr sz="1600" dirty="0">
                 <a:solidFill>
@@ -16693,18 +12959,11 @@
                   </a:schemeClr>
                 </a:solidFill>
               </a:rPr>
-              <a:t> "</a:t>
-            </a:r>
-            <a:r>
-              <a:rPr sz="1600" dirty="0" err="1">
-                <a:solidFill>
-                  <a:schemeClr val="bg1">
-                    <a:lumMod val="95000"/>
-                  </a:schemeClr>
-                </a:solidFill>
-              </a:rPr>
-              <a:t>registrador</a:t>
-            </a:r>
+              <a:t>    const ok = ctx.clientIdentity</a:t>
+            </a:r>
+          </a:p>
+          <a:p>
+            <a:pPr/>
             <a:r>
               <a:rPr sz="1600" dirty="0">
                 <a:solidFill>
@@ -16713,18 +12972,11 @@
                   </a:schemeClr>
                 </a:solidFill>
               </a:rPr>
-              <a:t>" </a:t>
-            </a:r>
-            <a:r>
-              <a:rPr sz="1600" dirty="0" err="1">
-                <a:solidFill>
-                  <a:schemeClr val="bg1">
-                    <a:lumMod val="95000"/>
-                  </a:schemeClr>
-                </a:solidFill>
-              </a:rPr>
-              <a:t>puede</a:t>
-            </a:r>
+              <a:t>        .assertAttributeValue('role', 'registrador');</a:t>
+            </a:r>
+          </a:p>
+          <a:p>
+            <a:pPr/>
             <a:r>
               <a:rPr sz="1600" dirty="0">
                 <a:solidFill>
@@ -16733,19 +12985,12 @@
                   </a:schemeClr>
                 </a:solidFill>
               </a:rPr>
-              <a:t> registrar </a:t>
-            </a:r>
-            <a:r>
-              <a:rPr sz="1600" dirty="0" err="1">
-                <a:solidFill>
-                  <a:schemeClr val="bg1">
-                    <a:lumMod val="95000"/>
-                  </a:schemeClr>
-                </a:solidFill>
-              </a:rPr>
-              <a:t>propiedades</a:t>
-            </a:r>
-            <a:br>
+              <a:t>    if (!ok) {</a:t>
+            </a:r>
+          </a:p>
+          <a:p>
+            <a:pPr/>
+            <a:r>
               <a:rPr sz="1600" dirty="0">
                 <a:solidFill>
                   <a:schemeClr val="bg1">
@@ -16753,17 +12998,11 @@
                   </a:schemeClr>
                 </a:solidFill>
               </a:rPr>
-            </a:br>
-            <a:r>
-              <a:rPr sz="1600" dirty="0" err="1">
-                <a:solidFill>
-                  <a:schemeClr val="bg1">
-                    <a:lumMod val="95000"/>
-                  </a:schemeClr>
-                </a:solidFill>
-              </a:rPr>
-              <a:t>func</a:t>
-            </a:r>
+              <a:t>        throw new Error(</a:t>
+            </a:r>
+          </a:p>
+          <a:p>
+            <a:pPr/>
             <a:r>
               <a:rPr sz="1600" dirty="0">
                 <a:solidFill>
@@ -16772,18 +13011,11 @@
                   </a:schemeClr>
                 </a:solidFill>
               </a:rPr>
-              <a:t> (s *</a:t>
-            </a:r>
-            <a:r>
-              <a:rPr sz="1600" dirty="0" err="1">
-                <a:solidFill>
-                  <a:schemeClr val="bg1">
-                    <a:lumMod val="95000"/>
-                  </a:schemeClr>
-                </a:solidFill>
-              </a:rPr>
-              <a:t>SmartContract</a:t>
-            </a:r>
+              <a:t>            'solo registradores pueden crear propiedades');</a:t>
+            </a:r>
+          </a:p>
+          <a:p>
+            <a:pPr/>
             <a:r>
               <a:rPr sz="1600" dirty="0">
                 <a:solidFill>
@@ -16792,18 +13024,11 @@
                   </a:schemeClr>
                 </a:solidFill>
               </a:rPr>
-              <a:t>) </a:t>
-            </a:r>
-            <a:r>
-              <a:rPr sz="1600" dirty="0" err="1">
-                <a:solidFill>
-                  <a:schemeClr val="bg1">
-                    <a:lumMod val="95000"/>
-                  </a:schemeClr>
-                </a:solidFill>
-              </a:rPr>
-              <a:t>RegisterProperty</a:t>
-            </a:r>
+              <a:t>    }</a:t>
+            </a:r>
+          </a:p>
+          <a:p>
+            <a:pPr/>
             <a:r>
               <a:rPr sz="1600" dirty="0">
                 <a:solidFill>
@@ -16812,18 +13037,11 @@
                   </a:schemeClr>
                 </a:solidFill>
               </a:rPr>
-              <a:t>(</a:t>
-            </a:r>
-            <a:r>
-              <a:rPr sz="1600" dirty="0" err="1">
-                <a:solidFill>
-                  <a:schemeClr val="bg1">
-                    <a:lumMod val="95000"/>
-                  </a:schemeClr>
-                </a:solidFill>
-              </a:rPr>
-              <a:t>ctx</a:t>
-            </a:r>
+              <a:t/>
+            </a:r>
+          </a:p>
+          <a:p>
+            <a:pPr/>
             <a:r>
               <a:rPr sz="1600" dirty="0">
                 <a:solidFill>
@@ -16832,18 +13050,11 @@
                   </a:schemeClr>
                 </a:solidFill>
               </a:rPr>
-              <a:t> </a:t>
-            </a:r>
-            <a:r>
-              <a:rPr sz="1600" dirty="0" err="1">
-                <a:solidFill>
-                  <a:schemeClr val="bg1">
-                    <a:lumMod val="95000"/>
-                  </a:schemeClr>
-                </a:solidFill>
-              </a:rPr>
-              <a:t>contractapi.TransactionContextInterface</a:t>
-            </a:r>
+              <a:t>    // El atributo se anade al certificado durante el enrollment con Fabric CA:</a:t>
+            </a:r>
+          </a:p>
+          <a:p>
+            <a:pPr/>
             <a:r>
               <a:rPr sz="1600" dirty="0">
                 <a:solidFill>
@@ -16852,9 +13063,12 @@
                   </a:schemeClr>
                 </a:solidFill>
               </a:rPr>
-              <a:t>,</a:t>
-            </a:r>
-            <a:br>
+              <a:t>    //   fabric-ca-client enroll ... --enrollment.attrs "role=registrador"</a:t>
+            </a:r>
+          </a:p>
+          <a:p>
+            <a:pPr/>
+            <a:r>
               <a:rPr sz="1600" dirty="0">
                 <a:solidFill>
                   <a:schemeClr val="bg1">
@@ -16862,7 +13076,11 @@
                   </a:schemeClr>
                 </a:solidFill>
               </a:rPr>
-            </a:br>
+              <a:t/>
+            </a:r>
+          </a:p>
+          <a:p>
+            <a:pPr/>
             <a:r>
               <a:rPr sz="1600" dirty="0">
                 <a:solidFill>
@@ -16871,9 +13089,12 @@
                   </a:schemeClr>
                 </a:solidFill>
               </a:rPr>
-              <a:t>    id string, address string, owner string) error {</a:t>
-            </a:r>
-            <a:br>
+              <a:t>    const property = {</a:t>
+            </a:r>
+          </a:p>
+          <a:p>
+            <a:pPr/>
+            <a:r>
               <a:rPr sz="1600" dirty="0">
                 <a:solidFill>
                   <a:schemeClr val="bg1">
@@ -16881,7 +13102,11 @@
                   </a:schemeClr>
                 </a:solidFill>
               </a:rPr>
-            </a:br>
+              <a:t>        docType: 'property',</a:t>
+            </a:r>
+          </a:p>
+          <a:p>
+            <a:pPr/>
             <a:r>
               <a:rPr sz="1600" dirty="0">
                 <a:solidFill>
@@ -16890,18 +13115,11 @@
                   </a:schemeClr>
                 </a:solidFill>
               </a:rPr>
-              <a:t>    // </a:t>
-            </a:r>
-            <a:r>
-              <a:rPr sz="1600" dirty="0" err="1">
-                <a:solidFill>
-                  <a:schemeClr val="bg1">
-                    <a:lumMod val="95000"/>
-                  </a:schemeClr>
-                </a:solidFill>
-              </a:rPr>
-              <a:t>Verificar</a:t>
-            </a:r>
+              <a:t>        id,</a:t>
+            </a:r>
+          </a:p>
+          <a:p>
+            <a:pPr/>
             <a:r>
               <a:rPr sz="1600" dirty="0">
                 <a:solidFill>
@@ -16910,18 +13128,11 @@
                   </a:schemeClr>
                 </a:solidFill>
               </a:rPr>
-              <a:t> </a:t>
-            </a:r>
-            <a:r>
-              <a:rPr sz="1600" dirty="0" err="1">
-                <a:solidFill>
-                  <a:schemeClr val="bg1">
-                    <a:lumMod val="95000"/>
-                  </a:schemeClr>
-                </a:solidFill>
-              </a:rPr>
-              <a:t>atributo</a:t>
-            </a:r>
+              <a:t>        address,</a:t>
+            </a:r>
+          </a:p>
+          <a:p>
+            <a:pPr/>
             <a:r>
               <a:rPr sz="1600" dirty="0">
                 <a:solidFill>
@@ -16930,18 +13141,11 @@
                   </a:schemeClr>
                 </a:solidFill>
               </a:rPr>
-              <a:t> "role" </a:t>
-            </a:r>
-            <a:r>
-              <a:rPr sz="1600" dirty="0" err="1">
-                <a:solidFill>
-                  <a:schemeClr val="bg1">
-                    <a:lumMod val="95000"/>
-                  </a:schemeClr>
-                </a:solidFill>
-              </a:rPr>
-              <a:t>en</a:t>
-            </a:r>
+              <a:t>        owner,</a:t>
+            </a:r>
+          </a:p>
+          <a:p>
+            <a:pPr/>
             <a:r>
               <a:rPr sz="1600" dirty="0">
                 <a:solidFill>
@@ -16950,18 +13154,11 @@
                   </a:schemeClr>
                 </a:solidFill>
               </a:rPr>
-              <a:t> </a:t>
-            </a:r>
-            <a:r>
-              <a:rPr sz="1600" dirty="0" err="1">
-                <a:solidFill>
-                  <a:schemeClr val="bg1">
-                    <a:lumMod val="95000"/>
-                  </a:schemeClr>
-                </a:solidFill>
-              </a:rPr>
-              <a:t>el</a:t>
-            </a:r>
+              <a:t>        status: 'active'</a:t>
+            </a:r>
+          </a:p>
+          <a:p>
+            <a:pPr/>
             <a:r>
               <a:rPr sz="1600" dirty="0">
                 <a:solidFill>
@@ -16970,18 +13167,11 @@
                   </a:schemeClr>
                 </a:solidFill>
               </a:rPr>
-              <a:t> </a:t>
-            </a:r>
-            <a:r>
-              <a:rPr sz="1600" dirty="0" err="1">
-                <a:solidFill>
-                  <a:schemeClr val="bg1">
-                    <a:lumMod val="95000"/>
-                  </a:schemeClr>
-                </a:solidFill>
-              </a:rPr>
-              <a:t>certificado</a:t>
-            </a:r>
+              <a:t>    };</a:t>
+            </a:r>
+          </a:p>
+          <a:p>
+            <a:pPr/>
             <a:r>
               <a:rPr sz="1600" dirty="0">
                 <a:solidFill>
@@ -16990,9 +13180,12 @@
                   </a:schemeClr>
                 </a:solidFill>
               </a:rPr>
-              <a:t> X.509</a:t>
-            </a:r>
-            <a:br>
+              <a:t/>
+            </a:r>
+          </a:p>
+          <a:p>
+            <a:pPr/>
+            <a:r>
               <a:rPr sz="1600" dirty="0">
                 <a:solidFill>
                   <a:schemeClr val="bg1">
@@ -17000,7 +13193,11 @@
                   </a:schemeClr>
                 </a:solidFill>
               </a:rPr>
-            </a:br>
+              <a:t>    await ctx.stub.putState(id,</a:t>
+            </a:r>
+          </a:p>
+          <a:p>
+            <a:pPr/>
             <a:r>
               <a:rPr sz="1600" dirty="0">
                 <a:solidFill>
@@ -17009,635 +13206,11 @@
                   </a:schemeClr>
                 </a:solidFill>
               </a:rPr>
-              <a:t>    err := </a:t>
-            </a:r>
-            <a:r>
-              <a:rPr sz="1600" dirty="0" err="1">
-                <a:solidFill>
-                  <a:schemeClr val="bg1">
-                    <a:lumMod val="95000"/>
-                  </a:schemeClr>
-                </a:solidFill>
-              </a:rPr>
-              <a:t>ctx.GetClientIdentity</a:t>
-            </a:r>
-            <a:r>
-              <a:rPr sz="1600" dirty="0">
-                <a:solidFill>
-                  <a:schemeClr val="bg1">
-                    <a:lumMod val="95000"/>
-                  </a:schemeClr>
-                </a:solidFill>
-              </a:rPr>
-              <a:t>().AssertAttributeValue("role", "</a:t>
-            </a:r>
-            <a:r>
-              <a:rPr sz="1600" dirty="0" err="1">
-                <a:solidFill>
-                  <a:schemeClr val="bg1">
-                    <a:lumMod val="95000"/>
-                  </a:schemeClr>
-                </a:solidFill>
-              </a:rPr>
-              <a:t>registrador</a:t>
-            </a:r>
-            <a:r>
-              <a:rPr sz="1600" dirty="0">
-                <a:solidFill>
-                  <a:schemeClr val="bg1">
-                    <a:lumMod val="95000"/>
-                  </a:schemeClr>
-                </a:solidFill>
-              </a:rPr>
-              <a:t>")</a:t>
-            </a:r>
-            <a:br>
-              <a:rPr sz="1600" dirty="0">
-                <a:solidFill>
-                  <a:schemeClr val="bg1">
-                    <a:lumMod val="95000"/>
-                  </a:schemeClr>
-                </a:solidFill>
-              </a:rPr>
-            </a:br>
-            <a:r>
-              <a:rPr sz="1600" dirty="0">
-                <a:solidFill>
-                  <a:schemeClr val="bg1">
-                    <a:lumMod val="95000"/>
-                  </a:schemeClr>
-                </a:solidFill>
-              </a:rPr>
-              <a:t>    if err != nil {</a:t>
-            </a:r>
-            <a:br>
-              <a:rPr sz="1600" dirty="0">
-                <a:solidFill>
-                  <a:schemeClr val="bg1">
-                    <a:lumMod val="95000"/>
-                  </a:schemeClr>
-                </a:solidFill>
-              </a:rPr>
-            </a:br>
-            <a:r>
-              <a:rPr sz="1600" dirty="0">
-                <a:solidFill>
-                  <a:schemeClr val="bg1">
-                    <a:lumMod val="95000"/>
-                  </a:schemeClr>
-                </a:solidFill>
-              </a:rPr>
-              <a:t>        return </a:t>
-            </a:r>
-            <a:r>
-              <a:rPr sz="1600" dirty="0" err="1">
-                <a:solidFill>
-                  <a:schemeClr val="bg1">
-                    <a:lumMod val="95000"/>
-                  </a:schemeClr>
-                </a:solidFill>
-              </a:rPr>
-              <a:t>fmt.Errorf</a:t>
-            </a:r>
-            <a:r>
-              <a:rPr sz="1600" dirty="0">
-                <a:solidFill>
-                  <a:schemeClr val="bg1">
-                    <a:lumMod val="95000"/>
-                  </a:schemeClr>
-                </a:solidFill>
-              </a:rPr>
-              <a:t>("solo </a:t>
-            </a:r>
-            <a:r>
-              <a:rPr sz="1600" dirty="0" err="1">
-                <a:solidFill>
-                  <a:schemeClr val="bg1">
-                    <a:lumMod val="95000"/>
-                  </a:schemeClr>
-                </a:solidFill>
-              </a:rPr>
-              <a:t>registradores</a:t>
-            </a:r>
-            <a:r>
-              <a:rPr sz="1600" dirty="0">
-                <a:solidFill>
-                  <a:schemeClr val="bg1">
-                    <a:lumMod val="95000"/>
-                  </a:schemeClr>
-                </a:solidFill>
-              </a:rPr>
-              <a:t> </a:t>
-            </a:r>
-            <a:r>
-              <a:rPr sz="1600" dirty="0" err="1">
-                <a:solidFill>
-                  <a:schemeClr val="bg1">
-                    <a:lumMod val="95000"/>
-                  </a:schemeClr>
-                </a:solidFill>
-              </a:rPr>
-              <a:t>pueden</a:t>
-            </a:r>
-            <a:r>
-              <a:rPr sz="1600" dirty="0">
-                <a:solidFill>
-                  <a:schemeClr val="bg1">
-                    <a:lumMod val="95000"/>
-                  </a:schemeClr>
-                </a:solidFill>
-              </a:rPr>
-              <a:t> </a:t>
-            </a:r>
-            <a:r>
-              <a:rPr sz="1600" dirty="0" err="1">
-                <a:solidFill>
-                  <a:schemeClr val="bg1">
-                    <a:lumMod val="95000"/>
-                  </a:schemeClr>
-                </a:solidFill>
-              </a:rPr>
-              <a:t>crear</a:t>
-            </a:r>
-            <a:r>
-              <a:rPr sz="1600" dirty="0">
-                <a:solidFill>
-                  <a:schemeClr val="bg1">
-                    <a:lumMod val="95000"/>
-                  </a:schemeClr>
-                </a:solidFill>
-              </a:rPr>
-              <a:t> </a:t>
-            </a:r>
-            <a:r>
-              <a:rPr sz="1600" dirty="0" err="1">
-                <a:solidFill>
-                  <a:schemeClr val="bg1">
-                    <a:lumMod val="95000"/>
-                  </a:schemeClr>
-                </a:solidFill>
-              </a:rPr>
-              <a:t>propiedades</a:t>
-            </a:r>
-            <a:r>
-              <a:rPr sz="1600" dirty="0">
-                <a:solidFill>
-                  <a:schemeClr val="bg1">
-                    <a:lumMod val="95000"/>
-                  </a:schemeClr>
-                </a:solidFill>
-              </a:rPr>
-              <a:t>: %v", err)</a:t>
-            </a:r>
-            <a:br>
-              <a:rPr sz="1600" dirty="0">
-                <a:solidFill>
-                  <a:schemeClr val="bg1">
-                    <a:lumMod val="95000"/>
-                  </a:schemeClr>
-                </a:solidFill>
-              </a:rPr>
-            </a:br>
-            <a:r>
-              <a:rPr sz="1600" dirty="0">
-                <a:solidFill>
-                  <a:schemeClr val="bg1">
-                    <a:lumMod val="95000"/>
-                  </a:schemeClr>
-                </a:solidFill>
-              </a:rPr>
-              <a:t>    }</a:t>
-            </a:r>
-            <a:br>
-              <a:rPr sz="1600" dirty="0">
-                <a:solidFill>
-                  <a:schemeClr val="bg1">
-                    <a:lumMod val="95000"/>
-                  </a:schemeClr>
-                </a:solidFill>
-              </a:rPr>
-            </a:br>
-            <a:r>
-              <a:rPr sz="1600" dirty="0">
-                <a:solidFill>
-                  <a:schemeClr val="bg1">
-                    <a:lumMod val="95000"/>
-                  </a:schemeClr>
-                </a:solidFill>
-              </a:rPr>
-              <a:t>    // El </a:t>
-            </a:r>
-            <a:r>
-              <a:rPr sz="1600" dirty="0" err="1">
-                <a:solidFill>
-                  <a:schemeClr val="bg1">
-                    <a:lumMod val="95000"/>
-                  </a:schemeClr>
-                </a:solidFill>
-              </a:rPr>
-              <a:t>atributo</a:t>
-            </a:r>
-            <a:r>
-              <a:rPr sz="1600" dirty="0">
-                <a:solidFill>
-                  <a:schemeClr val="bg1">
-                    <a:lumMod val="95000"/>
-                  </a:schemeClr>
-                </a:solidFill>
-              </a:rPr>
-              <a:t> se </a:t>
-            </a:r>
-            <a:r>
-              <a:rPr sz="1600" dirty="0" err="1">
-                <a:solidFill>
-                  <a:schemeClr val="bg1">
-                    <a:lumMod val="95000"/>
-                  </a:schemeClr>
-                </a:solidFill>
-              </a:rPr>
-              <a:t>anade</a:t>
-            </a:r>
-            <a:r>
-              <a:rPr sz="1600" dirty="0">
-                <a:solidFill>
-                  <a:schemeClr val="bg1">
-                    <a:lumMod val="95000"/>
-                  </a:schemeClr>
-                </a:solidFill>
-              </a:rPr>
-              <a:t> al </a:t>
-            </a:r>
-            <a:r>
-              <a:rPr sz="1600" dirty="0" err="1">
-                <a:solidFill>
-                  <a:schemeClr val="bg1">
-                    <a:lumMod val="95000"/>
-                  </a:schemeClr>
-                </a:solidFill>
-              </a:rPr>
-              <a:t>certificado</a:t>
-            </a:r>
-            <a:r>
-              <a:rPr sz="1600" dirty="0">
-                <a:solidFill>
-                  <a:schemeClr val="bg1">
-                    <a:lumMod val="95000"/>
-                  </a:schemeClr>
-                </a:solidFill>
-              </a:rPr>
-              <a:t> </a:t>
-            </a:r>
-            <a:r>
-              <a:rPr sz="1600" dirty="0" err="1">
-                <a:solidFill>
-                  <a:schemeClr val="bg1">
-                    <a:lumMod val="95000"/>
-                  </a:schemeClr>
-                </a:solidFill>
-              </a:rPr>
-              <a:t>durante</a:t>
-            </a:r>
-            <a:r>
-              <a:rPr sz="1600" dirty="0">
-                <a:solidFill>
-                  <a:schemeClr val="bg1">
-                    <a:lumMod val="95000"/>
-                  </a:schemeClr>
-                </a:solidFill>
-              </a:rPr>
-              <a:t> </a:t>
-            </a:r>
-            <a:r>
-              <a:rPr sz="1600" dirty="0" err="1">
-                <a:solidFill>
-                  <a:schemeClr val="bg1">
-                    <a:lumMod val="95000"/>
-                  </a:schemeClr>
-                </a:solidFill>
-              </a:rPr>
-              <a:t>el</a:t>
-            </a:r>
-            <a:r>
-              <a:rPr sz="1600" dirty="0">
-                <a:solidFill>
-                  <a:schemeClr val="bg1">
-                    <a:lumMod val="95000"/>
-                  </a:schemeClr>
-                </a:solidFill>
-              </a:rPr>
-              <a:t> enrollment con Fabric CA:</a:t>
-            </a:r>
-            <a:br>
-              <a:rPr sz="1600" dirty="0">
-                <a:solidFill>
-                  <a:schemeClr val="bg1">
-                    <a:lumMod val="95000"/>
-                  </a:schemeClr>
-                </a:solidFill>
-              </a:rPr>
-            </a:br>
-            <a:r>
-              <a:rPr sz="1600" dirty="0">
-                <a:solidFill>
-                  <a:schemeClr val="bg1">
-                    <a:lumMod val="95000"/>
-                  </a:schemeClr>
-                </a:solidFill>
-              </a:rPr>
-              <a:t>    //   fabric-ca-client enroll ... --</a:t>
-            </a:r>
-            <a:r>
-              <a:rPr sz="1600" dirty="0" err="1">
-                <a:solidFill>
-                  <a:schemeClr val="bg1">
-                    <a:lumMod val="95000"/>
-                  </a:schemeClr>
-                </a:solidFill>
-              </a:rPr>
-              <a:t>enrollment.attrs</a:t>
-            </a:r>
-            <a:r>
-              <a:rPr sz="1600" dirty="0">
-                <a:solidFill>
-                  <a:schemeClr val="bg1">
-                    <a:lumMod val="95000"/>
-                  </a:schemeClr>
-                </a:solidFill>
-              </a:rPr>
-              <a:t> "role=</a:t>
-            </a:r>
-            <a:r>
-              <a:rPr sz="1600" dirty="0" err="1">
-                <a:solidFill>
-                  <a:schemeClr val="bg1">
-                    <a:lumMod val="95000"/>
-                  </a:schemeClr>
-                </a:solidFill>
-              </a:rPr>
-              <a:t>registrador</a:t>
-            </a:r>
-            <a:r>
-              <a:rPr sz="1600" dirty="0">
-                <a:solidFill>
-                  <a:schemeClr val="bg1">
-                    <a:lumMod val="95000"/>
-                  </a:schemeClr>
-                </a:solidFill>
-              </a:rPr>
-              <a:t>"</a:t>
-            </a:r>
-            <a:br>
-              <a:rPr sz="1600" dirty="0">
-                <a:solidFill>
-                  <a:schemeClr val="bg1">
-                    <a:lumMod val="95000"/>
-                  </a:schemeClr>
-                </a:solidFill>
-              </a:rPr>
-            </a:br>
-            <a:br>
-              <a:rPr sz="1600" dirty="0">
-                <a:solidFill>
-                  <a:schemeClr val="bg1">
-                    <a:lumMod val="95000"/>
-                  </a:schemeClr>
-                </a:solidFill>
-              </a:rPr>
-            </a:br>
-            <a:r>
-              <a:rPr sz="1600" dirty="0">
-                <a:solidFill>
-                  <a:schemeClr val="bg1">
-                    <a:lumMod val="95000"/>
-                  </a:schemeClr>
-                </a:solidFill>
-              </a:rPr>
-              <a:t>    property := Property{</a:t>
-            </a:r>
-            <a:br>
-              <a:rPr sz="1600" dirty="0">
-                <a:solidFill>
-                  <a:schemeClr val="bg1">
-                    <a:lumMod val="95000"/>
-                  </a:schemeClr>
-                </a:solidFill>
-              </a:rPr>
-            </a:br>
-            <a:r>
-              <a:rPr sz="1600" dirty="0">
-                <a:solidFill>
-                  <a:schemeClr val="bg1">
-                    <a:lumMod val="95000"/>
-                  </a:schemeClr>
-                </a:solidFill>
-              </a:rPr>
-              <a:t>        </a:t>
-            </a:r>
-            <a:r>
-              <a:rPr sz="1600" dirty="0" err="1">
-                <a:solidFill>
-                  <a:schemeClr val="bg1">
-                    <a:lumMod val="95000"/>
-                  </a:schemeClr>
-                </a:solidFill>
-              </a:rPr>
-              <a:t>DocType</a:t>
-            </a:r>
-            <a:r>
-              <a:rPr sz="1600" dirty="0">
-                <a:solidFill>
-                  <a:schemeClr val="bg1">
-                    <a:lumMod val="95000"/>
-                  </a:schemeClr>
-                </a:solidFill>
-              </a:rPr>
-              <a:t>: "property", ID: id, Address: address,</a:t>
-            </a:r>
-            <a:br>
-              <a:rPr sz="1600" dirty="0">
-                <a:solidFill>
-                  <a:schemeClr val="bg1">
-                    <a:lumMod val="95000"/>
-                  </a:schemeClr>
-                </a:solidFill>
-              </a:rPr>
-            </a:br>
-            <a:r>
-              <a:rPr sz="1600" dirty="0">
-                <a:solidFill>
-                  <a:schemeClr val="bg1">
-                    <a:lumMod val="95000"/>
-                  </a:schemeClr>
-                </a:solidFill>
-              </a:rPr>
-              <a:t>        Owner: owner, Status: "active",</a:t>
-            </a:r>
-            <a:br>
-              <a:rPr sz="1600" dirty="0">
-                <a:solidFill>
-                  <a:schemeClr val="bg1">
-                    <a:lumMod val="95000"/>
-                  </a:schemeClr>
-                </a:solidFill>
-              </a:rPr>
-            </a:br>
-            <a:r>
-              <a:rPr sz="1600" dirty="0">
-                <a:solidFill>
-                  <a:schemeClr val="bg1">
-                    <a:lumMod val="95000"/>
-                  </a:schemeClr>
-                </a:solidFill>
-              </a:rPr>
-              <a:t>    }</a:t>
-            </a:r>
-            <a:br>
-              <a:rPr sz="1600" dirty="0">
-                <a:solidFill>
-                  <a:schemeClr val="bg1">
-                    <a:lumMod val="95000"/>
-                  </a:schemeClr>
-                </a:solidFill>
-              </a:rPr>
-            </a:br>
-            <a:r>
-              <a:rPr sz="1600" dirty="0">
-                <a:solidFill>
-                  <a:schemeClr val="bg1">
-                    <a:lumMod val="95000"/>
-                  </a:schemeClr>
-                </a:solidFill>
-              </a:rPr>
-              <a:t>    </a:t>
-            </a:r>
-            <a:r>
-              <a:rPr sz="1600" dirty="0" err="1">
-                <a:solidFill>
-                  <a:schemeClr val="bg1">
-                    <a:lumMod val="95000"/>
-                  </a:schemeClr>
-                </a:solidFill>
-              </a:rPr>
-              <a:t>propertyJSON</a:t>
-            </a:r>
-            <a:r>
-              <a:rPr sz="1600" dirty="0">
-                <a:solidFill>
-                  <a:schemeClr val="bg1">
-                    <a:lumMod val="95000"/>
-                  </a:schemeClr>
-                </a:solidFill>
-              </a:rPr>
-              <a:t>, _ := </a:t>
-            </a:r>
-            <a:r>
-              <a:rPr sz="1600" dirty="0" err="1">
-                <a:solidFill>
-                  <a:schemeClr val="bg1">
-                    <a:lumMod val="95000"/>
-                  </a:schemeClr>
-                </a:solidFill>
-              </a:rPr>
-              <a:t>json.Marshal</a:t>
-            </a:r>
-            <a:r>
-              <a:rPr sz="1600" dirty="0">
-                <a:solidFill>
-                  <a:schemeClr val="bg1">
-                    <a:lumMod val="95000"/>
-                  </a:schemeClr>
-                </a:solidFill>
-              </a:rPr>
-              <a:t>(property)</a:t>
-            </a:r>
-            <a:br>
-              <a:rPr sz="1600" dirty="0">
-                <a:solidFill>
-                  <a:schemeClr val="bg1">
-                    <a:lumMod val="95000"/>
-                  </a:schemeClr>
-                </a:solidFill>
-              </a:rPr>
-            </a:br>
-            <a:r>
-              <a:rPr sz="1600" dirty="0">
-                <a:solidFill>
-                  <a:schemeClr val="bg1">
-                    <a:lumMod val="95000"/>
-                  </a:schemeClr>
-                </a:solidFill>
-              </a:rPr>
-              <a:t>    return </a:t>
-            </a:r>
-            <a:r>
-              <a:rPr sz="1600" dirty="0" err="1">
-                <a:solidFill>
-                  <a:schemeClr val="bg1">
-                    <a:lumMod val="95000"/>
-                  </a:schemeClr>
-                </a:solidFill>
-              </a:rPr>
-              <a:t>ctx.GetStub</a:t>
-            </a:r>
-            <a:r>
-              <a:rPr sz="1600" dirty="0">
-                <a:solidFill>
-                  <a:schemeClr val="bg1">
-                    <a:lumMod val="95000"/>
-                  </a:schemeClr>
-                </a:solidFill>
-              </a:rPr>
-              <a:t>().</a:t>
-            </a:r>
-            <a:r>
-              <a:rPr sz="1600" dirty="0" err="1">
-                <a:solidFill>
-                  <a:schemeClr val="bg1">
-                    <a:lumMod val="95000"/>
-                  </a:schemeClr>
-                </a:solidFill>
-              </a:rPr>
-              <a:t>PutState</a:t>
-            </a:r>
-            <a:r>
-              <a:rPr sz="1600" dirty="0">
-                <a:solidFill>
-                  <a:schemeClr val="bg1">
-                    <a:lumMod val="95000"/>
-                  </a:schemeClr>
-                </a:solidFill>
-              </a:rPr>
-              <a:t>(id, </a:t>
-            </a:r>
-            <a:r>
-              <a:rPr sz="1600" dirty="0" err="1">
-                <a:solidFill>
-                  <a:schemeClr val="bg1">
-                    <a:lumMod val="95000"/>
-                  </a:schemeClr>
-                </a:solidFill>
-              </a:rPr>
-              <a:t>propertyJSON</a:t>
-            </a:r>
-            <a:r>
-              <a:rPr sz="1600" dirty="0">
-                <a:solidFill>
-                  <a:schemeClr val="bg1">
-                    <a:lumMod val="95000"/>
-                  </a:schemeClr>
-                </a:solidFill>
-              </a:rPr>
-              <a:t>)</a:t>
-            </a:r>
-            <a:br>
-              <a:rPr sz="1600" dirty="0">
-                <a:solidFill>
-                  <a:schemeClr val="bg1">
-                    <a:lumMod val="95000"/>
-                  </a:schemeClr>
-                </a:solidFill>
-              </a:rPr>
-            </a:br>
+              <a:t>        Buffer.from(JSON.stringify(property)));</a:t>
+            </a:r>
+          </a:p>
+          <a:p>
+            <a:pPr/>
             <a:r>
               <a:rPr sz="1600" dirty="0">
                 <a:solidFill>
